--- a/docs/content/05-teaching-resources/slides/specialism/09-ux-and-ui-design.pptx
+++ b/docs/content/05-teaching-resources/slides/specialism/09-ux-and-ui-design.pptx
@@ -8,12 +8,16 @@
     <p:sldId id="256" r:id="rId7"/>
     <p:sldId id="257" r:id="rId8"/>
     <p:sldId id="258" r:id="rId9"/>
-    <p:sldId id="259" r:id="rId11"/>
+    <p:sldId id="259" r:id="rId10"/>
     <p:sldId id="260" r:id="rId12"/>
     <p:sldId id="261" r:id="rId13"/>
     <p:sldId id="262" r:id="rId14"/>
     <p:sldId id="263" r:id="rId15"/>
     <p:sldId id="264" r:id="rId16"/>
+    <p:sldId id="265" r:id="rId17"/>
+    <p:sldId id="266" r:id="rId18"/>
+    <p:sldId id="267" r:id="rId19"/>
+    <p:sldId id="268" r:id="rId20"/>
   </p:sldIdLst>
   <p:sldSz cx="12191695" cy="6858000" type="screen4x3"/>
   <p:notesSz cx="6858000" cy="9144000"/>
@@ -580,7 +584,22 @@
           <a:lstStyle/>
           <a:p>
             <a:r>
-              <a:t>Give students a few minutes to answer on mini whiteboards or paper, then reveal the answers on the next slide.</a:t>
+              <a:t>Answers:</a:t>
+            </a:r>
+          </a:p>
+          <a:p>
+            <a:r>
+              <a:t>1. Confirmation.</a:t>
+            </a:r>
+          </a:p>
+          <a:p>
+            <a:r>
+              <a:t>2. A simple layout sketch of a screen.</a:t>
+            </a:r>
+          </a:p>
+          <a:p>
+            <a:r>
+              <a:t>3. E.g. an undo button.</a:t>
             </a:r>
           </a:p>
         </p:txBody>
@@ -650,7 +669,22 @@
           <a:lstStyle/>
           <a:p>
             <a:r>
-              <a:t>Talk through any answers the class found difficult.</a:t>
+              <a:t>Answers:</a:t>
+            </a:r>
+          </a:p>
+          <a:p>
+            <a:r>
+              <a:t>1. Feedback through vibration.</a:t>
+            </a:r>
+          </a:p>
+          <a:p>
+            <a:r>
+              <a:t>2. Low contrast is hard to read, especially for visually impaired users.</a:t>
+            </a:r>
+          </a:p>
+          <a:p>
+            <a:r>
+              <a:t>3. Fingers are less precise than a mouse pointer.</a:t>
             </a:r>
           </a:p>
         </p:txBody>
@@ -676,6 +710,146 @@
 </file>
 
 <file path=ppt/notesSlides/notesSlide4.xml><?xml version="1.0" encoding="utf-8"?>
+<p:notes xmlns:a="http://schemas.openxmlformats.org/drawingml/2006/main" xmlns:p="http://schemas.openxmlformats.org/presentationml/2006/main" xmlns:r="http://schemas.openxmlformats.org/officeDocument/2006/relationships">
+  <p:cSld>
+    <p:spTree>
+      <p:nvGrpSpPr>
+        <p:cNvPr id="1" name=""/>
+        <p:cNvGrpSpPr/>
+        <p:nvPr/>
+      </p:nvGrpSpPr>
+      <p:grpSpPr>
+        <a:xfrm>
+          <a:off x="0" y="0"/>
+          <a:ext cx="0" cy="0"/>
+          <a:chOff x="0" y="0"/>
+          <a:chExt cx="0" cy="0"/>
+        </a:xfrm>
+      </p:grpSpPr>
+      <p:sp>
+        <p:nvSpPr>
+          <p:cNvPr id="2" name="Slide Image Placeholder 1"/>
+          <p:cNvSpPr>
+            <a:spLocks noGrp="1"/>
+          </p:cNvSpPr>
+          <p:nvPr>
+            <p:ph type="sldImg" idx="2"/>
+          </p:nvPr>
+        </p:nvSpPr>
+        <p:spPr/>
+      </p:sp>
+      <p:sp>
+        <p:nvSpPr>
+          <p:cNvPr id="3" name="Notes Placeholder 2"/>
+          <p:cNvSpPr>
+            <a:spLocks noGrp="1"/>
+          </p:cNvSpPr>
+          <p:nvPr>
+            <p:ph type="body" idx="3" sz="quarter"/>
+          </p:nvPr>
+        </p:nvSpPr>
+        <p:spPr/>
+        <p:txBody>
+          <a:bodyPr/>
+          <a:lstStyle/>
+          <a:p>
+            <a:r>
+              <a:t>Give students a few minutes to answer on mini whiteboards or paper, then reveal the answers on the next slide.</a:t>
+            </a:r>
+          </a:p>
+        </p:txBody>
+      </p:sp>
+      <p:sp>
+        <p:nvSpPr>
+          <p:cNvPr id="4" name="Slide Number Placeholder 3"/>
+          <p:cNvSpPr>
+            <a:spLocks noGrp="1"/>
+          </p:cNvSpPr>
+          <p:nvPr>
+            <p:ph type="sldNum" idx="5" sz="quarter"/>
+          </p:nvPr>
+        </p:nvSpPr>
+        <p:spPr/>
+      </p:sp>
+    </p:spTree>
+  </p:cSld>
+  <p:clrMapOvr>
+    <a:masterClrMapping/>
+  </p:clrMapOvr>
+</p:notes>
+</file>
+
+<file path=ppt/notesSlides/notesSlide5.xml><?xml version="1.0" encoding="utf-8"?>
+<p:notes xmlns:a="http://schemas.openxmlformats.org/drawingml/2006/main" xmlns:p="http://schemas.openxmlformats.org/presentationml/2006/main" xmlns:r="http://schemas.openxmlformats.org/officeDocument/2006/relationships">
+  <p:cSld>
+    <p:spTree>
+      <p:nvGrpSpPr>
+        <p:cNvPr id="1" name=""/>
+        <p:cNvGrpSpPr/>
+        <p:nvPr/>
+      </p:nvGrpSpPr>
+      <p:grpSpPr>
+        <a:xfrm>
+          <a:off x="0" y="0"/>
+          <a:ext cx="0" cy="0"/>
+          <a:chOff x="0" y="0"/>
+          <a:chExt cx="0" cy="0"/>
+        </a:xfrm>
+      </p:grpSpPr>
+      <p:sp>
+        <p:nvSpPr>
+          <p:cNvPr id="2" name="Slide Image Placeholder 1"/>
+          <p:cNvSpPr>
+            <a:spLocks noGrp="1"/>
+          </p:cNvSpPr>
+          <p:nvPr>
+            <p:ph type="sldImg" idx="2"/>
+          </p:nvPr>
+        </p:nvSpPr>
+        <p:spPr/>
+      </p:sp>
+      <p:sp>
+        <p:nvSpPr>
+          <p:cNvPr id="3" name="Notes Placeholder 2"/>
+          <p:cNvSpPr>
+            <a:spLocks noGrp="1"/>
+          </p:cNvSpPr>
+          <p:nvPr>
+            <p:ph type="body" idx="3" sz="quarter"/>
+          </p:nvPr>
+        </p:nvSpPr>
+        <p:spPr/>
+        <p:txBody>
+          <a:bodyPr/>
+          <a:lstStyle/>
+          <a:p>
+            <a:r>
+              <a:t>Talk through any answers the class found difficult.</a:t>
+            </a:r>
+          </a:p>
+        </p:txBody>
+      </p:sp>
+      <p:sp>
+        <p:nvSpPr>
+          <p:cNvPr id="4" name="Slide Number Placeholder 3"/>
+          <p:cNvSpPr>
+            <a:spLocks noGrp="1"/>
+          </p:cNvSpPr>
+          <p:nvPr>
+            <p:ph type="sldNum" idx="5" sz="quarter"/>
+          </p:nvPr>
+        </p:nvSpPr>
+        <p:spPr/>
+      </p:sp>
+    </p:spTree>
+  </p:cSld>
+  <p:clrMapOvr>
+    <a:masterClrMapping/>
+  </p:clrMapOvr>
+</p:notes>
+</file>
+
+<file path=ppt/notesSlides/notesSlide6.xml><?xml version="1.0" encoding="utf-8"?>
 <p:notes xmlns:a="http://schemas.openxmlformats.org/drawingml/2006/main" xmlns:p="http://schemas.openxmlformats.org/presentationml/2006/main" xmlns:r="http://schemas.openxmlformats.org/officeDocument/2006/relationships">
   <p:cSld>
     <p:spTree>
@@ -4045,6 +4219,2355 @@
 </p:sld>
 </file>
 
+<file path=ppt/slides/slide10.xml><?xml version="1.0" encoding="utf-8"?>
+<p:sld xmlns:a="http://schemas.openxmlformats.org/drawingml/2006/main" xmlns:p="http://schemas.openxmlformats.org/presentationml/2006/main" xmlns:r="http://schemas.openxmlformats.org/officeDocument/2006/relationships">
+  <p:cSld>
+    <p:bg>
+      <p:bgPr>
+        <a:solidFill>
+          <a:srgbClr val="FFFFFF"/>
+        </a:solidFill>
+        <a:effectLst/>
+      </p:bgPr>
+    </p:bg>
+    <p:spTree>
+      <p:nvGrpSpPr>
+        <p:cNvPr id="1" name=""/>
+        <p:cNvGrpSpPr/>
+        <p:nvPr/>
+      </p:nvGrpSpPr>
+      <p:grpSpPr/>
+      <p:sp>
+        <p:nvSpPr>
+          <p:cNvPr id="2" name="TextBox 1"/>
+          <p:cNvSpPr txBox="1"/>
+          <p:nvPr/>
+        </p:nvSpPr>
+        <p:spPr>
+          <a:xfrm>
+            <a:off x="548640" y="320040"/>
+            <a:ext cx="11094415" cy="274320"/>
+          </a:xfrm>
+          <a:prstGeom prst="rect">
+            <a:avLst/>
+          </a:prstGeom>
+          <a:noFill/>
+        </p:spPr>
+        <p:txBody>
+          <a:bodyPr wrap="square" anchor="t" lIns="0" rIns="0" tIns="0" bIns="0"/>
+          <a:lstStyle/>
+          <a:p>
+            <a:pPr algn="l"/>
+            <a:r>
+              <a:rPr sz="1100" b="1" i="0">
+                <a:solidFill>
+                  <a:srgbClr val="54595D"/>
+                </a:solidFill>
+                <a:latin typeface="Calibri"/>
+              </a:rPr>
+              <a:t>OCCUPATIONAL SPECIALISM  ·  Specialism Content Areas 4 and 6</a:t>
+            </a:r>
+          </a:p>
+        </p:txBody>
+      </p:sp>
+      <p:sp>
+        <p:nvSpPr>
+          <p:cNvPr id="3" name="TextBox 2"/>
+          <p:cNvSpPr txBox="1"/>
+          <p:nvPr/>
+        </p:nvSpPr>
+        <p:spPr>
+          <a:xfrm>
+            <a:off x="548640" y="566928"/>
+            <a:ext cx="11094415" cy="822960"/>
+          </a:xfrm>
+          <a:prstGeom prst="rect">
+            <a:avLst/>
+          </a:prstGeom>
+          <a:noFill/>
+        </p:spPr>
+        <p:txBody>
+          <a:bodyPr wrap="square" anchor="ctr" lIns="0" rIns="0" tIns="0" bIns="0"/>
+          <a:lstStyle/>
+          <a:p>
+            <a:pPr algn="l"/>
+            <a:r>
+              <a:rPr sz="3200" b="1" i="0">
+                <a:solidFill>
+                  <a:srgbClr val="03306E"/>
+                </a:solidFill>
+                <a:latin typeface="Cambria"/>
+              </a:rPr>
+              <a:t>Check your understanding</a:t>
+            </a:r>
+          </a:p>
+        </p:txBody>
+      </p:sp>
+      <p:sp>
+        <p:nvSpPr>
+          <p:cNvPr id="4" name="TextBox 3"/>
+          <p:cNvSpPr txBox="1"/>
+          <p:nvPr/>
+        </p:nvSpPr>
+        <p:spPr>
+          <a:xfrm>
+            <a:off x="548640" y="6446520"/>
+            <a:ext cx="8229600" cy="274320"/>
+          </a:xfrm>
+          <a:prstGeom prst="rect">
+            <a:avLst/>
+          </a:prstGeom>
+          <a:noFill/>
+        </p:spPr>
+        <p:txBody>
+          <a:bodyPr wrap="square" anchor="t" lIns="0" rIns="0" tIns="0" bIns="0"/>
+          <a:lstStyle/>
+          <a:p>
+            <a:pPr algn="l"/>
+            <a:r>
+              <a:rPr sz="1000" b="0" i="0">
+                <a:solidFill>
+                  <a:srgbClr val="54595D"/>
+                </a:solidFill>
+                <a:latin typeface="Calibri"/>
+              </a:rPr>
+              <a:t>Digital Software Development T Level  ·  UX and UI Design</a:t>
+            </a:r>
+          </a:p>
+        </p:txBody>
+      </p:sp>
+      <p:sp>
+        <p:nvSpPr>
+          <p:cNvPr id="5" name="TextBox 4"/>
+          <p:cNvSpPr txBox="1"/>
+          <p:nvPr/>
+        </p:nvSpPr>
+        <p:spPr>
+          <a:xfrm>
+            <a:off x="10728655" y="6446520"/>
+            <a:ext cx="914400" cy="274320"/>
+          </a:xfrm>
+          <a:prstGeom prst="rect">
+            <a:avLst/>
+          </a:prstGeom>
+          <a:noFill/>
+        </p:spPr>
+        <p:txBody>
+          <a:bodyPr wrap="square" anchor="t" lIns="0" rIns="0" tIns="0" bIns="0"/>
+          <a:lstStyle/>
+          <a:p>
+            <a:pPr algn="r"/>
+            <a:r>
+              <a:rPr sz="1000" b="0" i="0">
+                <a:solidFill>
+                  <a:srgbClr val="54595D"/>
+                </a:solidFill>
+                <a:latin typeface="Calibri"/>
+              </a:rPr>
+              <a:t>10</a:t>
+            </a:r>
+          </a:p>
+        </p:txBody>
+      </p:sp>
+      <p:sp>
+        <p:nvSpPr>
+          <p:cNvPr id="6" name="Oval 5"/>
+          <p:cNvSpPr/>
+          <p:nvPr/>
+        </p:nvSpPr>
+        <p:spPr>
+          <a:xfrm>
+            <a:off x="548640" y="1618488"/>
+            <a:ext cx="411480" cy="411480"/>
+          </a:xfrm>
+          <a:prstGeom prst="ellipse">
+            <a:avLst/>
+          </a:prstGeom>
+          <a:solidFill>
+            <a:srgbClr val="33C17A"/>
+          </a:solidFill>
+          <a:ln>
+            <a:noFill/>
+          </a:ln>
+          <a:effectLst/>
+        </p:spPr>
+        <p:style>
+          <a:lnRef idx="1">
+            <a:schemeClr val="accent1"/>
+          </a:lnRef>
+          <a:fillRef idx="3">
+            <a:schemeClr val="accent1"/>
+          </a:fillRef>
+          <a:effectRef idx="2">
+            <a:schemeClr val="accent1"/>
+          </a:effectRef>
+          <a:fontRef idx="minor">
+            <a:schemeClr val="lt1"/>
+          </a:fontRef>
+        </p:style>
+        <p:txBody>
+          <a:bodyPr rtlCol="0" anchor="ctr" lIns="0" rIns="0" tIns="0" bIns="0"/>
+          <a:lstStyle/>
+          <a:p>
+            <a:pPr algn="ctr"/>
+            <a:r>
+              <a:rPr sz="1400" b="1">
+                <a:solidFill>
+                  <a:srgbClr val="202122"/>
+                </a:solidFill>
+                <a:latin typeface="Calibri"/>
+              </a:rPr>
+              <a:t>1</a:t>
+            </a:r>
+          </a:p>
+        </p:txBody>
+      </p:sp>
+      <p:sp>
+        <p:nvSpPr>
+          <p:cNvPr id="7" name="TextBox 6"/>
+          <p:cNvSpPr txBox="1"/>
+          <p:nvPr/>
+        </p:nvSpPr>
+        <p:spPr>
+          <a:xfrm>
+            <a:off x="1234440" y="1600200"/>
+            <a:ext cx="10408615" cy="1030986"/>
+          </a:xfrm>
+          <a:prstGeom prst="rect">
+            <a:avLst/>
+          </a:prstGeom>
+          <a:noFill/>
+        </p:spPr>
+        <p:txBody>
+          <a:bodyPr wrap="square" anchor="t" lIns="0" rIns="0" tIns="0" bIns="0"/>
+          <a:lstStyle/>
+          <a:p>
+            <a:pPr algn="l"/>
+            <a:r>
+              <a:rPr sz="2200" b="0" i="0">
+                <a:solidFill>
+                  <a:srgbClr val="202122"/>
+                </a:solidFill>
+                <a:latin typeface="Calibri"/>
+              </a:rPr>
+              <a:t>What is a wireframe?</a:t>
+            </a:r>
+          </a:p>
+        </p:txBody>
+      </p:sp>
+      <p:sp>
+        <p:nvSpPr>
+          <p:cNvPr id="8" name="Oval 7"/>
+          <p:cNvSpPr/>
+          <p:nvPr/>
+        </p:nvSpPr>
+        <p:spPr>
+          <a:xfrm>
+            <a:off x="548640" y="2814066"/>
+            <a:ext cx="411480" cy="411480"/>
+          </a:xfrm>
+          <a:prstGeom prst="ellipse">
+            <a:avLst/>
+          </a:prstGeom>
+          <a:solidFill>
+            <a:srgbClr val="33C17A"/>
+          </a:solidFill>
+          <a:ln>
+            <a:noFill/>
+          </a:ln>
+          <a:effectLst/>
+        </p:spPr>
+        <p:style>
+          <a:lnRef idx="1">
+            <a:schemeClr val="accent1"/>
+          </a:lnRef>
+          <a:fillRef idx="3">
+            <a:schemeClr val="accent1"/>
+          </a:fillRef>
+          <a:effectRef idx="2">
+            <a:schemeClr val="accent1"/>
+          </a:effectRef>
+          <a:fontRef idx="minor">
+            <a:schemeClr val="lt1"/>
+          </a:fontRef>
+        </p:style>
+        <p:txBody>
+          <a:bodyPr rtlCol="0" anchor="ctr" lIns="0" rIns="0" tIns="0" bIns="0"/>
+          <a:lstStyle/>
+          <a:p>
+            <a:pPr algn="ctr"/>
+            <a:r>
+              <a:rPr sz="1400" b="1">
+                <a:solidFill>
+                  <a:srgbClr val="202122"/>
+                </a:solidFill>
+                <a:latin typeface="Calibri"/>
+              </a:rPr>
+              <a:t>2</a:t>
+            </a:r>
+          </a:p>
+        </p:txBody>
+      </p:sp>
+      <p:sp>
+        <p:nvSpPr>
+          <p:cNvPr id="9" name="TextBox 8"/>
+          <p:cNvSpPr txBox="1"/>
+          <p:nvPr/>
+        </p:nvSpPr>
+        <p:spPr>
+          <a:xfrm>
+            <a:off x="1234440" y="2795778"/>
+            <a:ext cx="10408615" cy="1030986"/>
+          </a:xfrm>
+          <a:prstGeom prst="rect">
+            <a:avLst/>
+          </a:prstGeom>
+          <a:noFill/>
+        </p:spPr>
+        <p:txBody>
+          <a:bodyPr wrap="square" anchor="t" lIns="0" rIns="0" tIns="0" bIns="0"/>
+          <a:lstStyle/>
+          <a:p>
+            <a:pPr algn="l"/>
+            <a:r>
+              <a:rPr sz="2200" b="0" i="0">
+                <a:solidFill>
+                  <a:srgbClr val="202122"/>
+                </a:solidFill>
+                <a:latin typeface="Calibri"/>
+              </a:rPr>
+              <a:t>Which UX principle means users know what their action did?</a:t>
+            </a:r>
+          </a:p>
+        </p:txBody>
+      </p:sp>
+      <p:sp>
+        <p:nvSpPr>
+          <p:cNvPr id="10" name="Oval 9"/>
+          <p:cNvSpPr/>
+          <p:nvPr/>
+        </p:nvSpPr>
+        <p:spPr>
+          <a:xfrm>
+            <a:off x="548640" y="4009644"/>
+            <a:ext cx="411480" cy="411480"/>
+          </a:xfrm>
+          <a:prstGeom prst="ellipse">
+            <a:avLst/>
+          </a:prstGeom>
+          <a:solidFill>
+            <a:srgbClr val="33C17A"/>
+          </a:solidFill>
+          <a:ln>
+            <a:noFill/>
+          </a:ln>
+          <a:effectLst/>
+        </p:spPr>
+        <p:style>
+          <a:lnRef idx="1">
+            <a:schemeClr val="accent1"/>
+          </a:lnRef>
+          <a:fillRef idx="3">
+            <a:schemeClr val="accent1"/>
+          </a:fillRef>
+          <a:effectRef idx="2">
+            <a:schemeClr val="accent1"/>
+          </a:effectRef>
+          <a:fontRef idx="minor">
+            <a:schemeClr val="lt1"/>
+          </a:fontRef>
+        </p:style>
+        <p:txBody>
+          <a:bodyPr rtlCol="0" anchor="ctr" lIns="0" rIns="0" tIns="0" bIns="0"/>
+          <a:lstStyle/>
+          <a:p>
+            <a:pPr algn="ctr"/>
+            <a:r>
+              <a:rPr sz="1400" b="1">
+                <a:solidFill>
+                  <a:srgbClr val="202122"/>
+                </a:solidFill>
+                <a:latin typeface="Calibri"/>
+              </a:rPr>
+              <a:t>3</a:t>
+            </a:r>
+          </a:p>
+        </p:txBody>
+      </p:sp>
+      <p:sp>
+        <p:nvSpPr>
+          <p:cNvPr id="11" name="TextBox 10"/>
+          <p:cNvSpPr txBox="1"/>
+          <p:nvPr/>
+        </p:nvSpPr>
+        <p:spPr>
+          <a:xfrm>
+            <a:off x="1234440" y="3991356"/>
+            <a:ext cx="10408615" cy="1030986"/>
+          </a:xfrm>
+          <a:prstGeom prst="rect">
+            <a:avLst/>
+          </a:prstGeom>
+          <a:noFill/>
+        </p:spPr>
+        <p:txBody>
+          <a:bodyPr wrap="square" anchor="t" lIns="0" rIns="0" tIns="0" bIns="0"/>
+          <a:lstStyle/>
+          <a:p>
+            <a:pPr algn="l"/>
+            <a:r>
+              <a:rPr sz="2200" b="0" i="0">
+                <a:solidFill>
+                  <a:srgbClr val="202122"/>
+                </a:solidFill>
+                <a:latin typeface="Calibri"/>
+              </a:rPr>
+              <a:t>Why does contrast matter?</a:t>
+            </a:r>
+          </a:p>
+        </p:txBody>
+      </p:sp>
+      <p:sp>
+        <p:nvSpPr>
+          <p:cNvPr id="12" name="Oval 11"/>
+          <p:cNvSpPr/>
+          <p:nvPr/>
+        </p:nvSpPr>
+        <p:spPr>
+          <a:xfrm>
+            <a:off x="548640" y="5205221"/>
+            <a:ext cx="411480" cy="411480"/>
+          </a:xfrm>
+          <a:prstGeom prst="ellipse">
+            <a:avLst/>
+          </a:prstGeom>
+          <a:solidFill>
+            <a:srgbClr val="33C17A"/>
+          </a:solidFill>
+          <a:ln>
+            <a:noFill/>
+          </a:ln>
+          <a:effectLst/>
+        </p:spPr>
+        <p:style>
+          <a:lnRef idx="1">
+            <a:schemeClr val="accent1"/>
+          </a:lnRef>
+          <a:fillRef idx="3">
+            <a:schemeClr val="accent1"/>
+          </a:fillRef>
+          <a:effectRef idx="2">
+            <a:schemeClr val="accent1"/>
+          </a:effectRef>
+          <a:fontRef idx="minor">
+            <a:schemeClr val="lt1"/>
+          </a:fontRef>
+        </p:style>
+        <p:txBody>
+          <a:bodyPr rtlCol="0" anchor="ctr" lIns="0" rIns="0" tIns="0" bIns="0"/>
+          <a:lstStyle/>
+          <a:p>
+            <a:pPr algn="ctr"/>
+            <a:r>
+              <a:rPr sz="1400" b="1">
+                <a:solidFill>
+                  <a:srgbClr val="202122"/>
+                </a:solidFill>
+                <a:latin typeface="Calibri"/>
+              </a:rPr>
+              <a:t>4</a:t>
+            </a:r>
+          </a:p>
+        </p:txBody>
+      </p:sp>
+      <p:sp>
+        <p:nvSpPr>
+          <p:cNvPr id="13" name="TextBox 12"/>
+          <p:cNvSpPr txBox="1"/>
+          <p:nvPr/>
+        </p:nvSpPr>
+        <p:spPr>
+          <a:xfrm>
+            <a:off x="1234440" y="5186933"/>
+            <a:ext cx="10408615" cy="1030986"/>
+          </a:xfrm>
+          <a:prstGeom prst="rect">
+            <a:avLst/>
+          </a:prstGeom>
+          <a:noFill/>
+        </p:spPr>
+        <p:txBody>
+          <a:bodyPr wrap="square" anchor="t" lIns="0" rIns="0" tIns="0" bIns="0"/>
+          <a:lstStyle/>
+          <a:p>
+            <a:pPr algn="l"/>
+            <a:r>
+              <a:rPr sz="2200" b="0" i="0">
+                <a:solidFill>
+                  <a:srgbClr val="202122"/>
+                </a:solidFill>
+                <a:latin typeface="Calibri"/>
+              </a:rPr>
+              <a:t>Give one example of haptic feedback.</a:t>
+            </a:r>
+          </a:p>
+        </p:txBody>
+      </p:sp>
+    </p:spTree>
+  </p:cSld>
+  <p:clrMapOvr>
+    <a:masterClrMapping/>
+  </p:clrMapOvr>
+</p:sld>
+</file>
+
+<file path=ppt/slides/slide11.xml><?xml version="1.0" encoding="utf-8"?>
+<p:sld xmlns:a="http://schemas.openxmlformats.org/drawingml/2006/main" xmlns:p="http://schemas.openxmlformats.org/presentationml/2006/main" xmlns:r="http://schemas.openxmlformats.org/officeDocument/2006/relationships">
+  <p:cSld>
+    <p:bg>
+      <p:bgPr>
+        <a:solidFill>
+          <a:srgbClr val="FFFFFF"/>
+        </a:solidFill>
+        <a:effectLst/>
+      </p:bgPr>
+    </p:bg>
+    <p:spTree>
+      <p:nvGrpSpPr>
+        <p:cNvPr id="1" name=""/>
+        <p:cNvGrpSpPr/>
+        <p:nvPr/>
+      </p:nvGrpSpPr>
+      <p:grpSpPr/>
+      <p:sp>
+        <p:nvSpPr>
+          <p:cNvPr id="2" name="TextBox 1"/>
+          <p:cNvSpPr txBox="1"/>
+          <p:nvPr/>
+        </p:nvSpPr>
+        <p:spPr>
+          <a:xfrm>
+            <a:off x="548640" y="320040"/>
+            <a:ext cx="11094415" cy="274320"/>
+          </a:xfrm>
+          <a:prstGeom prst="rect">
+            <a:avLst/>
+          </a:prstGeom>
+          <a:noFill/>
+        </p:spPr>
+        <p:txBody>
+          <a:bodyPr wrap="square" anchor="t" lIns="0" rIns="0" tIns="0" bIns="0"/>
+          <a:lstStyle/>
+          <a:p>
+            <a:pPr algn="l"/>
+            <a:r>
+              <a:rPr sz="1100" b="1" i="0">
+                <a:solidFill>
+                  <a:srgbClr val="54595D"/>
+                </a:solidFill>
+                <a:latin typeface="Calibri"/>
+              </a:rPr>
+              <a:t>OCCUPATIONAL SPECIALISM  ·  Specialism Content Areas 4 and 6</a:t>
+            </a:r>
+          </a:p>
+        </p:txBody>
+      </p:sp>
+      <p:sp>
+        <p:nvSpPr>
+          <p:cNvPr id="3" name="TextBox 2"/>
+          <p:cNvSpPr txBox="1"/>
+          <p:nvPr/>
+        </p:nvSpPr>
+        <p:spPr>
+          <a:xfrm>
+            <a:off x="548640" y="566928"/>
+            <a:ext cx="11094415" cy="822960"/>
+          </a:xfrm>
+          <a:prstGeom prst="rect">
+            <a:avLst/>
+          </a:prstGeom>
+          <a:noFill/>
+        </p:spPr>
+        <p:txBody>
+          <a:bodyPr wrap="square" anchor="ctr" lIns="0" rIns="0" tIns="0" bIns="0"/>
+          <a:lstStyle/>
+          <a:p>
+            <a:pPr algn="l"/>
+            <a:r>
+              <a:rPr sz="3200" b="1" i="0">
+                <a:solidFill>
+                  <a:srgbClr val="03306E"/>
+                </a:solidFill>
+                <a:latin typeface="Cambria"/>
+              </a:rPr>
+              <a:t>Answers</a:t>
+            </a:r>
+          </a:p>
+        </p:txBody>
+      </p:sp>
+      <p:sp>
+        <p:nvSpPr>
+          <p:cNvPr id="4" name="TextBox 3"/>
+          <p:cNvSpPr txBox="1"/>
+          <p:nvPr/>
+        </p:nvSpPr>
+        <p:spPr>
+          <a:xfrm>
+            <a:off x="548640" y="6446520"/>
+            <a:ext cx="8229600" cy="274320"/>
+          </a:xfrm>
+          <a:prstGeom prst="rect">
+            <a:avLst/>
+          </a:prstGeom>
+          <a:noFill/>
+        </p:spPr>
+        <p:txBody>
+          <a:bodyPr wrap="square" anchor="t" lIns="0" rIns="0" tIns="0" bIns="0"/>
+          <a:lstStyle/>
+          <a:p>
+            <a:pPr algn="l"/>
+            <a:r>
+              <a:rPr sz="1000" b="0" i="0">
+                <a:solidFill>
+                  <a:srgbClr val="54595D"/>
+                </a:solidFill>
+                <a:latin typeface="Calibri"/>
+              </a:rPr>
+              <a:t>Digital Software Development T Level  ·  UX and UI Design</a:t>
+            </a:r>
+          </a:p>
+        </p:txBody>
+      </p:sp>
+      <p:sp>
+        <p:nvSpPr>
+          <p:cNvPr id="5" name="TextBox 4"/>
+          <p:cNvSpPr txBox="1"/>
+          <p:nvPr/>
+        </p:nvSpPr>
+        <p:spPr>
+          <a:xfrm>
+            <a:off x="10728655" y="6446520"/>
+            <a:ext cx="914400" cy="274320"/>
+          </a:xfrm>
+          <a:prstGeom prst="rect">
+            <a:avLst/>
+          </a:prstGeom>
+          <a:noFill/>
+        </p:spPr>
+        <p:txBody>
+          <a:bodyPr wrap="square" anchor="t" lIns="0" rIns="0" tIns="0" bIns="0"/>
+          <a:lstStyle/>
+          <a:p>
+            <a:pPr algn="r"/>
+            <a:r>
+              <a:rPr sz="1000" b="0" i="0">
+                <a:solidFill>
+                  <a:srgbClr val="54595D"/>
+                </a:solidFill>
+                <a:latin typeface="Calibri"/>
+              </a:rPr>
+              <a:t>11</a:t>
+            </a:r>
+          </a:p>
+        </p:txBody>
+      </p:sp>
+      <p:sp>
+        <p:nvSpPr>
+          <p:cNvPr id="6" name="Oval 5"/>
+          <p:cNvSpPr/>
+          <p:nvPr/>
+        </p:nvSpPr>
+        <p:spPr>
+          <a:xfrm>
+            <a:off x="548640" y="1618488"/>
+            <a:ext cx="411480" cy="411480"/>
+          </a:xfrm>
+          <a:prstGeom prst="ellipse">
+            <a:avLst/>
+          </a:prstGeom>
+          <a:solidFill>
+            <a:srgbClr val="33C17A"/>
+          </a:solidFill>
+          <a:ln>
+            <a:noFill/>
+          </a:ln>
+          <a:effectLst/>
+        </p:spPr>
+        <p:style>
+          <a:lnRef idx="1">
+            <a:schemeClr val="accent1"/>
+          </a:lnRef>
+          <a:fillRef idx="3">
+            <a:schemeClr val="accent1"/>
+          </a:fillRef>
+          <a:effectRef idx="2">
+            <a:schemeClr val="accent1"/>
+          </a:effectRef>
+          <a:fontRef idx="minor">
+            <a:schemeClr val="lt1"/>
+          </a:fontRef>
+        </p:style>
+        <p:txBody>
+          <a:bodyPr rtlCol="0" anchor="ctr" lIns="0" rIns="0" tIns="0" bIns="0"/>
+          <a:lstStyle/>
+          <a:p>
+            <a:pPr algn="ctr"/>
+            <a:r>
+              <a:rPr sz="1400" b="1">
+                <a:solidFill>
+                  <a:srgbClr val="202122"/>
+                </a:solidFill>
+                <a:latin typeface="Calibri"/>
+              </a:rPr>
+              <a:t>1</a:t>
+            </a:r>
+          </a:p>
+        </p:txBody>
+      </p:sp>
+      <p:sp>
+        <p:nvSpPr>
+          <p:cNvPr id="7" name="TextBox 6"/>
+          <p:cNvSpPr txBox="1"/>
+          <p:nvPr/>
+        </p:nvSpPr>
+        <p:spPr>
+          <a:xfrm>
+            <a:off x="1234440" y="1600200"/>
+            <a:ext cx="10408615" cy="1030986"/>
+          </a:xfrm>
+          <a:prstGeom prst="rect">
+            <a:avLst/>
+          </a:prstGeom>
+          <a:noFill/>
+        </p:spPr>
+        <p:txBody>
+          <a:bodyPr wrap="square" anchor="t" lIns="0" rIns="0" tIns="0" bIns="0"/>
+          <a:lstStyle/>
+          <a:p>
+            <a:pPr algn="l"/>
+            <a:r>
+              <a:rPr sz="1800" b="0" i="0">
+                <a:solidFill>
+                  <a:srgbClr val="54595D"/>
+                </a:solidFill>
+                <a:latin typeface="Calibri"/>
+              </a:rPr>
+              <a:t>What is a wireframe?</a:t>
+            </a:r>
+          </a:p>
+          <a:p>
+            <a:r>
+              <a:rPr sz="1800" b="1">
+                <a:solidFill>
+                  <a:srgbClr val="03306E"/>
+                </a:solidFill>
+                <a:latin typeface="Calibri"/>
+              </a:rPr>
+              <a:t>A simple layout sketch of a screen without final styling.</a:t>
+            </a:r>
+          </a:p>
+        </p:txBody>
+      </p:sp>
+      <p:sp>
+        <p:nvSpPr>
+          <p:cNvPr id="8" name="Oval 7"/>
+          <p:cNvSpPr/>
+          <p:nvPr/>
+        </p:nvSpPr>
+        <p:spPr>
+          <a:xfrm>
+            <a:off x="548640" y="2814066"/>
+            <a:ext cx="411480" cy="411480"/>
+          </a:xfrm>
+          <a:prstGeom prst="ellipse">
+            <a:avLst/>
+          </a:prstGeom>
+          <a:solidFill>
+            <a:srgbClr val="33C17A"/>
+          </a:solidFill>
+          <a:ln>
+            <a:noFill/>
+          </a:ln>
+          <a:effectLst/>
+        </p:spPr>
+        <p:style>
+          <a:lnRef idx="1">
+            <a:schemeClr val="accent1"/>
+          </a:lnRef>
+          <a:fillRef idx="3">
+            <a:schemeClr val="accent1"/>
+          </a:fillRef>
+          <a:effectRef idx="2">
+            <a:schemeClr val="accent1"/>
+          </a:effectRef>
+          <a:fontRef idx="minor">
+            <a:schemeClr val="lt1"/>
+          </a:fontRef>
+        </p:style>
+        <p:txBody>
+          <a:bodyPr rtlCol="0" anchor="ctr" lIns="0" rIns="0" tIns="0" bIns="0"/>
+          <a:lstStyle/>
+          <a:p>
+            <a:pPr algn="ctr"/>
+            <a:r>
+              <a:rPr sz="1400" b="1">
+                <a:solidFill>
+                  <a:srgbClr val="202122"/>
+                </a:solidFill>
+                <a:latin typeface="Calibri"/>
+              </a:rPr>
+              <a:t>2</a:t>
+            </a:r>
+          </a:p>
+        </p:txBody>
+      </p:sp>
+      <p:sp>
+        <p:nvSpPr>
+          <p:cNvPr id="9" name="TextBox 8"/>
+          <p:cNvSpPr txBox="1"/>
+          <p:nvPr/>
+        </p:nvSpPr>
+        <p:spPr>
+          <a:xfrm>
+            <a:off x="1234440" y="2795778"/>
+            <a:ext cx="10408615" cy="1030986"/>
+          </a:xfrm>
+          <a:prstGeom prst="rect">
+            <a:avLst/>
+          </a:prstGeom>
+          <a:noFill/>
+        </p:spPr>
+        <p:txBody>
+          <a:bodyPr wrap="square" anchor="t" lIns="0" rIns="0" tIns="0" bIns="0"/>
+          <a:lstStyle/>
+          <a:p>
+            <a:pPr algn="l"/>
+            <a:r>
+              <a:rPr sz="1800" b="0" i="0">
+                <a:solidFill>
+                  <a:srgbClr val="54595D"/>
+                </a:solidFill>
+                <a:latin typeface="Calibri"/>
+              </a:rPr>
+              <a:t>Which UX principle means users know what their action did?</a:t>
+            </a:r>
+          </a:p>
+          <a:p>
+            <a:r>
+              <a:rPr sz="1800" b="1">
+                <a:solidFill>
+                  <a:srgbClr val="03306E"/>
+                </a:solidFill>
+                <a:latin typeface="Calibri"/>
+              </a:rPr>
+              <a:t>Confirmation.</a:t>
+            </a:r>
+          </a:p>
+        </p:txBody>
+      </p:sp>
+      <p:sp>
+        <p:nvSpPr>
+          <p:cNvPr id="10" name="Oval 9"/>
+          <p:cNvSpPr/>
+          <p:nvPr/>
+        </p:nvSpPr>
+        <p:spPr>
+          <a:xfrm>
+            <a:off x="548640" y="4009644"/>
+            <a:ext cx="411480" cy="411480"/>
+          </a:xfrm>
+          <a:prstGeom prst="ellipse">
+            <a:avLst/>
+          </a:prstGeom>
+          <a:solidFill>
+            <a:srgbClr val="33C17A"/>
+          </a:solidFill>
+          <a:ln>
+            <a:noFill/>
+          </a:ln>
+          <a:effectLst/>
+        </p:spPr>
+        <p:style>
+          <a:lnRef idx="1">
+            <a:schemeClr val="accent1"/>
+          </a:lnRef>
+          <a:fillRef idx="3">
+            <a:schemeClr val="accent1"/>
+          </a:fillRef>
+          <a:effectRef idx="2">
+            <a:schemeClr val="accent1"/>
+          </a:effectRef>
+          <a:fontRef idx="minor">
+            <a:schemeClr val="lt1"/>
+          </a:fontRef>
+        </p:style>
+        <p:txBody>
+          <a:bodyPr rtlCol="0" anchor="ctr" lIns="0" rIns="0" tIns="0" bIns="0"/>
+          <a:lstStyle/>
+          <a:p>
+            <a:pPr algn="ctr"/>
+            <a:r>
+              <a:rPr sz="1400" b="1">
+                <a:solidFill>
+                  <a:srgbClr val="202122"/>
+                </a:solidFill>
+                <a:latin typeface="Calibri"/>
+              </a:rPr>
+              <a:t>3</a:t>
+            </a:r>
+          </a:p>
+        </p:txBody>
+      </p:sp>
+      <p:sp>
+        <p:nvSpPr>
+          <p:cNvPr id="11" name="TextBox 10"/>
+          <p:cNvSpPr txBox="1"/>
+          <p:nvPr/>
+        </p:nvSpPr>
+        <p:spPr>
+          <a:xfrm>
+            <a:off x="1234440" y="3991356"/>
+            <a:ext cx="10408615" cy="1030986"/>
+          </a:xfrm>
+          <a:prstGeom prst="rect">
+            <a:avLst/>
+          </a:prstGeom>
+          <a:noFill/>
+        </p:spPr>
+        <p:txBody>
+          <a:bodyPr wrap="square" anchor="t" lIns="0" rIns="0" tIns="0" bIns="0"/>
+          <a:lstStyle/>
+          <a:p>
+            <a:pPr algn="l"/>
+            <a:r>
+              <a:rPr sz="1800" b="0" i="0">
+                <a:solidFill>
+                  <a:srgbClr val="54595D"/>
+                </a:solidFill>
+                <a:latin typeface="Calibri"/>
+              </a:rPr>
+              <a:t>Why does contrast matter?</a:t>
+            </a:r>
+          </a:p>
+          <a:p>
+            <a:r>
+              <a:rPr sz="1800" b="1">
+                <a:solidFill>
+                  <a:srgbClr val="03306E"/>
+                </a:solidFill>
+                <a:latin typeface="Calibri"/>
+              </a:rPr>
+              <a:t>Low contrast makes text hard to read, especially for visually impaired users.</a:t>
+            </a:r>
+          </a:p>
+        </p:txBody>
+      </p:sp>
+      <p:sp>
+        <p:nvSpPr>
+          <p:cNvPr id="12" name="Oval 11"/>
+          <p:cNvSpPr/>
+          <p:nvPr/>
+        </p:nvSpPr>
+        <p:spPr>
+          <a:xfrm>
+            <a:off x="548640" y="5205221"/>
+            <a:ext cx="411480" cy="411480"/>
+          </a:xfrm>
+          <a:prstGeom prst="ellipse">
+            <a:avLst/>
+          </a:prstGeom>
+          <a:solidFill>
+            <a:srgbClr val="33C17A"/>
+          </a:solidFill>
+          <a:ln>
+            <a:noFill/>
+          </a:ln>
+          <a:effectLst/>
+        </p:spPr>
+        <p:style>
+          <a:lnRef idx="1">
+            <a:schemeClr val="accent1"/>
+          </a:lnRef>
+          <a:fillRef idx="3">
+            <a:schemeClr val="accent1"/>
+          </a:fillRef>
+          <a:effectRef idx="2">
+            <a:schemeClr val="accent1"/>
+          </a:effectRef>
+          <a:fontRef idx="minor">
+            <a:schemeClr val="lt1"/>
+          </a:fontRef>
+        </p:style>
+        <p:txBody>
+          <a:bodyPr rtlCol="0" anchor="ctr" lIns="0" rIns="0" tIns="0" bIns="0"/>
+          <a:lstStyle/>
+          <a:p>
+            <a:pPr algn="ctr"/>
+            <a:r>
+              <a:rPr sz="1400" b="1">
+                <a:solidFill>
+                  <a:srgbClr val="202122"/>
+                </a:solidFill>
+                <a:latin typeface="Calibri"/>
+              </a:rPr>
+              <a:t>4</a:t>
+            </a:r>
+          </a:p>
+        </p:txBody>
+      </p:sp>
+      <p:sp>
+        <p:nvSpPr>
+          <p:cNvPr id="13" name="TextBox 12"/>
+          <p:cNvSpPr txBox="1"/>
+          <p:nvPr/>
+        </p:nvSpPr>
+        <p:spPr>
+          <a:xfrm>
+            <a:off x="1234440" y="5186933"/>
+            <a:ext cx="10408615" cy="1030986"/>
+          </a:xfrm>
+          <a:prstGeom prst="rect">
+            <a:avLst/>
+          </a:prstGeom>
+          <a:noFill/>
+        </p:spPr>
+        <p:txBody>
+          <a:bodyPr wrap="square" anchor="t" lIns="0" rIns="0" tIns="0" bIns="0"/>
+          <a:lstStyle/>
+          <a:p>
+            <a:pPr algn="l"/>
+            <a:r>
+              <a:rPr sz="1800" b="0" i="0">
+                <a:solidFill>
+                  <a:srgbClr val="54595D"/>
+                </a:solidFill>
+                <a:latin typeface="Calibri"/>
+              </a:rPr>
+              <a:t>Give one example of haptic feedback.</a:t>
+            </a:r>
+          </a:p>
+          <a:p>
+            <a:r>
+              <a:rPr sz="1800" b="1">
+                <a:solidFill>
+                  <a:srgbClr val="03306E"/>
+                </a:solidFill>
+                <a:latin typeface="Calibri"/>
+              </a:rPr>
+              <a:t>A phone vibrating when you press a button.</a:t>
+            </a:r>
+          </a:p>
+        </p:txBody>
+      </p:sp>
+    </p:spTree>
+  </p:cSld>
+  <p:clrMapOvr>
+    <a:masterClrMapping/>
+  </p:clrMapOvr>
+</p:sld>
+</file>
+
+<file path=ppt/slides/slide12.xml><?xml version="1.0" encoding="utf-8"?>
+<p:sld xmlns:a="http://schemas.openxmlformats.org/drawingml/2006/main" xmlns:p="http://schemas.openxmlformats.org/presentationml/2006/main" xmlns:r="http://schemas.openxmlformats.org/officeDocument/2006/relationships">
+  <p:cSld>
+    <p:bg>
+      <p:bgPr>
+        <a:solidFill>
+          <a:srgbClr val="FFFFFF"/>
+        </a:solidFill>
+        <a:effectLst/>
+      </p:bgPr>
+    </p:bg>
+    <p:spTree>
+      <p:nvGrpSpPr>
+        <p:cNvPr id="1" name=""/>
+        <p:cNvGrpSpPr/>
+        <p:nvPr/>
+      </p:nvGrpSpPr>
+      <p:grpSpPr/>
+      <p:sp>
+        <p:nvSpPr>
+          <p:cNvPr id="2" name="TextBox 1"/>
+          <p:cNvSpPr txBox="1"/>
+          <p:nvPr/>
+        </p:nvSpPr>
+        <p:spPr>
+          <a:xfrm>
+            <a:off x="548640" y="320040"/>
+            <a:ext cx="11094415" cy="274320"/>
+          </a:xfrm>
+          <a:prstGeom prst="rect">
+            <a:avLst/>
+          </a:prstGeom>
+          <a:noFill/>
+        </p:spPr>
+        <p:txBody>
+          <a:bodyPr wrap="square" anchor="t" lIns="0" rIns="0" tIns="0" bIns="0"/>
+          <a:lstStyle/>
+          <a:p>
+            <a:pPr algn="l"/>
+            <a:r>
+              <a:rPr sz="1100" b="1" i="0">
+                <a:solidFill>
+                  <a:srgbClr val="54595D"/>
+                </a:solidFill>
+                <a:latin typeface="Calibri"/>
+              </a:rPr>
+              <a:t>OCCUPATIONAL SPECIALISM  ·  Specialism Content Areas 4 and 6</a:t>
+            </a:r>
+          </a:p>
+        </p:txBody>
+      </p:sp>
+      <p:sp>
+        <p:nvSpPr>
+          <p:cNvPr id="3" name="TextBox 2"/>
+          <p:cNvSpPr txBox="1"/>
+          <p:nvPr/>
+        </p:nvSpPr>
+        <p:spPr>
+          <a:xfrm>
+            <a:off x="548640" y="566928"/>
+            <a:ext cx="11094415" cy="822960"/>
+          </a:xfrm>
+          <a:prstGeom prst="rect">
+            <a:avLst/>
+          </a:prstGeom>
+          <a:noFill/>
+        </p:spPr>
+        <p:txBody>
+          <a:bodyPr wrap="square" anchor="ctr" lIns="0" rIns="0" tIns="0" bIns="0"/>
+          <a:lstStyle/>
+          <a:p>
+            <a:pPr algn="l"/>
+            <a:r>
+              <a:rPr sz="3200" b="1" i="0">
+                <a:solidFill>
+                  <a:srgbClr val="03306E"/>
+                </a:solidFill>
+                <a:latin typeface="Cambria"/>
+              </a:rPr>
+              <a:t>Activity: Wireframe and critique</a:t>
+            </a:r>
+          </a:p>
+        </p:txBody>
+      </p:sp>
+      <p:sp>
+        <p:nvSpPr>
+          <p:cNvPr id="4" name="TextBox 3"/>
+          <p:cNvSpPr txBox="1"/>
+          <p:nvPr/>
+        </p:nvSpPr>
+        <p:spPr>
+          <a:xfrm>
+            <a:off x="548640" y="6446520"/>
+            <a:ext cx="8229600" cy="274320"/>
+          </a:xfrm>
+          <a:prstGeom prst="rect">
+            <a:avLst/>
+          </a:prstGeom>
+          <a:noFill/>
+        </p:spPr>
+        <p:txBody>
+          <a:bodyPr wrap="square" anchor="t" lIns="0" rIns="0" tIns="0" bIns="0"/>
+          <a:lstStyle/>
+          <a:p>
+            <a:pPr algn="l"/>
+            <a:r>
+              <a:rPr sz="1000" b="0" i="0">
+                <a:solidFill>
+                  <a:srgbClr val="54595D"/>
+                </a:solidFill>
+                <a:latin typeface="Calibri"/>
+              </a:rPr>
+              <a:t>Digital Software Development T Level  ·  UX and UI Design</a:t>
+            </a:r>
+          </a:p>
+        </p:txBody>
+      </p:sp>
+      <p:sp>
+        <p:nvSpPr>
+          <p:cNvPr id="5" name="TextBox 4"/>
+          <p:cNvSpPr txBox="1"/>
+          <p:nvPr/>
+        </p:nvSpPr>
+        <p:spPr>
+          <a:xfrm>
+            <a:off x="10728655" y="6446520"/>
+            <a:ext cx="914400" cy="274320"/>
+          </a:xfrm>
+          <a:prstGeom prst="rect">
+            <a:avLst/>
+          </a:prstGeom>
+          <a:noFill/>
+        </p:spPr>
+        <p:txBody>
+          <a:bodyPr wrap="square" anchor="t" lIns="0" rIns="0" tIns="0" bIns="0"/>
+          <a:lstStyle/>
+          <a:p>
+            <a:pPr algn="r"/>
+            <a:r>
+              <a:rPr sz="1000" b="0" i="0">
+                <a:solidFill>
+                  <a:srgbClr val="54595D"/>
+                </a:solidFill>
+                <a:latin typeface="Calibri"/>
+              </a:rPr>
+              <a:t>12</a:t>
+            </a:r>
+          </a:p>
+        </p:txBody>
+      </p:sp>
+      <p:sp>
+        <p:nvSpPr>
+          <p:cNvPr id="6" name="Rounded Rectangle 5"/>
+          <p:cNvSpPr/>
+          <p:nvPr/>
+        </p:nvSpPr>
+        <p:spPr>
+          <a:xfrm>
+            <a:off x="548640" y="1508760"/>
+            <a:ext cx="2011680" cy="457200"/>
+          </a:xfrm>
+          <a:prstGeom prst="roundRect">
+            <a:avLst>
+              <a:gd name="adj" fmla="val 50000"/>
+            </a:avLst>
+          </a:prstGeom>
+          <a:solidFill>
+            <a:srgbClr val="33C17A"/>
+          </a:solidFill>
+          <a:ln>
+            <a:noFill/>
+          </a:ln>
+          <a:effectLst/>
+        </p:spPr>
+        <p:style>
+          <a:lnRef idx="1">
+            <a:schemeClr val="accent1"/>
+          </a:lnRef>
+          <a:fillRef idx="3">
+            <a:schemeClr val="accent1"/>
+          </a:fillRef>
+          <a:effectRef idx="2">
+            <a:schemeClr val="accent1"/>
+          </a:effectRef>
+          <a:fontRef idx="minor">
+            <a:schemeClr val="lt1"/>
+          </a:fontRef>
+        </p:style>
+        <p:txBody>
+          <a:bodyPr rtlCol="0" anchor="ctr"/>
+          <a:lstStyle/>
+          <a:p/>
+        </p:txBody>
+      </p:sp>
+      <p:sp>
+        <p:nvSpPr>
+          <p:cNvPr id="7" name="TextBox 6"/>
+          <p:cNvSpPr txBox="1"/>
+          <p:nvPr/>
+        </p:nvSpPr>
+        <p:spPr>
+          <a:xfrm>
+            <a:off x="548640" y="1508760"/>
+            <a:ext cx="2011680" cy="457200"/>
+          </a:xfrm>
+          <a:prstGeom prst="rect">
+            <a:avLst/>
+          </a:prstGeom>
+          <a:noFill/>
+        </p:spPr>
+        <p:txBody>
+          <a:bodyPr wrap="square" anchor="ctr" lIns="0" rIns="0" tIns="0" bIns="0"/>
+          <a:lstStyle/>
+          <a:p>
+            <a:pPr algn="ctr"/>
+            <a:r>
+              <a:rPr sz="1400" b="1" i="0">
+                <a:solidFill>
+                  <a:srgbClr val="202122"/>
+                </a:solidFill>
+                <a:latin typeface="Calibri"/>
+              </a:rPr>
+              <a:t>30 minutes</a:t>
+            </a:r>
+          </a:p>
+        </p:txBody>
+      </p:sp>
+      <p:sp>
+        <p:nvSpPr>
+          <p:cNvPr id="8" name="TextBox 7"/>
+          <p:cNvSpPr txBox="1"/>
+          <p:nvPr/>
+        </p:nvSpPr>
+        <p:spPr>
+          <a:xfrm>
+            <a:off x="2743200" y="1508760"/>
+            <a:ext cx="4754880" cy="457200"/>
+          </a:xfrm>
+          <a:prstGeom prst="rect">
+            <a:avLst/>
+          </a:prstGeom>
+          <a:noFill/>
+        </p:spPr>
+        <p:txBody>
+          <a:bodyPr wrap="square" anchor="ctr" lIns="0" rIns="0" tIns="0" bIns="0"/>
+          <a:lstStyle/>
+          <a:p>
+            <a:pPr algn="l"/>
+            <a:r>
+              <a:rPr sz="1400" b="0" i="1">
+                <a:solidFill>
+                  <a:srgbClr val="54595D"/>
+                </a:solidFill>
+                <a:latin typeface="Calibri"/>
+              </a:rPr>
+              <a:t>Pairs</a:t>
+            </a:r>
+          </a:p>
+        </p:txBody>
+      </p:sp>
+      <p:sp>
+        <p:nvSpPr>
+          <p:cNvPr id="9" name="Oval 8"/>
+          <p:cNvSpPr/>
+          <p:nvPr/>
+        </p:nvSpPr>
+        <p:spPr>
+          <a:xfrm>
+            <a:off x="548640" y="2482596"/>
+            <a:ext cx="384048" cy="384048"/>
+          </a:xfrm>
+          <a:prstGeom prst="ellipse">
+            <a:avLst/>
+          </a:prstGeom>
+          <a:solidFill>
+            <a:srgbClr val="0645AD"/>
+          </a:solidFill>
+          <a:ln>
+            <a:noFill/>
+          </a:ln>
+          <a:effectLst/>
+        </p:spPr>
+        <p:style>
+          <a:lnRef idx="1">
+            <a:schemeClr val="accent1"/>
+          </a:lnRef>
+          <a:fillRef idx="3">
+            <a:schemeClr val="accent1"/>
+          </a:fillRef>
+          <a:effectRef idx="2">
+            <a:schemeClr val="accent1"/>
+          </a:effectRef>
+          <a:fontRef idx="minor">
+            <a:schemeClr val="lt1"/>
+          </a:fontRef>
+        </p:style>
+        <p:txBody>
+          <a:bodyPr rtlCol="0" anchor="ctr" lIns="0" rIns="0" tIns="0" bIns="0"/>
+          <a:lstStyle/>
+          <a:p>
+            <a:pPr algn="ctr"/>
+            <a:r>
+              <a:rPr sz="1300" b="1">
+                <a:solidFill>
+                  <a:srgbClr val="FFFFFF"/>
+                </a:solidFill>
+                <a:latin typeface="Calibri"/>
+              </a:rPr>
+              <a:t>1</a:t>
+            </a:r>
+          </a:p>
+        </p:txBody>
+      </p:sp>
+      <p:sp>
+        <p:nvSpPr>
+          <p:cNvPr id="10" name="TextBox 9"/>
+          <p:cNvSpPr txBox="1"/>
+          <p:nvPr/>
+        </p:nvSpPr>
+        <p:spPr>
+          <a:xfrm>
+            <a:off x="1143000" y="2240280"/>
+            <a:ext cx="5943600" cy="868680"/>
+          </a:xfrm>
+          <a:prstGeom prst="rect">
+            <a:avLst/>
+          </a:prstGeom>
+          <a:noFill/>
+        </p:spPr>
+        <p:txBody>
+          <a:bodyPr wrap="square" anchor="ctr" lIns="0" rIns="0" tIns="0" bIns="0"/>
+          <a:lstStyle/>
+          <a:p>
+            <a:pPr algn="l"/>
+            <a:r>
+              <a:rPr sz="1700" b="0" i="0">
+                <a:solidFill>
+                  <a:srgbClr val="202122"/>
+                </a:solidFill>
+                <a:latin typeface="Calibri"/>
+              </a:rPr>
+              <a:t>Wireframe three screens for a revision quiz app.</a:t>
+            </a:r>
+          </a:p>
+        </p:txBody>
+      </p:sp>
+      <p:sp>
+        <p:nvSpPr>
+          <p:cNvPr id="11" name="Oval 10"/>
+          <p:cNvSpPr/>
+          <p:nvPr/>
+        </p:nvSpPr>
+        <p:spPr>
+          <a:xfrm>
+            <a:off x="548640" y="3461004"/>
+            <a:ext cx="384048" cy="384048"/>
+          </a:xfrm>
+          <a:prstGeom prst="ellipse">
+            <a:avLst/>
+          </a:prstGeom>
+          <a:solidFill>
+            <a:srgbClr val="0645AD"/>
+          </a:solidFill>
+          <a:ln>
+            <a:noFill/>
+          </a:ln>
+          <a:effectLst/>
+        </p:spPr>
+        <p:style>
+          <a:lnRef idx="1">
+            <a:schemeClr val="accent1"/>
+          </a:lnRef>
+          <a:fillRef idx="3">
+            <a:schemeClr val="accent1"/>
+          </a:fillRef>
+          <a:effectRef idx="2">
+            <a:schemeClr val="accent1"/>
+          </a:effectRef>
+          <a:fontRef idx="minor">
+            <a:schemeClr val="lt1"/>
+          </a:fontRef>
+        </p:style>
+        <p:txBody>
+          <a:bodyPr rtlCol="0" anchor="ctr" lIns="0" rIns="0" tIns="0" bIns="0"/>
+          <a:lstStyle/>
+          <a:p>
+            <a:pPr algn="ctr"/>
+            <a:r>
+              <a:rPr sz="1300" b="1">
+                <a:solidFill>
+                  <a:srgbClr val="FFFFFF"/>
+                </a:solidFill>
+                <a:latin typeface="Calibri"/>
+              </a:rPr>
+              <a:t>2</a:t>
+            </a:r>
+          </a:p>
+        </p:txBody>
+      </p:sp>
+      <p:sp>
+        <p:nvSpPr>
+          <p:cNvPr id="12" name="TextBox 11"/>
+          <p:cNvSpPr txBox="1"/>
+          <p:nvPr/>
+        </p:nvSpPr>
+        <p:spPr>
+          <a:xfrm>
+            <a:off x="1143000" y="3218688"/>
+            <a:ext cx="5943600" cy="868680"/>
+          </a:xfrm>
+          <a:prstGeom prst="rect">
+            <a:avLst/>
+          </a:prstGeom>
+          <a:noFill/>
+        </p:spPr>
+        <p:txBody>
+          <a:bodyPr wrap="square" anchor="ctr" lIns="0" rIns="0" tIns="0" bIns="0"/>
+          <a:lstStyle/>
+          <a:p>
+            <a:pPr algn="l"/>
+            <a:r>
+              <a:rPr sz="1700" b="0" i="0">
+                <a:solidFill>
+                  <a:srgbClr val="202122"/>
+                </a:solidFill>
+                <a:latin typeface="Calibri"/>
+              </a:rPr>
+              <a:t>Annotate which UX principle each design choice supports.</a:t>
+            </a:r>
+          </a:p>
+        </p:txBody>
+      </p:sp>
+      <p:sp>
+        <p:nvSpPr>
+          <p:cNvPr id="13" name="Oval 12"/>
+          <p:cNvSpPr/>
+          <p:nvPr/>
+        </p:nvSpPr>
+        <p:spPr>
+          <a:xfrm>
+            <a:off x="548640" y="4439412"/>
+            <a:ext cx="384048" cy="384048"/>
+          </a:xfrm>
+          <a:prstGeom prst="ellipse">
+            <a:avLst/>
+          </a:prstGeom>
+          <a:solidFill>
+            <a:srgbClr val="0645AD"/>
+          </a:solidFill>
+          <a:ln>
+            <a:noFill/>
+          </a:ln>
+          <a:effectLst/>
+        </p:spPr>
+        <p:style>
+          <a:lnRef idx="1">
+            <a:schemeClr val="accent1"/>
+          </a:lnRef>
+          <a:fillRef idx="3">
+            <a:schemeClr val="accent1"/>
+          </a:fillRef>
+          <a:effectRef idx="2">
+            <a:schemeClr val="accent1"/>
+          </a:effectRef>
+          <a:fontRef idx="minor">
+            <a:schemeClr val="lt1"/>
+          </a:fontRef>
+        </p:style>
+        <p:txBody>
+          <a:bodyPr rtlCol="0" anchor="ctr" lIns="0" rIns="0" tIns="0" bIns="0"/>
+          <a:lstStyle/>
+          <a:p>
+            <a:pPr algn="ctr"/>
+            <a:r>
+              <a:rPr sz="1300" b="1">
+                <a:solidFill>
+                  <a:srgbClr val="FFFFFF"/>
+                </a:solidFill>
+                <a:latin typeface="Calibri"/>
+              </a:rPr>
+              <a:t>3</a:t>
+            </a:r>
+          </a:p>
+        </p:txBody>
+      </p:sp>
+      <p:sp>
+        <p:nvSpPr>
+          <p:cNvPr id="14" name="TextBox 13"/>
+          <p:cNvSpPr txBox="1"/>
+          <p:nvPr/>
+        </p:nvSpPr>
+        <p:spPr>
+          <a:xfrm>
+            <a:off x="1143000" y="4197096"/>
+            <a:ext cx="5943600" cy="868680"/>
+          </a:xfrm>
+          <a:prstGeom prst="rect">
+            <a:avLst/>
+          </a:prstGeom>
+          <a:noFill/>
+        </p:spPr>
+        <p:txBody>
+          <a:bodyPr wrap="square" anchor="ctr" lIns="0" rIns="0" tIns="0" bIns="0"/>
+          <a:lstStyle/>
+          <a:p>
+            <a:pPr algn="l"/>
+            <a:r>
+              <a:rPr sz="1700" b="0" i="0">
+                <a:solidFill>
+                  <a:srgbClr val="202122"/>
+                </a:solidFill>
+                <a:latin typeface="Calibri"/>
+              </a:rPr>
+              <a:t>Swap and critique another pair's wireframes for accessibility.</a:t>
+            </a:r>
+          </a:p>
+        </p:txBody>
+      </p:sp>
+      <p:sp>
+        <p:nvSpPr>
+          <p:cNvPr id="15" name="Oval 14"/>
+          <p:cNvSpPr/>
+          <p:nvPr/>
+        </p:nvSpPr>
+        <p:spPr>
+          <a:xfrm>
+            <a:off x="548640" y="5417820"/>
+            <a:ext cx="384048" cy="384048"/>
+          </a:xfrm>
+          <a:prstGeom prst="ellipse">
+            <a:avLst/>
+          </a:prstGeom>
+          <a:solidFill>
+            <a:srgbClr val="0645AD"/>
+          </a:solidFill>
+          <a:ln>
+            <a:noFill/>
+          </a:ln>
+          <a:effectLst/>
+        </p:spPr>
+        <p:style>
+          <a:lnRef idx="1">
+            <a:schemeClr val="accent1"/>
+          </a:lnRef>
+          <a:fillRef idx="3">
+            <a:schemeClr val="accent1"/>
+          </a:fillRef>
+          <a:effectRef idx="2">
+            <a:schemeClr val="accent1"/>
+          </a:effectRef>
+          <a:fontRef idx="minor">
+            <a:schemeClr val="lt1"/>
+          </a:fontRef>
+        </p:style>
+        <p:txBody>
+          <a:bodyPr rtlCol="0" anchor="ctr" lIns="0" rIns="0" tIns="0" bIns="0"/>
+          <a:lstStyle/>
+          <a:p>
+            <a:pPr algn="ctr"/>
+            <a:r>
+              <a:rPr sz="1300" b="1">
+                <a:solidFill>
+                  <a:srgbClr val="FFFFFF"/>
+                </a:solidFill>
+                <a:latin typeface="Calibri"/>
+              </a:rPr>
+              <a:t>4</a:t>
+            </a:r>
+          </a:p>
+        </p:txBody>
+      </p:sp>
+      <p:sp>
+        <p:nvSpPr>
+          <p:cNvPr id="16" name="TextBox 15"/>
+          <p:cNvSpPr txBox="1"/>
+          <p:nvPr/>
+        </p:nvSpPr>
+        <p:spPr>
+          <a:xfrm>
+            <a:off x="1143000" y="5175504"/>
+            <a:ext cx="5943600" cy="868680"/>
+          </a:xfrm>
+          <a:prstGeom prst="rect">
+            <a:avLst/>
+          </a:prstGeom>
+          <a:noFill/>
+        </p:spPr>
+        <p:txBody>
+          <a:bodyPr wrap="square" anchor="ctr" lIns="0" rIns="0" tIns="0" bIns="0"/>
+          <a:lstStyle/>
+          <a:p>
+            <a:pPr algn="l"/>
+            <a:r>
+              <a:rPr sz="1700" b="0" i="0">
+                <a:solidFill>
+                  <a:srgbClr val="202122"/>
+                </a:solidFill>
+                <a:latin typeface="Calibri"/>
+              </a:rPr>
+              <a:t>Improve one screen based on the feedback.</a:t>
+            </a:r>
+          </a:p>
+        </p:txBody>
+      </p:sp>
+      <p:sp>
+        <p:nvSpPr>
+          <p:cNvPr id="17" name="Rounded Rectangle 16"/>
+          <p:cNvSpPr/>
+          <p:nvPr/>
+        </p:nvSpPr>
+        <p:spPr>
+          <a:xfrm>
+            <a:off x="7772400" y="1508760"/>
+            <a:ext cx="3867912" cy="4572000"/>
+          </a:xfrm>
+          <a:prstGeom prst="roundRect">
+            <a:avLst>
+              <a:gd name="adj" fmla="val 8000"/>
+            </a:avLst>
+          </a:prstGeom>
+          <a:solidFill>
+            <a:srgbClr val="EAF3FF"/>
+          </a:solidFill>
+          <a:ln>
+            <a:noFill/>
+          </a:ln>
+          <a:effectLst/>
+        </p:spPr>
+        <p:style>
+          <a:lnRef idx="1">
+            <a:schemeClr val="accent1"/>
+          </a:lnRef>
+          <a:fillRef idx="3">
+            <a:schemeClr val="accent1"/>
+          </a:fillRef>
+          <a:effectRef idx="2">
+            <a:schemeClr val="accent1"/>
+          </a:effectRef>
+          <a:fontRef idx="minor">
+            <a:schemeClr val="lt1"/>
+          </a:fontRef>
+        </p:style>
+        <p:txBody>
+          <a:bodyPr rtlCol="0" anchor="ctr"/>
+          <a:lstStyle/>
+          <a:p/>
+        </p:txBody>
+      </p:sp>
+      <p:sp>
+        <p:nvSpPr>
+          <p:cNvPr id="18" name="TextBox 17"/>
+          <p:cNvSpPr txBox="1"/>
+          <p:nvPr/>
+        </p:nvSpPr>
+        <p:spPr>
+          <a:xfrm>
+            <a:off x="8046720" y="1737360"/>
+            <a:ext cx="3291840" cy="365760"/>
+          </a:xfrm>
+          <a:prstGeom prst="rect">
+            <a:avLst/>
+          </a:prstGeom>
+          <a:noFill/>
+        </p:spPr>
+        <p:txBody>
+          <a:bodyPr wrap="square" anchor="t" lIns="0" rIns="0" tIns="0" bIns="0"/>
+          <a:lstStyle/>
+          <a:p>
+            <a:pPr algn="l"/>
+            <a:r>
+              <a:rPr sz="1300" b="1" i="0">
+                <a:solidFill>
+                  <a:srgbClr val="0645AD"/>
+                </a:solidFill>
+                <a:latin typeface="Calibri"/>
+              </a:rPr>
+              <a:t>SUCCESS CRITERIA</a:t>
+            </a:r>
+          </a:p>
+        </p:txBody>
+      </p:sp>
+      <p:sp>
+        <p:nvSpPr>
+          <p:cNvPr id="19" name="TextBox 18"/>
+          <p:cNvSpPr txBox="1"/>
+          <p:nvPr/>
+        </p:nvSpPr>
+        <p:spPr>
+          <a:xfrm>
+            <a:off x="8046720" y="2240280"/>
+            <a:ext cx="3337560" cy="3657600"/>
+          </a:xfrm>
+          <a:prstGeom prst="rect">
+            <a:avLst/>
+          </a:prstGeom>
+          <a:noFill/>
+        </p:spPr>
+        <p:txBody>
+          <a:bodyPr wrap="square" lIns="0" rIns="0" tIns="0" bIns="0">
+            <a:spAutoFit/>
+          </a:bodyPr>
+          <a:lstStyle/>
+          <a:p>
+            <a:pPr marL="274320" indent="-274320">
+              <a:spcAft>
+                <a:spcPts val="810"/>
+              </a:spcAft>
+              <a:buClr>
+                <a:srgbClr val="0645AD"/>
+              </a:buClr>
+              <a:buFont typeface="Arial"/>
+              <a:buChar char="•"/>
+            </a:pPr>
+            <a:r>
+              <a:rPr sz="1800" b="0">
+                <a:solidFill>
+                  <a:srgbClr val="202122"/>
+                </a:solidFill>
+                <a:latin typeface="Calibri"/>
+              </a:rPr>
+              <a:t>Clear visual hierarchy</a:t>
+            </a:r>
+          </a:p>
+          <a:p>
+            <a:pPr marL="274320" indent="-274320">
+              <a:spcAft>
+                <a:spcPts val="810"/>
+              </a:spcAft>
+              <a:buClr>
+                <a:srgbClr val="0645AD"/>
+              </a:buClr>
+              <a:buFont typeface="Arial"/>
+              <a:buChar char="•"/>
+            </a:pPr>
+            <a:r>
+              <a:rPr sz="1800" b="0">
+                <a:solidFill>
+                  <a:srgbClr val="202122"/>
+                </a:solidFill>
+                <a:latin typeface="Calibri"/>
+              </a:rPr>
+              <a:t>Accessibility considered</a:t>
+            </a:r>
+          </a:p>
+          <a:p>
+            <a:pPr marL="274320" indent="-274320">
+              <a:spcAft>
+                <a:spcPts val="810"/>
+              </a:spcAft>
+              <a:buClr>
+                <a:srgbClr val="0645AD"/>
+              </a:buClr>
+              <a:buFont typeface="Arial"/>
+              <a:buChar char="•"/>
+            </a:pPr>
+            <a:r>
+              <a:rPr sz="1800" b="0">
+                <a:solidFill>
+                  <a:srgbClr val="202122"/>
+                </a:solidFill>
+                <a:latin typeface="Calibri"/>
+              </a:rPr>
+              <a:t>Feedback acted on</a:t>
+            </a:r>
+          </a:p>
+        </p:txBody>
+      </p:sp>
+    </p:spTree>
+  </p:cSld>
+  <p:clrMapOvr>
+    <a:masterClrMapping/>
+  </p:clrMapOvr>
+</p:sld>
+</file>
+
+<file path=ppt/slides/slide13.xml><?xml version="1.0" encoding="utf-8"?>
+<p:sld xmlns:a="http://schemas.openxmlformats.org/drawingml/2006/main" xmlns:p="http://schemas.openxmlformats.org/presentationml/2006/main" xmlns:r="http://schemas.openxmlformats.org/officeDocument/2006/relationships">
+  <p:cSld>
+    <p:bg>
+      <p:bgPr>
+        <a:solidFill>
+          <a:srgbClr val="03306E"/>
+        </a:solidFill>
+        <a:effectLst/>
+      </p:bgPr>
+    </p:bg>
+    <p:spTree>
+      <p:nvGrpSpPr>
+        <p:cNvPr id="1" name=""/>
+        <p:cNvGrpSpPr/>
+        <p:nvPr/>
+      </p:nvGrpSpPr>
+      <p:grpSpPr/>
+      <p:sp>
+        <p:nvSpPr>
+          <p:cNvPr id="2" name="TextBox 1"/>
+          <p:cNvSpPr txBox="1"/>
+          <p:nvPr/>
+        </p:nvSpPr>
+        <p:spPr>
+          <a:xfrm>
+            <a:off x="548640" y="320040"/>
+            <a:ext cx="11094415" cy="274320"/>
+          </a:xfrm>
+          <a:prstGeom prst="rect">
+            <a:avLst/>
+          </a:prstGeom>
+          <a:noFill/>
+        </p:spPr>
+        <p:txBody>
+          <a:bodyPr wrap="square" anchor="t" lIns="0" rIns="0" tIns="0" bIns="0"/>
+          <a:lstStyle/>
+          <a:p>
+            <a:pPr algn="l"/>
+            <a:r>
+              <a:rPr sz="1100" b="1" i="0">
+                <a:solidFill>
+                  <a:srgbClr val="A9C8F0"/>
+                </a:solidFill>
+                <a:latin typeface="Calibri"/>
+              </a:rPr>
+              <a:t>OCCUPATIONAL SPECIALISM  ·  Specialism Content Areas 4 and 6</a:t>
+            </a:r>
+          </a:p>
+        </p:txBody>
+      </p:sp>
+      <p:sp>
+        <p:nvSpPr>
+          <p:cNvPr id="3" name="TextBox 2"/>
+          <p:cNvSpPr txBox="1"/>
+          <p:nvPr/>
+        </p:nvSpPr>
+        <p:spPr>
+          <a:xfrm>
+            <a:off x="548640" y="566928"/>
+            <a:ext cx="11094415" cy="822960"/>
+          </a:xfrm>
+          <a:prstGeom prst="rect">
+            <a:avLst/>
+          </a:prstGeom>
+          <a:noFill/>
+        </p:spPr>
+        <p:txBody>
+          <a:bodyPr wrap="square" anchor="ctr" lIns="0" rIns="0" tIns="0" bIns="0"/>
+          <a:lstStyle/>
+          <a:p>
+            <a:pPr algn="l"/>
+            <a:r>
+              <a:rPr sz="3200" b="1" i="0">
+                <a:solidFill>
+                  <a:srgbClr val="FFFFFF"/>
+                </a:solidFill>
+                <a:latin typeface="Cambria"/>
+              </a:rPr>
+              <a:t>Exit ticket</a:t>
+            </a:r>
+          </a:p>
+        </p:txBody>
+      </p:sp>
+      <p:sp>
+        <p:nvSpPr>
+          <p:cNvPr id="4" name="Oval 3"/>
+          <p:cNvSpPr/>
+          <p:nvPr/>
+        </p:nvSpPr>
+        <p:spPr>
+          <a:xfrm>
+            <a:off x="548640" y="1737360"/>
+            <a:ext cx="502920" cy="502920"/>
+          </a:xfrm>
+          <a:prstGeom prst="ellipse">
+            <a:avLst/>
+          </a:prstGeom>
+          <a:solidFill>
+            <a:srgbClr val="33C17A"/>
+          </a:solidFill>
+          <a:ln>
+            <a:noFill/>
+          </a:ln>
+          <a:effectLst/>
+        </p:spPr>
+        <p:style>
+          <a:lnRef idx="1">
+            <a:schemeClr val="accent1"/>
+          </a:lnRef>
+          <a:fillRef idx="3">
+            <a:schemeClr val="accent1"/>
+          </a:fillRef>
+          <a:effectRef idx="2">
+            <a:schemeClr val="accent1"/>
+          </a:effectRef>
+          <a:fontRef idx="minor">
+            <a:schemeClr val="lt1"/>
+          </a:fontRef>
+        </p:style>
+        <p:txBody>
+          <a:bodyPr rtlCol="0" anchor="ctr" lIns="0" rIns="0" tIns="0" bIns="0"/>
+          <a:lstStyle/>
+          <a:p>
+            <a:pPr algn="ctr"/>
+            <a:r>
+              <a:rPr sz="1700" b="1">
+                <a:solidFill>
+                  <a:srgbClr val="202122"/>
+                </a:solidFill>
+                <a:latin typeface="Calibri"/>
+              </a:rPr>
+              <a:t>1</a:t>
+            </a:r>
+          </a:p>
+        </p:txBody>
+      </p:sp>
+      <p:sp>
+        <p:nvSpPr>
+          <p:cNvPr id="5" name="TextBox 4"/>
+          <p:cNvSpPr txBox="1"/>
+          <p:nvPr/>
+        </p:nvSpPr>
+        <p:spPr>
+          <a:xfrm>
+            <a:off x="1325880" y="1645920"/>
+            <a:ext cx="6583680" cy="822960"/>
+          </a:xfrm>
+          <a:prstGeom prst="rect">
+            <a:avLst/>
+          </a:prstGeom>
+          <a:noFill/>
+        </p:spPr>
+        <p:txBody>
+          <a:bodyPr wrap="square" anchor="ctr" lIns="0" rIns="0" tIns="0" bIns="0"/>
+          <a:lstStyle/>
+          <a:p>
+            <a:pPr algn="l"/>
+            <a:r>
+              <a:rPr sz="2000" b="0" i="0">
+                <a:solidFill>
+                  <a:srgbClr val="FFFFFF"/>
+                </a:solidFill>
+                <a:latin typeface="Calibri"/>
+              </a:rPr>
+              <a:t>Name one UX principle your favourite app uses well.</a:t>
+            </a:r>
+          </a:p>
+        </p:txBody>
+      </p:sp>
+      <p:sp>
+        <p:nvSpPr>
+          <p:cNvPr id="6" name="Oval 5"/>
+          <p:cNvSpPr/>
+          <p:nvPr/>
+        </p:nvSpPr>
+        <p:spPr>
+          <a:xfrm>
+            <a:off x="548640" y="2697480"/>
+            <a:ext cx="502920" cy="502920"/>
+          </a:xfrm>
+          <a:prstGeom prst="ellipse">
+            <a:avLst/>
+          </a:prstGeom>
+          <a:solidFill>
+            <a:srgbClr val="33C17A"/>
+          </a:solidFill>
+          <a:ln>
+            <a:noFill/>
+          </a:ln>
+          <a:effectLst/>
+        </p:spPr>
+        <p:style>
+          <a:lnRef idx="1">
+            <a:schemeClr val="accent1"/>
+          </a:lnRef>
+          <a:fillRef idx="3">
+            <a:schemeClr val="accent1"/>
+          </a:fillRef>
+          <a:effectRef idx="2">
+            <a:schemeClr val="accent1"/>
+          </a:effectRef>
+          <a:fontRef idx="minor">
+            <a:schemeClr val="lt1"/>
+          </a:fontRef>
+        </p:style>
+        <p:txBody>
+          <a:bodyPr rtlCol="0" anchor="ctr" lIns="0" rIns="0" tIns="0" bIns="0"/>
+          <a:lstStyle/>
+          <a:p>
+            <a:pPr algn="ctr"/>
+            <a:r>
+              <a:rPr sz="1700" b="1">
+                <a:solidFill>
+                  <a:srgbClr val="202122"/>
+                </a:solidFill>
+                <a:latin typeface="Calibri"/>
+              </a:rPr>
+              <a:t>2</a:t>
+            </a:r>
+          </a:p>
+        </p:txBody>
+      </p:sp>
+      <p:sp>
+        <p:nvSpPr>
+          <p:cNvPr id="7" name="TextBox 6"/>
+          <p:cNvSpPr txBox="1"/>
+          <p:nvPr/>
+        </p:nvSpPr>
+        <p:spPr>
+          <a:xfrm>
+            <a:off x="1325880" y="2606040"/>
+            <a:ext cx="6583680" cy="822960"/>
+          </a:xfrm>
+          <a:prstGeom prst="rect">
+            <a:avLst/>
+          </a:prstGeom>
+          <a:noFill/>
+        </p:spPr>
+        <p:txBody>
+          <a:bodyPr wrap="square" anchor="ctr" lIns="0" rIns="0" tIns="0" bIns="0"/>
+          <a:lstStyle/>
+          <a:p>
+            <a:pPr algn="l"/>
+            <a:r>
+              <a:rPr sz="2000" b="0" i="0">
+                <a:solidFill>
+                  <a:srgbClr val="FFFFFF"/>
+                </a:solidFill>
+                <a:latin typeface="Calibri"/>
+              </a:rPr>
+              <a:t>Why design for touch and mouse differently?</a:t>
+            </a:r>
+          </a:p>
+        </p:txBody>
+      </p:sp>
+      <p:sp>
+        <p:nvSpPr>
+          <p:cNvPr id="8" name="Oval 7"/>
+          <p:cNvSpPr/>
+          <p:nvPr/>
+        </p:nvSpPr>
+        <p:spPr>
+          <a:xfrm>
+            <a:off x="548640" y="3657600"/>
+            <a:ext cx="502920" cy="502920"/>
+          </a:xfrm>
+          <a:prstGeom prst="ellipse">
+            <a:avLst/>
+          </a:prstGeom>
+          <a:solidFill>
+            <a:srgbClr val="33C17A"/>
+          </a:solidFill>
+          <a:ln>
+            <a:noFill/>
+          </a:ln>
+          <a:effectLst/>
+        </p:spPr>
+        <p:style>
+          <a:lnRef idx="1">
+            <a:schemeClr val="accent1"/>
+          </a:lnRef>
+          <a:fillRef idx="3">
+            <a:schemeClr val="accent1"/>
+          </a:fillRef>
+          <a:effectRef idx="2">
+            <a:schemeClr val="accent1"/>
+          </a:effectRef>
+          <a:fontRef idx="minor">
+            <a:schemeClr val="lt1"/>
+          </a:fontRef>
+        </p:style>
+        <p:txBody>
+          <a:bodyPr rtlCol="0" anchor="ctr" lIns="0" rIns="0" tIns="0" bIns="0"/>
+          <a:lstStyle/>
+          <a:p>
+            <a:pPr algn="ctr"/>
+            <a:r>
+              <a:rPr sz="1700" b="1">
+                <a:solidFill>
+                  <a:srgbClr val="202122"/>
+                </a:solidFill>
+                <a:latin typeface="Calibri"/>
+              </a:rPr>
+              <a:t>3</a:t>
+            </a:r>
+          </a:p>
+        </p:txBody>
+      </p:sp>
+      <p:sp>
+        <p:nvSpPr>
+          <p:cNvPr id="9" name="TextBox 8"/>
+          <p:cNvSpPr txBox="1"/>
+          <p:nvPr/>
+        </p:nvSpPr>
+        <p:spPr>
+          <a:xfrm>
+            <a:off x="1325880" y="3566160"/>
+            <a:ext cx="6583680" cy="822960"/>
+          </a:xfrm>
+          <a:prstGeom prst="rect">
+            <a:avLst/>
+          </a:prstGeom>
+          <a:noFill/>
+        </p:spPr>
+        <p:txBody>
+          <a:bodyPr wrap="square" anchor="ctr" lIns="0" rIns="0" tIns="0" bIns="0"/>
+          <a:lstStyle/>
+          <a:p>
+            <a:pPr algn="l"/>
+            <a:r>
+              <a:rPr sz="2000" b="0" i="0">
+                <a:solidFill>
+                  <a:srgbClr val="FFFFFF"/>
+                </a:solidFill>
+                <a:latin typeface="Calibri"/>
+              </a:rPr>
+              <a:t>What is a style guide for?</a:t>
+            </a:r>
+          </a:p>
+        </p:txBody>
+      </p:sp>
+      <p:sp>
+        <p:nvSpPr>
+          <p:cNvPr id="10" name="Rounded Rectangle 9"/>
+          <p:cNvSpPr/>
+          <p:nvPr/>
+        </p:nvSpPr>
+        <p:spPr>
+          <a:xfrm>
+            <a:off x="8229600" y="1645920"/>
+            <a:ext cx="3410712" cy="2926080"/>
+          </a:xfrm>
+          <a:prstGeom prst="roundRect">
+            <a:avLst>
+              <a:gd name="adj" fmla="val 8000"/>
+            </a:avLst>
+          </a:prstGeom>
+          <a:solidFill>
+            <a:srgbClr val="0645AD"/>
+          </a:solidFill>
+          <a:ln>
+            <a:noFill/>
+          </a:ln>
+          <a:effectLst/>
+        </p:spPr>
+        <p:style>
+          <a:lnRef idx="1">
+            <a:schemeClr val="accent1"/>
+          </a:lnRef>
+          <a:fillRef idx="3">
+            <a:schemeClr val="accent1"/>
+          </a:fillRef>
+          <a:effectRef idx="2">
+            <a:schemeClr val="accent1"/>
+          </a:effectRef>
+          <a:fontRef idx="minor">
+            <a:schemeClr val="lt1"/>
+          </a:fontRef>
+        </p:style>
+        <p:txBody>
+          <a:bodyPr rtlCol="0" anchor="ctr"/>
+          <a:lstStyle/>
+          <a:p/>
+        </p:txBody>
+      </p:sp>
+      <p:sp>
+        <p:nvSpPr>
+          <p:cNvPr id="11" name="TextBox 10"/>
+          <p:cNvSpPr txBox="1"/>
+          <p:nvPr/>
+        </p:nvSpPr>
+        <p:spPr>
+          <a:xfrm>
+            <a:off x="8503920" y="1874519"/>
+            <a:ext cx="2926080" cy="365760"/>
+          </a:xfrm>
+          <a:prstGeom prst="rect">
+            <a:avLst/>
+          </a:prstGeom>
+          <a:noFill/>
+        </p:spPr>
+        <p:txBody>
+          <a:bodyPr wrap="square" anchor="t" lIns="0" rIns="0" tIns="0" bIns="0"/>
+          <a:lstStyle/>
+          <a:p>
+            <a:pPr algn="l"/>
+            <a:r>
+              <a:rPr sz="1300" b="1" i="0">
+                <a:solidFill>
+                  <a:srgbClr val="A9C8F0"/>
+                </a:solidFill>
+                <a:latin typeface="Calibri"/>
+              </a:rPr>
+              <a:t>REVISE THIS TOPIC</a:t>
+            </a:r>
+          </a:p>
+        </p:txBody>
+      </p:sp>
+      <p:sp>
+        <p:nvSpPr>
+          <p:cNvPr id="12" name="TextBox 11"/>
+          <p:cNvSpPr txBox="1"/>
+          <p:nvPr/>
+        </p:nvSpPr>
+        <p:spPr>
+          <a:xfrm>
+            <a:off x="8503920" y="2286000"/>
+            <a:ext cx="2926080" cy="548640"/>
+          </a:xfrm>
+          <a:prstGeom prst="rect">
+            <a:avLst/>
+          </a:prstGeom>
+          <a:noFill/>
+        </p:spPr>
+        <p:txBody>
+          <a:bodyPr wrap="square" anchor="t" lIns="0" rIns="0" tIns="0" bIns="0"/>
+          <a:lstStyle/>
+          <a:p>
+            <a:pPr algn="l"/>
+            <a:r>
+              <a:rPr sz="1400" b="0" i="0">
+                <a:solidFill>
+                  <a:srgbClr val="FFFFFF"/>
+                </a:solidFill>
+                <a:latin typeface="Calibri"/>
+              </a:rPr>
+              <a:t>Revision notes for this lesson are on the study wiki:</a:t>
+            </a:r>
+          </a:p>
+        </p:txBody>
+      </p:sp>
+      <p:sp>
+        <p:nvSpPr>
+          <p:cNvPr id="13" name="TextBox 12"/>
+          <p:cNvSpPr txBox="1"/>
+          <p:nvPr/>
+        </p:nvSpPr>
+        <p:spPr>
+          <a:xfrm>
+            <a:off x="8503920" y="2926080"/>
+            <a:ext cx="2926080" cy="1463040"/>
+          </a:xfrm>
+          <a:prstGeom prst="rect">
+            <a:avLst/>
+          </a:prstGeom>
+          <a:noFill/>
+        </p:spPr>
+        <p:txBody>
+          <a:bodyPr wrap="square" anchor="t" lIns="0" rIns="0" tIns="0" bIns="0"/>
+          <a:lstStyle/>
+          <a:p>
+            <a:pPr algn="l"/>
+            <a:r>
+              <a:rPr sz="2000" b="1" i="0">
+                <a:solidFill>
+                  <a:srgbClr val="FFFFFF"/>
+                </a:solidFill>
+                <a:latin typeface="Cambria"/>
+              </a:rPr>
+              <a:t>Design</a:t>
+            </a:r>
+          </a:p>
+        </p:txBody>
+      </p:sp>
+      <p:sp>
+        <p:nvSpPr>
+          <p:cNvPr id="14" name="TextBox 13"/>
+          <p:cNvSpPr txBox="1"/>
+          <p:nvPr/>
+        </p:nvSpPr>
+        <p:spPr>
+          <a:xfrm>
+            <a:off x="548640" y="5669280"/>
+            <a:ext cx="11094415" cy="548640"/>
+          </a:xfrm>
+          <a:prstGeom prst="rect">
+            <a:avLst/>
+          </a:prstGeom>
+          <a:noFill/>
+        </p:spPr>
+        <p:txBody>
+          <a:bodyPr wrap="square" anchor="t" lIns="0" rIns="0" tIns="0" bIns="0"/>
+          <a:lstStyle/>
+          <a:p>
+            <a:pPr algn="l"/>
+            <a:r>
+              <a:rPr sz="1200" b="0" i="0">
+                <a:solidFill>
+                  <a:srgbClr val="A9C8F0"/>
+                </a:solidFill>
+                <a:latin typeface="Calibri"/>
+              </a:rPr>
+              <a:t>https://lana6478.github.io/T-level-Digital-Software-Development/#/02-occupational-specialism/04-design.md</a:t>
+            </a:r>
+          </a:p>
+        </p:txBody>
+      </p:sp>
+    </p:spTree>
+  </p:cSld>
+  <p:clrMapOvr>
+    <a:masterClrMapping/>
+  </p:clrMapOvr>
+</p:sld>
+</file>
+
 <file path=ppt/slides/slide2.xml><?xml version="1.0" encoding="utf-8"?>
 <p:sld xmlns:a="http://schemas.openxmlformats.org/drawingml/2006/main" xmlns:p="http://schemas.openxmlformats.org/presentationml/2006/main" xmlns:r="http://schemas.openxmlformats.org/officeDocument/2006/relationships">
   <p:cSld>
@@ -4842,22 +7365,102 @@
       </p:sp>
       <p:sp>
         <p:nvSpPr>
-          <p:cNvPr id="6" name="Rounded Rectangle 5"/>
+          <p:cNvPr id="6" name="TextBox 5"/>
+          <p:cNvSpPr txBox="1"/>
+          <p:nvPr/>
+        </p:nvSpPr>
+        <p:spPr>
+          <a:xfrm>
+            <a:off x="548640" y="1554480"/>
+            <a:ext cx="6720840" cy="4617720"/>
+          </a:xfrm>
+          <a:prstGeom prst="rect">
+            <a:avLst/>
+          </a:prstGeom>
+          <a:noFill/>
+        </p:spPr>
+        <p:txBody>
+          <a:bodyPr wrap="square" lIns="0" rIns="0" tIns="0" bIns="0">
+            <a:spAutoFit/>
+          </a:bodyPr>
+          <a:lstStyle/>
+          <a:p>
+            <a:pPr>
+              <a:spcAft>
+                <a:spcPts val="1260"/>
+              </a:spcAft>
+            </a:pPr>
+            <a:r>
+              <a:rPr sz="2100" b="0">
+                <a:solidFill>
+                  <a:srgbClr val="202122"/>
+                </a:solidFill>
+                <a:latin typeface="Calibri"/>
+              </a:rPr>
+              <a:t>User experience (UX) design is about how using the product feels.</a:t>
+            </a:r>
+          </a:p>
+          <a:p>
+            <a:pPr>
+              <a:spcAft>
+                <a:spcPts val="1260"/>
+              </a:spcAft>
+            </a:pPr>
+            <a:r>
+              <a:rPr sz="2100" b="1">
+                <a:solidFill>
+                  <a:srgbClr val="202122"/>
+                </a:solidFill>
+                <a:latin typeface="Calibri"/>
+              </a:rPr>
+              <a:t>Consistency:</a:t>
+            </a:r>
+            <a:r>
+              <a:rPr sz="2100" b="0">
+                <a:solidFill>
+                  <a:srgbClr val="202122"/>
+                </a:solidFill>
+                <a:latin typeface="Calibri"/>
+              </a:rPr>
+              <a:t> the product looks and behaves the same throughout and fits the brand. Information hierarchy: content is organised so it's easy to navigate. Visual hierarchy: the most important things stand out. Confirmation: users know what their action did. User control: users can navigate efficiently and fix mistakes, such as with undo. Accessibility: it works for as many people as possible.</a:t>
+            </a:r>
+          </a:p>
+          <a:p>
+            <a:pPr>
+              <a:spcAft>
+                <a:spcPts val="1260"/>
+              </a:spcAft>
+            </a:pPr>
+            <a:r>
+              <a:rPr sz="2100" b="0">
+                <a:solidFill>
+                  <a:srgbClr val="202122"/>
+                </a:solidFill>
+                <a:latin typeface="Calibri"/>
+              </a:rPr>
+              <a:t>UI design uses wireframes (layout sketches), style guides (colours, fonts, components) and clickable prototypes.</a:t>
+            </a:r>
+          </a:p>
+        </p:txBody>
+      </p:sp>
+      <p:sp>
+        <p:nvSpPr>
+          <p:cNvPr id="7" name="Rounded Rectangle 6"/>
           <p:cNvSpPr/>
           <p:nvPr/>
         </p:nvSpPr>
         <p:spPr>
           <a:xfrm>
-            <a:off x="548640" y="1600200"/>
-            <a:ext cx="3515258" cy="2148840"/>
+            <a:off x="7772400" y="1554480"/>
+            <a:ext cx="3867912" cy="4526280"/>
           </a:xfrm>
           <a:prstGeom prst="roundRect">
             <a:avLst>
-              <a:gd name="adj" fmla="val 6000"/>
+              <a:gd name="adj" fmla="val 8000"/>
             </a:avLst>
           </a:prstGeom>
           <a:solidFill>
-            <a:srgbClr val="EAF3FF"/>
+            <a:srgbClr val="03306E"/>
           </a:solidFill>
           <a:ln>
             <a:noFill/>
@@ -4886,14 +7489,14 @@
       </p:sp>
       <p:sp>
         <p:nvSpPr>
-          <p:cNvPr id="7" name="Oval 6"/>
+          <p:cNvPr id="8" name="Oval 7"/>
           <p:cNvSpPr/>
           <p:nvPr/>
         </p:nvSpPr>
         <p:spPr>
           <a:xfrm>
-            <a:off x="777240" y="1828800"/>
-            <a:ext cx="457200" cy="457200"/>
+            <a:off x="8046720" y="1828800"/>
+            <a:ext cx="548640" cy="548640"/>
           </a:xfrm>
           <a:prstGeom prst="ellipse">
             <a:avLst/>
@@ -4926,46 +7529,13 @@
           <a:p>
             <a:pPr algn="ctr"/>
             <a:r>
-              <a:rPr sz="1500" b="1">
+              <a:rPr sz="1300" b="1">
                 <a:solidFill>
                   <a:srgbClr val="202122"/>
                 </a:solidFill>
                 <a:latin typeface="Calibri"/>
               </a:rPr>
-              <a:t>1</a:t>
-            </a:r>
-          </a:p>
-        </p:txBody>
-      </p:sp>
-      <p:sp>
-        <p:nvSpPr>
-          <p:cNvPr id="8" name="TextBox 7"/>
-          <p:cNvSpPr txBox="1"/>
-          <p:nvPr/>
-        </p:nvSpPr>
-        <p:spPr>
-          <a:xfrm>
-            <a:off x="1371600" y="1801368"/>
-            <a:ext cx="2509418" cy="512064"/>
-          </a:xfrm>
-          <a:prstGeom prst="rect">
-            <a:avLst/>
-          </a:prstGeom>
-          <a:noFill/>
-        </p:spPr>
-        <p:txBody>
-          <a:bodyPr wrap="square" anchor="ctr" lIns="0" rIns="0" tIns="0" bIns="0"/>
-          <a:lstStyle/>
-          <a:p>
-            <a:pPr algn="l"/>
-            <a:r>
-              <a:rPr sz="1900" b="1" i="0">
-                <a:solidFill>
-                  <a:srgbClr val="03306E"/>
-                </a:solidFill>
-                <a:latin typeface="Calibri"/>
-              </a:rPr>
-              <a:t>Consistency</a:t>
+              <a:t>e.g.</a:t>
             </a:r>
           </a:p>
         </p:txBody>
@@ -4978,8 +7548,8 @@
         </p:nvSpPr>
         <p:spPr>
           <a:xfrm>
-            <a:off x="777240" y="2468880"/>
-            <a:ext cx="3058058" cy="1143000"/>
+            <a:off x="8046720" y="2560320"/>
+            <a:ext cx="3291840" cy="365760"/>
           </a:xfrm>
           <a:prstGeom prst="rect">
             <a:avLst/>
@@ -4992,124 +7562,27 @@
           <a:p>
             <a:pPr algn="l"/>
             <a:r>
-              <a:rPr sz="2000" b="0" i="0">
-                <a:solidFill>
-                  <a:srgbClr val="202122"/>
-                </a:solidFill>
-                <a:latin typeface="Calibri"/>
-              </a:rPr>
-              <a:t>Intuitive, pleasing and on-brand.</a:t>
-            </a:r>
-          </a:p>
-        </p:txBody>
-      </p:sp>
-      <p:sp>
-        <p:nvSpPr>
-          <p:cNvPr id="10" name="Rounded Rectangle 9"/>
-          <p:cNvSpPr/>
-          <p:nvPr/>
-        </p:nvSpPr>
-        <p:spPr>
-          <a:xfrm>
-            <a:off x="4338218" y="1600200"/>
-            <a:ext cx="3515258" cy="2148840"/>
-          </a:xfrm>
-          <a:prstGeom prst="roundRect">
-            <a:avLst>
-              <a:gd name="adj" fmla="val 6000"/>
-            </a:avLst>
-          </a:prstGeom>
-          <a:solidFill>
-            <a:srgbClr val="EAF3FF"/>
-          </a:solidFill>
-          <a:ln>
-            <a:noFill/>
-          </a:ln>
-          <a:effectLst/>
-        </p:spPr>
-        <p:style>
-          <a:lnRef idx="1">
-            <a:schemeClr val="accent1"/>
-          </a:lnRef>
-          <a:fillRef idx="3">
-            <a:schemeClr val="accent1"/>
-          </a:fillRef>
-          <a:effectRef idx="2">
-            <a:schemeClr val="accent1"/>
-          </a:effectRef>
-          <a:fontRef idx="minor">
-            <a:schemeClr val="lt1"/>
-          </a:fontRef>
-        </p:style>
-        <p:txBody>
-          <a:bodyPr rtlCol="0" anchor="ctr"/>
-          <a:lstStyle/>
-          <a:p/>
-        </p:txBody>
-      </p:sp>
-      <p:sp>
-        <p:nvSpPr>
-          <p:cNvPr id="11" name="Oval 10"/>
-          <p:cNvSpPr/>
-          <p:nvPr/>
-        </p:nvSpPr>
-        <p:spPr>
-          <a:xfrm>
-            <a:off x="4566818" y="1828800"/>
-            <a:ext cx="457200" cy="457200"/>
-          </a:xfrm>
-          <a:prstGeom prst="ellipse">
-            <a:avLst/>
-          </a:prstGeom>
-          <a:solidFill>
-            <a:srgbClr val="33C17A"/>
-          </a:solidFill>
-          <a:ln>
-            <a:noFill/>
-          </a:ln>
-          <a:effectLst/>
-        </p:spPr>
-        <p:style>
-          <a:lnRef idx="1">
-            <a:schemeClr val="accent1"/>
-          </a:lnRef>
-          <a:fillRef idx="3">
-            <a:schemeClr val="accent1"/>
-          </a:fillRef>
-          <a:effectRef idx="2">
-            <a:schemeClr val="accent1"/>
-          </a:effectRef>
-          <a:fontRef idx="minor">
-            <a:schemeClr val="lt1"/>
-          </a:fontRef>
-        </p:style>
-        <p:txBody>
-          <a:bodyPr rtlCol="0" anchor="ctr" lIns="0" rIns="0" tIns="0" bIns="0"/>
-          <a:lstStyle/>
-          <a:p>
-            <a:pPr algn="ctr"/>
-            <a:r>
-              <a:rPr sz="1500" b="1">
-                <a:solidFill>
-                  <a:srgbClr val="202122"/>
-                </a:solidFill>
-                <a:latin typeface="Calibri"/>
-              </a:rPr>
-              <a:t>2</a:t>
-            </a:r>
-          </a:p>
-        </p:txBody>
-      </p:sp>
-      <p:sp>
-        <p:nvSpPr>
-          <p:cNvPr id="12" name="TextBox 11"/>
+              <a:rPr sz="1300" b="1" i="0">
+                <a:solidFill>
+                  <a:srgbClr val="A9C8F0"/>
+                </a:solidFill>
+                <a:latin typeface="Calibri"/>
+              </a:rPr>
+              <a:t>EXAMPLE</a:t>
+            </a:r>
+          </a:p>
+        </p:txBody>
+      </p:sp>
+      <p:sp>
+        <p:nvSpPr>
+          <p:cNvPr id="10" name="TextBox 9"/>
           <p:cNvSpPr txBox="1"/>
           <p:nvPr/>
         </p:nvSpPr>
         <p:spPr>
           <a:xfrm>
-            <a:off x="5161178" y="1801368"/>
-            <a:ext cx="2509418" cy="512064"/>
+            <a:off x="8046720" y="2971800"/>
+            <a:ext cx="3291840" cy="2971800"/>
           </a:xfrm>
           <a:prstGeom prst="rect">
             <a:avLst/>
@@ -5117,703 +7590,18 @@
           <a:noFill/>
         </p:spPr>
         <p:txBody>
-          <a:bodyPr wrap="square" anchor="ctr" lIns="0" rIns="0" tIns="0" bIns="0"/>
+          <a:bodyPr wrap="square" anchor="t" lIns="0" rIns="0" tIns="0" bIns="0"/>
           <a:lstStyle/>
           <a:p>
             <a:pPr algn="l"/>
             <a:r>
-              <a:rPr sz="1700" b="1" i="0">
-                <a:solidFill>
-                  <a:srgbClr val="03306E"/>
-                </a:solidFill>
-                <a:latin typeface="Calibri"/>
-              </a:rPr>
-              <a:t>Information hierarchy</a:t>
-            </a:r>
-          </a:p>
-        </p:txBody>
-      </p:sp>
-      <p:sp>
-        <p:nvSpPr>
-          <p:cNvPr id="13" name="TextBox 12"/>
-          <p:cNvSpPr txBox="1"/>
-          <p:nvPr/>
-        </p:nvSpPr>
-        <p:spPr>
-          <a:xfrm>
-            <a:off x="4566818" y="2468880"/>
-            <a:ext cx="3058058" cy="1143000"/>
-          </a:xfrm>
-          <a:prstGeom prst="rect">
-            <a:avLst/>
-          </a:prstGeom>
-          <a:noFill/>
-        </p:spPr>
-        <p:txBody>
-          <a:bodyPr wrap="square" anchor="t" lIns="0" rIns="0" tIns="0" bIns="0"/>
-          <a:lstStyle/>
-          <a:p>
-            <a:pPr algn="l"/>
-            <a:r>
-              <a:rPr sz="2000" b="0" i="0">
-                <a:solidFill>
-                  <a:srgbClr val="202122"/>
-                </a:solidFill>
-                <a:latin typeface="Calibri"/>
-              </a:rPr>
-              <a:t>Easier navigation.</a:t>
-            </a:r>
-          </a:p>
-        </p:txBody>
-      </p:sp>
-      <p:sp>
-        <p:nvSpPr>
-          <p:cNvPr id="14" name="Rounded Rectangle 13"/>
-          <p:cNvSpPr/>
-          <p:nvPr/>
-        </p:nvSpPr>
-        <p:spPr>
-          <a:xfrm>
-            <a:off x="8127796" y="1600200"/>
-            <a:ext cx="3515258" cy="2148840"/>
-          </a:xfrm>
-          <a:prstGeom prst="roundRect">
-            <a:avLst>
-              <a:gd name="adj" fmla="val 6000"/>
-            </a:avLst>
-          </a:prstGeom>
-          <a:solidFill>
-            <a:srgbClr val="EAF3FF"/>
-          </a:solidFill>
-          <a:ln>
-            <a:noFill/>
-          </a:ln>
-          <a:effectLst/>
-        </p:spPr>
-        <p:style>
-          <a:lnRef idx="1">
-            <a:schemeClr val="accent1"/>
-          </a:lnRef>
-          <a:fillRef idx="3">
-            <a:schemeClr val="accent1"/>
-          </a:fillRef>
-          <a:effectRef idx="2">
-            <a:schemeClr val="accent1"/>
-          </a:effectRef>
-          <a:fontRef idx="minor">
-            <a:schemeClr val="lt1"/>
-          </a:fontRef>
-        </p:style>
-        <p:txBody>
-          <a:bodyPr rtlCol="0" anchor="ctr"/>
-          <a:lstStyle/>
-          <a:p/>
-        </p:txBody>
-      </p:sp>
-      <p:sp>
-        <p:nvSpPr>
-          <p:cNvPr id="15" name="Oval 14"/>
-          <p:cNvSpPr/>
-          <p:nvPr/>
-        </p:nvSpPr>
-        <p:spPr>
-          <a:xfrm>
-            <a:off x="8356396" y="1828800"/>
-            <a:ext cx="457200" cy="457200"/>
-          </a:xfrm>
-          <a:prstGeom prst="ellipse">
-            <a:avLst/>
-          </a:prstGeom>
-          <a:solidFill>
-            <a:srgbClr val="33C17A"/>
-          </a:solidFill>
-          <a:ln>
-            <a:noFill/>
-          </a:ln>
-          <a:effectLst/>
-        </p:spPr>
-        <p:style>
-          <a:lnRef idx="1">
-            <a:schemeClr val="accent1"/>
-          </a:lnRef>
-          <a:fillRef idx="3">
-            <a:schemeClr val="accent1"/>
-          </a:fillRef>
-          <a:effectRef idx="2">
-            <a:schemeClr val="accent1"/>
-          </a:effectRef>
-          <a:fontRef idx="minor">
-            <a:schemeClr val="lt1"/>
-          </a:fontRef>
-        </p:style>
-        <p:txBody>
-          <a:bodyPr rtlCol="0" anchor="ctr" lIns="0" rIns="0" tIns="0" bIns="0"/>
-          <a:lstStyle/>
-          <a:p>
-            <a:pPr algn="ctr"/>
-            <a:r>
-              <a:rPr sz="1500" b="1">
-                <a:solidFill>
-                  <a:srgbClr val="202122"/>
-                </a:solidFill>
-                <a:latin typeface="Calibri"/>
-              </a:rPr>
-              <a:t>3</a:t>
-            </a:r>
-          </a:p>
-        </p:txBody>
-      </p:sp>
-      <p:sp>
-        <p:nvSpPr>
-          <p:cNvPr id="16" name="TextBox 15"/>
-          <p:cNvSpPr txBox="1"/>
-          <p:nvPr/>
-        </p:nvSpPr>
-        <p:spPr>
-          <a:xfrm>
-            <a:off x="8950756" y="1801368"/>
-            <a:ext cx="2509418" cy="512064"/>
-          </a:xfrm>
-          <a:prstGeom prst="rect">
-            <a:avLst/>
-          </a:prstGeom>
-          <a:noFill/>
-        </p:spPr>
-        <p:txBody>
-          <a:bodyPr wrap="square" anchor="ctr" lIns="0" rIns="0" tIns="0" bIns="0"/>
-          <a:lstStyle/>
-          <a:p>
-            <a:pPr algn="l"/>
-            <a:r>
-              <a:rPr sz="1900" b="1" i="0">
-                <a:solidFill>
-                  <a:srgbClr val="03306E"/>
-                </a:solidFill>
-                <a:latin typeface="Calibri"/>
-              </a:rPr>
-              <a:t>Visual hierarchy</a:t>
-            </a:r>
-          </a:p>
-        </p:txBody>
-      </p:sp>
-      <p:sp>
-        <p:nvSpPr>
-          <p:cNvPr id="17" name="TextBox 16"/>
-          <p:cNvSpPr txBox="1"/>
-          <p:nvPr/>
-        </p:nvSpPr>
-        <p:spPr>
-          <a:xfrm>
-            <a:off x="8356396" y="2468880"/>
-            <a:ext cx="3058058" cy="1143000"/>
-          </a:xfrm>
-          <a:prstGeom prst="rect">
-            <a:avLst/>
-          </a:prstGeom>
-          <a:noFill/>
-        </p:spPr>
-        <p:txBody>
-          <a:bodyPr wrap="square" anchor="t" lIns="0" rIns="0" tIns="0" bIns="0"/>
-          <a:lstStyle/>
-          <a:p>
-            <a:pPr algn="l"/>
-            <a:r>
-              <a:rPr sz="2000" b="0" i="0">
-                <a:solidFill>
-                  <a:srgbClr val="202122"/>
-                </a:solidFill>
-                <a:latin typeface="Calibri"/>
-              </a:rPr>
-              <a:t>Important content stands out.</a:t>
-            </a:r>
-          </a:p>
-        </p:txBody>
-      </p:sp>
-      <p:sp>
-        <p:nvSpPr>
-          <p:cNvPr id="18" name="Rounded Rectangle 17"/>
-          <p:cNvSpPr/>
-          <p:nvPr/>
-        </p:nvSpPr>
-        <p:spPr>
-          <a:xfrm>
-            <a:off x="548640" y="4023360"/>
-            <a:ext cx="3515258" cy="2148840"/>
-          </a:xfrm>
-          <a:prstGeom prst="roundRect">
-            <a:avLst>
-              <a:gd name="adj" fmla="val 6000"/>
-            </a:avLst>
-          </a:prstGeom>
-          <a:solidFill>
-            <a:srgbClr val="EAF3FF"/>
-          </a:solidFill>
-          <a:ln>
-            <a:noFill/>
-          </a:ln>
-          <a:effectLst/>
-        </p:spPr>
-        <p:style>
-          <a:lnRef idx="1">
-            <a:schemeClr val="accent1"/>
-          </a:lnRef>
-          <a:fillRef idx="3">
-            <a:schemeClr val="accent1"/>
-          </a:fillRef>
-          <a:effectRef idx="2">
-            <a:schemeClr val="accent1"/>
-          </a:effectRef>
-          <a:fontRef idx="minor">
-            <a:schemeClr val="lt1"/>
-          </a:fontRef>
-        </p:style>
-        <p:txBody>
-          <a:bodyPr rtlCol="0" anchor="ctr"/>
-          <a:lstStyle/>
-          <a:p/>
-        </p:txBody>
-      </p:sp>
-      <p:sp>
-        <p:nvSpPr>
-          <p:cNvPr id="19" name="Oval 18"/>
-          <p:cNvSpPr/>
-          <p:nvPr/>
-        </p:nvSpPr>
-        <p:spPr>
-          <a:xfrm>
-            <a:off x="777240" y="4251960"/>
-            <a:ext cx="457200" cy="457200"/>
-          </a:xfrm>
-          <a:prstGeom prst="ellipse">
-            <a:avLst/>
-          </a:prstGeom>
-          <a:solidFill>
-            <a:srgbClr val="33C17A"/>
-          </a:solidFill>
-          <a:ln>
-            <a:noFill/>
-          </a:ln>
-          <a:effectLst/>
-        </p:spPr>
-        <p:style>
-          <a:lnRef idx="1">
-            <a:schemeClr val="accent1"/>
-          </a:lnRef>
-          <a:fillRef idx="3">
-            <a:schemeClr val="accent1"/>
-          </a:fillRef>
-          <a:effectRef idx="2">
-            <a:schemeClr val="accent1"/>
-          </a:effectRef>
-          <a:fontRef idx="minor">
-            <a:schemeClr val="lt1"/>
-          </a:fontRef>
-        </p:style>
-        <p:txBody>
-          <a:bodyPr rtlCol="0" anchor="ctr" lIns="0" rIns="0" tIns="0" bIns="0"/>
-          <a:lstStyle/>
-          <a:p>
-            <a:pPr algn="ctr"/>
-            <a:r>
-              <a:rPr sz="1500" b="1">
-                <a:solidFill>
-                  <a:srgbClr val="202122"/>
-                </a:solidFill>
-                <a:latin typeface="Calibri"/>
-              </a:rPr>
-              <a:t>4</a:t>
-            </a:r>
-          </a:p>
-        </p:txBody>
-      </p:sp>
-      <p:sp>
-        <p:nvSpPr>
-          <p:cNvPr id="20" name="TextBox 19"/>
-          <p:cNvSpPr txBox="1"/>
-          <p:nvPr/>
-        </p:nvSpPr>
-        <p:spPr>
-          <a:xfrm>
-            <a:off x="1371600" y="4224528"/>
-            <a:ext cx="2509418" cy="512064"/>
-          </a:xfrm>
-          <a:prstGeom prst="rect">
-            <a:avLst/>
-          </a:prstGeom>
-          <a:noFill/>
-        </p:spPr>
-        <p:txBody>
-          <a:bodyPr wrap="square" anchor="ctr" lIns="0" rIns="0" tIns="0" bIns="0"/>
-          <a:lstStyle/>
-          <a:p>
-            <a:pPr algn="l"/>
-            <a:r>
-              <a:rPr sz="1900" b="1" i="0">
-                <a:solidFill>
-                  <a:srgbClr val="03306E"/>
-                </a:solidFill>
-                <a:latin typeface="Calibri"/>
-              </a:rPr>
-              <a:t>Confirmation</a:t>
-            </a:r>
-          </a:p>
-        </p:txBody>
-      </p:sp>
-      <p:sp>
-        <p:nvSpPr>
-          <p:cNvPr id="21" name="TextBox 20"/>
-          <p:cNvSpPr txBox="1"/>
-          <p:nvPr/>
-        </p:nvSpPr>
-        <p:spPr>
-          <a:xfrm>
-            <a:off x="777240" y="4892040"/>
-            <a:ext cx="3058058" cy="1143000"/>
-          </a:xfrm>
-          <a:prstGeom prst="rect">
-            <a:avLst/>
-          </a:prstGeom>
-          <a:noFill/>
-        </p:spPr>
-        <p:txBody>
-          <a:bodyPr wrap="square" anchor="t" lIns="0" rIns="0" tIns="0" bIns="0"/>
-          <a:lstStyle/>
-          <a:p>
-            <a:pPr algn="l"/>
-            <a:r>
-              <a:rPr sz="2000" b="0" i="0">
-                <a:solidFill>
-                  <a:srgbClr val="202122"/>
-                </a:solidFill>
-                <a:latin typeface="Calibri"/>
-              </a:rPr>
-              <a:t>Users know what they did and its effect.</a:t>
-            </a:r>
-          </a:p>
-        </p:txBody>
-      </p:sp>
-      <p:sp>
-        <p:nvSpPr>
-          <p:cNvPr id="22" name="Rounded Rectangle 21"/>
-          <p:cNvSpPr/>
-          <p:nvPr/>
-        </p:nvSpPr>
-        <p:spPr>
-          <a:xfrm>
-            <a:off x="4338218" y="4023360"/>
-            <a:ext cx="3515258" cy="2148840"/>
-          </a:xfrm>
-          <a:prstGeom prst="roundRect">
-            <a:avLst>
-              <a:gd name="adj" fmla="val 6000"/>
-            </a:avLst>
-          </a:prstGeom>
-          <a:solidFill>
-            <a:srgbClr val="EAF3FF"/>
-          </a:solidFill>
-          <a:ln>
-            <a:noFill/>
-          </a:ln>
-          <a:effectLst/>
-        </p:spPr>
-        <p:style>
-          <a:lnRef idx="1">
-            <a:schemeClr val="accent1"/>
-          </a:lnRef>
-          <a:fillRef idx="3">
-            <a:schemeClr val="accent1"/>
-          </a:fillRef>
-          <a:effectRef idx="2">
-            <a:schemeClr val="accent1"/>
-          </a:effectRef>
-          <a:fontRef idx="minor">
-            <a:schemeClr val="lt1"/>
-          </a:fontRef>
-        </p:style>
-        <p:txBody>
-          <a:bodyPr rtlCol="0" anchor="ctr"/>
-          <a:lstStyle/>
-          <a:p/>
-        </p:txBody>
-      </p:sp>
-      <p:sp>
-        <p:nvSpPr>
-          <p:cNvPr id="23" name="Oval 22"/>
-          <p:cNvSpPr/>
-          <p:nvPr/>
-        </p:nvSpPr>
-        <p:spPr>
-          <a:xfrm>
-            <a:off x="4566818" y="4251960"/>
-            <a:ext cx="457200" cy="457200"/>
-          </a:xfrm>
-          <a:prstGeom prst="ellipse">
-            <a:avLst/>
-          </a:prstGeom>
-          <a:solidFill>
-            <a:srgbClr val="33C17A"/>
-          </a:solidFill>
-          <a:ln>
-            <a:noFill/>
-          </a:ln>
-          <a:effectLst/>
-        </p:spPr>
-        <p:style>
-          <a:lnRef idx="1">
-            <a:schemeClr val="accent1"/>
-          </a:lnRef>
-          <a:fillRef idx="3">
-            <a:schemeClr val="accent1"/>
-          </a:fillRef>
-          <a:effectRef idx="2">
-            <a:schemeClr val="accent1"/>
-          </a:effectRef>
-          <a:fontRef idx="minor">
-            <a:schemeClr val="lt1"/>
-          </a:fontRef>
-        </p:style>
-        <p:txBody>
-          <a:bodyPr rtlCol="0" anchor="ctr" lIns="0" rIns="0" tIns="0" bIns="0"/>
-          <a:lstStyle/>
-          <a:p>
-            <a:pPr algn="ctr"/>
-            <a:r>
-              <a:rPr sz="1500" b="1">
-                <a:solidFill>
-                  <a:srgbClr val="202122"/>
-                </a:solidFill>
-                <a:latin typeface="Calibri"/>
-              </a:rPr>
-              <a:t>5</a:t>
-            </a:r>
-          </a:p>
-        </p:txBody>
-      </p:sp>
-      <p:sp>
-        <p:nvSpPr>
-          <p:cNvPr id="24" name="TextBox 23"/>
-          <p:cNvSpPr txBox="1"/>
-          <p:nvPr/>
-        </p:nvSpPr>
-        <p:spPr>
-          <a:xfrm>
-            <a:off x="5161178" y="4224528"/>
-            <a:ext cx="2509418" cy="512064"/>
-          </a:xfrm>
-          <a:prstGeom prst="rect">
-            <a:avLst/>
-          </a:prstGeom>
-          <a:noFill/>
-        </p:spPr>
-        <p:txBody>
-          <a:bodyPr wrap="square" anchor="ctr" lIns="0" rIns="0" tIns="0" bIns="0"/>
-          <a:lstStyle/>
-          <a:p>
-            <a:pPr algn="l"/>
-            <a:r>
-              <a:rPr sz="1900" b="1" i="0">
-                <a:solidFill>
-                  <a:srgbClr val="03306E"/>
-                </a:solidFill>
-                <a:latin typeface="Calibri"/>
-              </a:rPr>
-              <a:t>User control</a:t>
-            </a:r>
-          </a:p>
-        </p:txBody>
-      </p:sp>
-      <p:sp>
-        <p:nvSpPr>
-          <p:cNvPr id="25" name="TextBox 24"/>
-          <p:cNvSpPr txBox="1"/>
-          <p:nvPr/>
-        </p:nvSpPr>
-        <p:spPr>
-          <a:xfrm>
-            <a:off x="4566818" y="4892040"/>
-            <a:ext cx="3058058" cy="1143000"/>
-          </a:xfrm>
-          <a:prstGeom prst="rect">
-            <a:avLst/>
-          </a:prstGeom>
-          <a:noFill/>
-        </p:spPr>
-        <p:txBody>
-          <a:bodyPr wrap="square" anchor="t" lIns="0" rIns="0" tIns="0" bIns="0"/>
-          <a:lstStyle/>
-          <a:p>
-            <a:pPr algn="l"/>
-            <a:r>
-              <a:rPr sz="2000" b="0" i="0">
-                <a:solidFill>
-                  <a:srgbClr val="202122"/>
-                </a:solidFill>
-                <a:latin typeface="Calibri"/>
-              </a:rPr>
-              <a:t>Efficient navigation and easy error correction.</a:t>
-            </a:r>
-          </a:p>
-        </p:txBody>
-      </p:sp>
-      <p:sp>
-        <p:nvSpPr>
-          <p:cNvPr id="26" name="Rounded Rectangle 25"/>
-          <p:cNvSpPr/>
-          <p:nvPr/>
-        </p:nvSpPr>
-        <p:spPr>
-          <a:xfrm>
-            <a:off x="8127796" y="4023360"/>
-            <a:ext cx="3515258" cy="2148840"/>
-          </a:xfrm>
-          <a:prstGeom prst="roundRect">
-            <a:avLst>
-              <a:gd name="adj" fmla="val 6000"/>
-            </a:avLst>
-          </a:prstGeom>
-          <a:solidFill>
-            <a:srgbClr val="EAF3FF"/>
-          </a:solidFill>
-          <a:ln>
-            <a:noFill/>
-          </a:ln>
-          <a:effectLst/>
-        </p:spPr>
-        <p:style>
-          <a:lnRef idx="1">
-            <a:schemeClr val="accent1"/>
-          </a:lnRef>
-          <a:fillRef idx="3">
-            <a:schemeClr val="accent1"/>
-          </a:fillRef>
-          <a:effectRef idx="2">
-            <a:schemeClr val="accent1"/>
-          </a:effectRef>
-          <a:fontRef idx="minor">
-            <a:schemeClr val="lt1"/>
-          </a:fontRef>
-        </p:style>
-        <p:txBody>
-          <a:bodyPr rtlCol="0" anchor="ctr"/>
-          <a:lstStyle/>
-          <a:p/>
-        </p:txBody>
-      </p:sp>
-      <p:sp>
-        <p:nvSpPr>
-          <p:cNvPr id="27" name="Oval 26"/>
-          <p:cNvSpPr/>
-          <p:nvPr/>
-        </p:nvSpPr>
-        <p:spPr>
-          <a:xfrm>
-            <a:off x="8356396" y="4251960"/>
-            <a:ext cx="457200" cy="457200"/>
-          </a:xfrm>
-          <a:prstGeom prst="ellipse">
-            <a:avLst/>
-          </a:prstGeom>
-          <a:solidFill>
-            <a:srgbClr val="33C17A"/>
-          </a:solidFill>
-          <a:ln>
-            <a:noFill/>
-          </a:ln>
-          <a:effectLst/>
-        </p:spPr>
-        <p:style>
-          <a:lnRef idx="1">
-            <a:schemeClr val="accent1"/>
-          </a:lnRef>
-          <a:fillRef idx="3">
-            <a:schemeClr val="accent1"/>
-          </a:fillRef>
-          <a:effectRef idx="2">
-            <a:schemeClr val="accent1"/>
-          </a:effectRef>
-          <a:fontRef idx="minor">
-            <a:schemeClr val="lt1"/>
-          </a:fontRef>
-        </p:style>
-        <p:txBody>
-          <a:bodyPr rtlCol="0" anchor="ctr" lIns="0" rIns="0" tIns="0" bIns="0"/>
-          <a:lstStyle/>
-          <a:p>
-            <a:pPr algn="ctr"/>
-            <a:r>
-              <a:rPr sz="1500" b="1">
-                <a:solidFill>
-                  <a:srgbClr val="202122"/>
-                </a:solidFill>
-                <a:latin typeface="Calibri"/>
-              </a:rPr>
-              <a:t>6</a:t>
-            </a:r>
-          </a:p>
-        </p:txBody>
-      </p:sp>
-      <p:sp>
-        <p:nvSpPr>
-          <p:cNvPr id="28" name="TextBox 27"/>
-          <p:cNvSpPr txBox="1"/>
-          <p:nvPr/>
-        </p:nvSpPr>
-        <p:spPr>
-          <a:xfrm>
-            <a:off x="8950756" y="4224528"/>
-            <a:ext cx="2509418" cy="512064"/>
-          </a:xfrm>
-          <a:prstGeom prst="rect">
-            <a:avLst/>
-          </a:prstGeom>
-          <a:noFill/>
-        </p:spPr>
-        <p:txBody>
-          <a:bodyPr wrap="square" anchor="ctr" lIns="0" rIns="0" tIns="0" bIns="0"/>
-          <a:lstStyle/>
-          <a:p>
-            <a:pPr algn="l"/>
-            <a:r>
-              <a:rPr sz="1900" b="1" i="0">
-                <a:solidFill>
-                  <a:srgbClr val="03306E"/>
-                </a:solidFill>
-                <a:latin typeface="Calibri"/>
-              </a:rPr>
-              <a:t>Accessibility</a:t>
-            </a:r>
-          </a:p>
-        </p:txBody>
-      </p:sp>
-      <p:sp>
-        <p:nvSpPr>
-          <p:cNvPr id="29" name="TextBox 28"/>
-          <p:cNvSpPr txBox="1"/>
-          <p:nvPr/>
-        </p:nvSpPr>
-        <p:spPr>
-          <a:xfrm>
-            <a:off x="8356396" y="4892040"/>
-            <a:ext cx="3058058" cy="1143000"/>
-          </a:xfrm>
-          <a:prstGeom prst="rect">
-            <a:avLst/>
-          </a:prstGeom>
-          <a:noFill/>
-        </p:spPr>
-        <p:txBody>
-          <a:bodyPr wrap="square" anchor="t" lIns="0" rIns="0" tIns="0" bIns="0"/>
-          <a:lstStyle/>
-          <a:p>
-            <a:pPr algn="l"/>
-            <a:r>
-              <a:rPr sz="2000" b="0" i="0">
-                <a:solidFill>
-                  <a:srgbClr val="202122"/>
-                </a:solidFill>
-                <a:latin typeface="Calibri"/>
-              </a:rPr>
-              <a:t>Works for a wide range of users.</a:t>
+              <a:rPr sz="1900" b="0" i="0">
+                <a:solidFill>
+                  <a:srgbClr val="FFFFFF"/>
+                </a:solidFill>
+                <a:latin typeface="Cambria"/>
+              </a:rPr>
+              <a:t>After tapping 'Send', a message showing 'Payment sent to Sam' (confirmation) with an 'Undo' option (user control) builds trust.</a:t>
             </a:r>
           </a:p>
         </p:txBody>
@@ -5905,7 +7693,7 @@
                 </a:solidFill>
                 <a:latin typeface="Cambria"/>
               </a:rPr>
-              <a:t>UI features and techniques</a:t>
+              <a:t>UX design principles</a:t>
             </a:r>
           </a:p>
         </p:txBody>
@@ -5985,88 +7773,11 @@
         <p:spPr>
           <a:xfrm>
             <a:off x="548640" y="1600200"/>
-            <a:ext cx="5364327" cy="640080"/>
+            <a:ext cx="3515258" cy="2148840"/>
           </a:xfrm>
           <a:prstGeom prst="roundRect">
             <a:avLst>
-              <a:gd name="adj" fmla="val 15000"/>
-            </a:avLst>
-          </a:prstGeom>
-          <a:solidFill>
-            <a:srgbClr val="03306E"/>
-          </a:solidFill>
-          <a:ln>
-            <a:noFill/>
-          </a:ln>
-          <a:effectLst/>
-        </p:spPr>
-        <p:style>
-          <a:lnRef idx="1">
-            <a:schemeClr val="accent1"/>
-          </a:lnRef>
-          <a:fillRef idx="3">
-            <a:schemeClr val="accent1"/>
-          </a:fillRef>
-          <a:effectRef idx="2">
-            <a:schemeClr val="accent1"/>
-          </a:effectRef>
-          <a:fontRef idx="minor">
-            <a:schemeClr val="lt1"/>
-          </a:fontRef>
-        </p:style>
-        <p:txBody>
-          <a:bodyPr rtlCol="0" anchor="ctr"/>
-          <a:lstStyle/>
-          <a:p/>
-        </p:txBody>
-      </p:sp>
-      <p:sp>
-        <p:nvSpPr>
-          <p:cNvPr id="7" name="TextBox 6"/>
-          <p:cNvSpPr txBox="1"/>
-          <p:nvPr/>
-        </p:nvSpPr>
-        <p:spPr>
-          <a:xfrm>
-            <a:off x="777240" y="1600200"/>
-            <a:ext cx="4907127" cy="640080"/>
-          </a:xfrm>
-          <a:prstGeom prst="rect">
-            <a:avLst/>
-          </a:prstGeom>
-          <a:noFill/>
-        </p:spPr>
-        <p:txBody>
-          <a:bodyPr wrap="square" anchor="ctr" lIns="0" rIns="0" tIns="0" bIns="0"/>
-          <a:lstStyle/>
-          <a:p>
-            <a:pPr algn="l"/>
-            <a:r>
-              <a:rPr sz="2000" b="1" i="0">
-                <a:solidFill>
-                  <a:srgbClr val="FFFFFF"/>
-                </a:solidFill>
-                <a:latin typeface="Calibri"/>
-              </a:rPr>
-              <a:t>Features</a:t>
-            </a:r>
-          </a:p>
-        </p:txBody>
-      </p:sp>
-      <p:sp>
-        <p:nvSpPr>
-          <p:cNvPr id="8" name="Rounded Rectangle 7"/>
-          <p:cNvSpPr/>
-          <p:nvPr/>
-        </p:nvSpPr>
-        <p:spPr>
-          <a:xfrm>
-            <a:off x="548640" y="2377440"/>
-            <a:ext cx="5364327" cy="3794760"/>
-          </a:xfrm>
-          <a:prstGeom prst="roundRect">
-            <a:avLst>
-              <a:gd name="adj" fmla="val 4000"/>
+              <a:gd name="adj" fmla="val 6000"/>
             </a:avLst>
           </a:prstGeom>
           <a:solidFill>
@@ -6099,138 +7810,20 @@
       </p:sp>
       <p:sp>
         <p:nvSpPr>
-          <p:cNvPr id="9" name="TextBox 8"/>
-          <p:cNvSpPr txBox="1"/>
-          <p:nvPr/>
-        </p:nvSpPr>
-        <p:spPr>
-          <a:xfrm>
-            <a:off x="822959" y="2606040"/>
-            <a:ext cx="4815687" cy="3337560"/>
-          </a:xfrm>
-          <a:prstGeom prst="rect">
-            <a:avLst/>
-          </a:prstGeom>
-          <a:noFill/>
-        </p:spPr>
-        <p:txBody>
-          <a:bodyPr wrap="square" lIns="0" rIns="0" tIns="0" bIns="0">
-            <a:spAutoFit/>
-          </a:bodyPr>
-          <a:lstStyle/>
-          <a:p>
-            <a:pPr marL="274320" indent="-274320">
-              <a:spcAft>
-                <a:spcPts val="990"/>
-              </a:spcAft>
-              <a:buClr>
-                <a:srgbClr val="0645AD"/>
-              </a:buClr>
-              <a:buFont typeface="Arial"/>
-              <a:buChar char="•"/>
-            </a:pPr>
-            <a:r>
-              <a:rPr sz="2200" b="0">
-                <a:solidFill>
-                  <a:srgbClr val="202122"/>
-                </a:solidFill>
-                <a:latin typeface="Calibri"/>
-              </a:rPr>
-              <a:t>Images and animation</a:t>
-            </a:r>
-          </a:p>
-          <a:p>
-            <a:pPr marL="274320" indent="-274320">
-              <a:spcAft>
-                <a:spcPts val="990"/>
-              </a:spcAft>
-              <a:buClr>
-                <a:srgbClr val="0645AD"/>
-              </a:buClr>
-              <a:buFont typeface="Arial"/>
-              <a:buChar char="•"/>
-            </a:pPr>
-            <a:r>
-              <a:rPr sz="2200" b="0">
-                <a:solidFill>
-                  <a:srgbClr val="202122"/>
-                </a:solidFill>
-                <a:latin typeface="Calibri"/>
-              </a:rPr>
-              <a:t>Audio and visual effects</a:t>
-            </a:r>
-          </a:p>
-          <a:p>
-            <a:pPr marL="274320" indent="-274320">
-              <a:spcAft>
-                <a:spcPts val="990"/>
-              </a:spcAft>
-              <a:buClr>
-                <a:srgbClr val="0645AD"/>
-              </a:buClr>
-              <a:buFont typeface="Arial"/>
-              <a:buChar char="•"/>
-            </a:pPr>
-            <a:r>
-              <a:rPr sz="2200" b="1">
-                <a:solidFill>
-                  <a:srgbClr val="202122"/>
-                </a:solidFill>
-                <a:latin typeface="Calibri"/>
-              </a:rPr>
-              <a:t>Input and feedback:</a:t>
-            </a:r>
-            <a:r>
-              <a:rPr sz="2200" b="0">
-                <a:solidFill>
-                  <a:srgbClr val="202122"/>
-                </a:solidFill>
-                <a:latin typeface="Calibri"/>
-              </a:rPr>
-              <a:t> text, graphics, audio, haptic</a:t>
-            </a:r>
-          </a:p>
-          <a:p>
-            <a:pPr marL="274320" indent="-274320">
-              <a:spcAft>
-                <a:spcPts val="990"/>
-              </a:spcAft>
-              <a:buClr>
-                <a:srgbClr val="0645AD"/>
-              </a:buClr>
-              <a:buFont typeface="Arial"/>
-              <a:buChar char="•"/>
-            </a:pPr>
-            <a:r>
-              <a:rPr sz="2200" b="0">
-                <a:solidFill>
-                  <a:srgbClr val="202122"/>
-                </a:solidFill>
-                <a:latin typeface="Calibri"/>
-              </a:rPr>
-              <a:t>Dashboards, graphs, data presentation</a:t>
-            </a:r>
-          </a:p>
-        </p:txBody>
-      </p:sp>
-      <p:sp>
-        <p:nvSpPr>
-          <p:cNvPr id="10" name="Rounded Rectangle 9"/>
+          <p:cNvPr id="7" name="Oval 6"/>
           <p:cNvSpPr/>
           <p:nvPr/>
         </p:nvSpPr>
         <p:spPr>
           <a:xfrm>
-            <a:off x="6278727" y="1600200"/>
-            <a:ext cx="5364327" cy="640080"/>
-          </a:xfrm>
-          <a:prstGeom prst="roundRect">
-            <a:avLst>
-              <a:gd name="adj" fmla="val 15000"/>
-            </a:avLst>
+            <a:off x="777240" y="1828800"/>
+            <a:ext cx="457200" cy="457200"/>
+          </a:xfrm>
+          <a:prstGeom prst="ellipse">
+            <a:avLst/>
           </a:prstGeom>
           <a:solidFill>
-            <a:srgbClr val="0645AD"/>
+            <a:srgbClr val="33C17A"/>
           </a:solidFill>
           <a:ln>
             <a:noFill/>
@@ -6252,21 +7845,32 @@
           </a:fontRef>
         </p:style>
         <p:txBody>
-          <a:bodyPr rtlCol="0" anchor="ctr"/>
-          <a:lstStyle/>
-          <a:p/>
-        </p:txBody>
-      </p:sp>
-      <p:sp>
-        <p:nvSpPr>
-          <p:cNvPr id="11" name="TextBox 10"/>
+          <a:bodyPr rtlCol="0" anchor="ctr" lIns="0" rIns="0" tIns="0" bIns="0"/>
+          <a:lstStyle/>
+          <a:p>
+            <a:pPr algn="ctr"/>
+            <a:r>
+              <a:rPr sz="1500" b="1">
+                <a:solidFill>
+                  <a:srgbClr val="202122"/>
+                </a:solidFill>
+                <a:latin typeface="Calibri"/>
+              </a:rPr>
+              <a:t>1</a:t>
+            </a:r>
+          </a:p>
+        </p:txBody>
+      </p:sp>
+      <p:sp>
+        <p:nvSpPr>
+          <p:cNvPr id="8" name="TextBox 7"/>
           <p:cNvSpPr txBox="1"/>
           <p:nvPr/>
         </p:nvSpPr>
         <p:spPr>
           <a:xfrm>
-            <a:off x="6507327" y="1600200"/>
-            <a:ext cx="4907127" cy="640080"/>
+            <a:off x="1371600" y="1801368"/>
+            <a:ext cx="2509418" cy="512064"/>
           </a:xfrm>
           <a:prstGeom prst="rect">
             <a:avLst/>
@@ -6279,31 +7883,64 @@
           <a:p>
             <a:pPr algn="l"/>
             <a:r>
-              <a:rPr sz="2000" b="1" i="0">
-                <a:solidFill>
-                  <a:srgbClr val="FFFFFF"/>
-                </a:solidFill>
-                <a:latin typeface="Calibri"/>
-              </a:rPr>
-              <a:t>Techniques</a:t>
-            </a:r>
-          </a:p>
-        </p:txBody>
-      </p:sp>
-      <p:sp>
-        <p:nvSpPr>
-          <p:cNvPr id="12" name="Rounded Rectangle 11"/>
+              <a:rPr sz="1900" b="1" i="0">
+                <a:solidFill>
+                  <a:srgbClr val="03306E"/>
+                </a:solidFill>
+                <a:latin typeface="Calibri"/>
+              </a:rPr>
+              <a:t>Consistency</a:t>
+            </a:r>
+          </a:p>
+        </p:txBody>
+      </p:sp>
+      <p:sp>
+        <p:nvSpPr>
+          <p:cNvPr id="9" name="TextBox 8"/>
+          <p:cNvSpPr txBox="1"/>
+          <p:nvPr/>
+        </p:nvSpPr>
+        <p:spPr>
+          <a:xfrm>
+            <a:off x="777240" y="2468880"/>
+            <a:ext cx="3058058" cy="1143000"/>
+          </a:xfrm>
+          <a:prstGeom prst="rect">
+            <a:avLst/>
+          </a:prstGeom>
+          <a:noFill/>
+        </p:spPr>
+        <p:txBody>
+          <a:bodyPr wrap="square" anchor="t" lIns="0" rIns="0" tIns="0" bIns="0"/>
+          <a:lstStyle/>
+          <a:p>
+            <a:pPr algn="l"/>
+            <a:r>
+              <a:rPr sz="2000" b="0" i="0">
+                <a:solidFill>
+                  <a:srgbClr val="202122"/>
+                </a:solidFill>
+                <a:latin typeface="Calibri"/>
+              </a:rPr>
+              <a:t>Intuitive, pleasing and on-brand.</a:t>
+            </a:r>
+          </a:p>
+        </p:txBody>
+      </p:sp>
+      <p:sp>
+        <p:nvSpPr>
+          <p:cNvPr id="10" name="Rounded Rectangle 9"/>
           <p:cNvSpPr/>
           <p:nvPr/>
         </p:nvSpPr>
         <p:spPr>
           <a:xfrm>
-            <a:off x="6278727" y="2377440"/>
-            <a:ext cx="5364327" cy="3794760"/>
+            <a:off x="4338218" y="1600200"/>
+            <a:ext cx="3515258" cy="2148840"/>
           </a:xfrm>
           <a:prstGeom prst="roundRect">
             <a:avLst>
-              <a:gd name="adj" fmla="val 4000"/>
+              <a:gd name="adj" fmla="val 6000"/>
             </a:avLst>
           </a:prstGeom>
           <a:solidFill>
@@ -6336,14 +7973,100 @@
       </p:sp>
       <p:sp>
         <p:nvSpPr>
+          <p:cNvPr id="11" name="Oval 10"/>
+          <p:cNvSpPr/>
+          <p:nvPr/>
+        </p:nvSpPr>
+        <p:spPr>
+          <a:xfrm>
+            <a:off x="4566818" y="1828800"/>
+            <a:ext cx="457200" cy="457200"/>
+          </a:xfrm>
+          <a:prstGeom prst="ellipse">
+            <a:avLst/>
+          </a:prstGeom>
+          <a:solidFill>
+            <a:srgbClr val="33C17A"/>
+          </a:solidFill>
+          <a:ln>
+            <a:noFill/>
+          </a:ln>
+          <a:effectLst/>
+        </p:spPr>
+        <p:style>
+          <a:lnRef idx="1">
+            <a:schemeClr val="accent1"/>
+          </a:lnRef>
+          <a:fillRef idx="3">
+            <a:schemeClr val="accent1"/>
+          </a:fillRef>
+          <a:effectRef idx="2">
+            <a:schemeClr val="accent1"/>
+          </a:effectRef>
+          <a:fontRef idx="minor">
+            <a:schemeClr val="lt1"/>
+          </a:fontRef>
+        </p:style>
+        <p:txBody>
+          <a:bodyPr rtlCol="0" anchor="ctr" lIns="0" rIns="0" tIns="0" bIns="0"/>
+          <a:lstStyle/>
+          <a:p>
+            <a:pPr algn="ctr"/>
+            <a:r>
+              <a:rPr sz="1500" b="1">
+                <a:solidFill>
+                  <a:srgbClr val="202122"/>
+                </a:solidFill>
+                <a:latin typeface="Calibri"/>
+              </a:rPr>
+              <a:t>2</a:t>
+            </a:r>
+          </a:p>
+        </p:txBody>
+      </p:sp>
+      <p:sp>
+        <p:nvSpPr>
+          <p:cNvPr id="12" name="TextBox 11"/>
+          <p:cNvSpPr txBox="1"/>
+          <p:nvPr/>
+        </p:nvSpPr>
+        <p:spPr>
+          <a:xfrm>
+            <a:off x="5161178" y="1801368"/>
+            <a:ext cx="2509418" cy="512064"/>
+          </a:xfrm>
+          <a:prstGeom prst="rect">
+            <a:avLst/>
+          </a:prstGeom>
+          <a:noFill/>
+        </p:spPr>
+        <p:txBody>
+          <a:bodyPr wrap="square" anchor="ctr" lIns="0" rIns="0" tIns="0" bIns="0"/>
+          <a:lstStyle/>
+          <a:p>
+            <a:pPr algn="l"/>
+            <a:r>
+              <a:rPr sz="1700" b="1" i="0">
+                <a:solidFill>
+                  <a:srgbClr val="03306E"/>
+                </a:solidFill>
+                <a:latin typeface="Calibri"/>
+              </a:rPr>
+              <a:t>Information hierarchy</a:t>
+            </a:r>
+          </a:p>
+        </p:txBody>
+      </p:sp>
+      <p:sp>
+        <p:nvSpPr>
           <p:cNvPr id="13" name="TextBox 12"/>
           <p:cNvSpPr txBox="1"/>
           <p:nvPr/>
         </p:nvSpPr>
         <p:spPr>
           <a:xfrm>
-            <a:off x="6553047" y="2606040"/>
-            <a:ext cx="4815687" cy="3337560"/>
+            <a:off x="4566818" y="2468880"/>
+            <a:ext cx="3058058" cy="1143000"/>
           </a:xfrm>
           <a:prstGeom prst="rect">
             <a:avLst/>
@@ -6351,92 +8074,670 @@
           <a:noFill/>
         </p:spPr>
         <p:txBody>
-          <a:bodyPr wrap="square" lIns="0" rIns="0" tIns="0" bIns="0">
-            <a:spAutoFit/>
-          </a:bodyPr>
-          <a:lstStyle/>
-          <a:p>
-            <a:pPr marL="274320" indent="-274320">
-              <a:spcAft>
-                <a:spcPts val="990"/>
-              </a:spcAft>
-              <a:buClr>
-                <a:srgbClr val="0645AD"/>
-              </a:buClr>
-              <a:buFont typeface="Arial"/>
-              <a:buChar char="•"/>
-            </a:pPr>
-            <a:r>
-              <a:rPr sz="2200" b="0">
+          <a:bodyPr wrap="square" anchor="t" lIns="0" rIns="0" tIns="0" bIns="0"/>
+          <a:lstStyle/>
+          <a:p>
+            <a:pPr algn="l"/>
+            <a:r>
+              <a:rPr sz="2000" b="0" i="0">
                 <a:solidFill>
                   <a:srgbClr val="202122"/>
                 </a:solidFill>
                 <a:latin typeface="Calibri"/>
               </a:rPr>
-              <a:t>Layout grids and use of space</a:t>
-            </a:r>
-          </a:p>
-          <a:p>
-            <a:pPr marL="274320" indent="-274320">
-              <a:spcAft>
-                <a:spcPts val="990"/>
-              </a:spcAft>
-              <a:buClr>
-                <a:srgbClr val="0645AD"/>
-              </a:buClr>
-              <a:buFont typeface="Arial"/>
-              <a:buChar char="•"/>
-            </a:pPr>
-            <a:r>
-              <a:rPr sz="2200" b="0">
+              <a:t>Easier navigation.</a:t>
+            </a:r>
+          </a:p>
+        </p:txBody>
+      </p:sp>
+      <p:sp>
+        <p:nvSpPr>
+          <p:cNvPr id="14" name="Rounded Rectangle 13"/>
+          <p:cNvSpPr/>
+          <p:nvPr/>
+        </p:nvSpPr>
+        <p:spPr>
+          <a:xfrm>
+            <a:off x="8127796" y="1600200"/>
+            <a:ext cx="3515258" cy="2148840"/>
+          </a:xfrm>
+          <a:prstGeom prst="roundRect">
+            <a:avLst>
+              <a:gd name="adj" fmla="val 6000"/>
+            </a:avLst>
+          </a:prstGeom>
+          <a:solidFill>
+            <a:srgbClr val="EAF3FF"/>
+          </a:solidFill>
+          <a:ln>
+            <a:noFill/>
+          </a:ln>
+          <a:effectLst/>
+        </p:spPr>
+        <p:style>
+          <a:lnRef idx="1">
+            <a:schemeClr val="accent1"/>
+          </a:lnRef>
+          <a:fillRef idx="3">
+            <a:schemeClr val="accent1"/>
+          </a:fillRef>
+          <a:effectRef idx="2">
+            <a:schemeClr val="accent1"/>
+          </a:effectRef>
+          <a:fontRef idx="minor">
+            <a:schemeClr val="lt1"/>
+          </a:fontRef>
+        </p:style>
+        <p:txBody>
+          <a:bodyPr rtlCol="0" anchor="ctr"/>
+          <a:lstStyle/>
+          <a:p/>
+        </p:txBody>
+      </p:sp>
+      <p:sp>
+        <p:nvSpPr>
+          <p:cNvPr id="15" name="Oval 14"/>
+          <p:cNvSpPr/>
+          <p:nvPr/>
+        </p:nvSpPr>
+        <p:spPr>
+          <a:xfrm>
+            <a:off x="8356396" y="1828800"/>
+            <a:ext cx="457200" cy="457200"/>
+          </a:xfrm>
+          <a:prstGeom prst="ellipse">
+            <a:avLst/>
+          </a:prstGeom>
+          <a:solidFill>
+            <a:srgbClr val="33C17A"/>
+          </a:solidFill>
+          <a:ln>
+            <a:noFill/>
+          </a:ln>
+          <a:effectLst/>
+        </p:spPr>
+        <p:style>
+          <a:lnRef idx="1">
+            <a:schemeClr val="accent1"/>
+          </a:lnRef>
+          <a:fillRef idx="3">
+            <a:schemeClr val="accent1"/>
+          </a:fillRef>
+          <a:effectRef idx="2">
+            <a:schemeClr val="accent1"/>
+          </a:effectRef>
+          <a:fontRef idx="minor">
+            <a:schemeClr val="lt1"/>
+          </a:fontRef>
+        </p:style>
+        <p:txBody>
+          <a:bodyPr rtlCol="0" anchor="ctr" lIns="0" rIns="0" tIns="0" bIns="0"/>
+          <a:lstStyle/>
+          <a:p>
+            <a:pPr algn="ctr"/>
+            <a:r>
+              <a:rPr sz="1500" b="1">
                 <a:solidFill>
                   <a:srgbClr val="202122"/>
                 </a:solidFill>
                 <a:latin typeface="Calibri"/>
               </a:rPr>
-              <a:t>Fonts, letter and line spacing, justification</a:t>
-            </a:r>
-          </a:p>
-          <a:p>
-            <a:pPr marL="274320" indent="-274320">
-              <a:spcAft>
-                <a:spcPts val="990"/>
-              </a:spcAft>
-              <a:buClr>
-                <a:srgbClr val="0645AD"/>
-              </a:buClr>
-              <a:buFont typeface="Arial"/>
-              <a:buChar char="•"/>
-            </a:pPr>
-            <a:r>
-              <a:rPr sz="2200" b="0">
+              <a:t>3</a:t>
+            </a:r>
+          </a:p>
+        </p:txBody>
+      </p:sp>
+      <p:sp>
+        <p:nvSpPr>
+          <p:cNvPr id="16" name="TextBox 15"/>
+          <p:cNvSpPr txBox="1"/>
+          <p:nvPr/>
+        </p:nvSpPr>
+        <p:spPr>
+          <a:xfrm>
+            <a:off x="8950756" y="1801368"/>
+            <a:ext cx="2509418" cy="512064"/>
+          </a:xfrm>
+          <a:prstGeom prst="rect">
+            <a:avLst/>
+          </a:prstGeom>
+          <a:noFill/>
+        </p:spPr>
+        <p:txBody>
+          <a:bodyPr wrap="square" anchor="ctr" lIns="0" rIns="0" tIns="0" bIns="0"/>
+          <a:lstStyle/>
+          <a:p>
+            <a:pPr algn="l"/>
+            <a:r>
+              <a:rPr sz="1900" b="1" i="0">
+                <a:solidFill>
+                  <a:srgbClr val="03306E"/>
+                </a:solidFill>
+                <a:latin typeface="Calibri"/>
+              </a:rPr>
+              <a:t>Visual hierarchy</a:t>
+            </a:r>
+          </a:p>
+        </p:txBody>
+      </p:sp>
+      <p:sp>
+        <p:nvSpPr>
+          <p:cNvPr id="17" name="TextBox 16"/>
+          <p:cNvSpPr txBox="1"/>
+          <p:nvPr/>
+        </p:nvSpPr>
+        <p:spPr>
+          <a:xfrm>
+            <a:off x="8356396" y="2468880"/>
+            <a:ext cx="3058058" cy="1143000"/>
+          </a:xfrm>
+          <a:prstGeom prst="rect">
+            <a:avLst/>
+          </a:prstGeom>
+          <a:noFill/>
+        </p:spPr>
+        <p:txBody>
+          <a:bodyPr wrap="square" anchor="t" lIns="0" rIns="0" tIns="0" bIns="0"/>
+          <a:lstStyle/>
+          <a:p>
+            <a:pPr algn="l"/>
+            <a:r>
+              <a:rPr sz="2000" b="0" i="0">
                 <a:solidFill>
                   <a:srgbClr val="202122"/>
                 </a:solidFill>
                 <a:latin typeface="Calibri"/>
               </a:rPr>
-              <a:t>Colour and contrast</a:t>
-            </a:r>
-          </a:p>
-          <a:p>
-            <a:pPr marL="274320" indent="-274320">
-              <a:spcAft>
-                <a:spcPts val="990"/>
-              </a:spcAft>
-              <a:buClr>
-                <a:srgbClr val="0645AD"/>
-              </a:buClr>
-              <a:buFont typeface="Arial"/>
-              <a:buChar char="•"/>
-            </a:pPr>
-            <a:r>
-              <a:rPr sz="2200" b="0">
+              <a:t>Important content stands out.</a:t>
+            </a:r>
+          </a:p>
+        </p:txBody>
+      </p:sp>
+      <p:sp>
+        <p:nvSpPr>
+          <p:cNvPr id="18" name="Rounded Rectangle 17"/>
+          <p:cNvSpPr/>
+          <p:nvPr/>
+        </p:nvSpPr>
+        <p:spPr>
+          <a:xfrm>
+            <a:off x="548640" y="4023360"/>
+            <a:ext cx="3515258" cy="2148840"/>
+          </a:xfrm>
+          <a:prstGeom prst="roundRect">
+            <a:avLst>
+              <a:gd name="adj" fmla="val 6000"/>
+            </a:avLst>
+          </a:prstGeom>
+          <a:solidFill>
+            <a:srgbClr val="EAF3FF"/>
+          </a:solidFill>
+          <a:ln>
+            <a:noFill/>
+          </a:ln>
+          <a:effectLst/>
+        </p:spPr>
+        <p:style>
+          <a:lnRef idx="1">
+            <a:schemeClr val="accent1"/>
+          </a:lnRef>
+          <a:fillRef idx="3">
+            <a:schemeClr val="accent1"/>
+          </a:fillRef>
+          <a:effectRef idx="2">
+            <a:schemeClr val="accent1"/>
+          </a:effectRef>
+          <a:fontRef idx="minor">
+            <a:schemeClr val="lt1"/>
+          </a:fontRef>
+        </p:style>
+        <p:txBody>
+          <a:bodyPr rtlCol="0" anchor="ctr"/>
+          <a:lstStyle/>
+          <a:p/>
+        </p:txBody>
+      </p:sp>
+      <p:sp>
+        <p:nvSpPr>
+          <p:cNvPr id="19" name="Oval 18"/>
+          <p:cNvSpPr/>
+          <p:nvPr/>
+        </p:nvSpPr>
+        <p:spPr>
+          <a:xfrm>
+            <a:off x="777240" y="4251960"/>
+            <a:ext cx="457200" cy="457200"/>
+          </a:xfrm>
+          <a:prstGeom prst="ellipse">
+            <a:avLst/>
+          </a:prstGeom>
+          <a:solidFill>
+            <a:srgbClr val="33C17A"/>
+          </a:solidFill>
+          <a:ln>
+            <a:noFill/>
+          </a:ln>
+          <a:effectLst/>
+        </p:spPr>
+        <p:style>
+          <a:lnRef idx="1">
+            <a:schemeClr val="accent1"/>
+          </a:lnRef>
+          <a:fillRef idx="3">
+            <a:schemeClr val="accent1"/>
+          </a:fillRef>
+          <a:effectRef idx="2">
+            <a:schemeClr val="accent1"/>
+          </a:effectRef>
+          <a:fontRef idx="minor">
+            <a:schemeClr val="lt1"/>
+          </a:fontRef>
+        </p:style>
+        <p:txBody>
+          <a:bodyPr rtlCol="0" anchor="ctr" lIns="0" rIns="0" tIns="0" bIns="0"/>
+          <a:lstStyle/>
+          <a:p>
+            <a:pPr algn="ctr"/>
+            <a:r>
+              <a:rPr sz="1500" b="1">
                 <a:solidFill>
                   <a:srgbClr val="202122"/>
                 </a:solidFill>
                 <a:latin typeface="Calibri"/>
               </a:rPr>
-              <a:t>Input focus and hover controls</a:t>
+              <a:t>4</a:t>
+            </a:r>
+          </a:p>
+        </p:txBody>
+      </p:sp>
+      <p:sp>
+        <p:nvSpPr>
+          <p:cNvPr id="20" name="TextBox 19"/>
+          <p:cNvSpPr txBox="1"/>
+          <p:nvPr/>
+        </p:nvSpPr>
+        <p:spPr>
+          <a:xfrm>
+            <a:off x="1371600" y="4224528"/>
+            <a:ext cx="2509418" cy="512064"/>
+          </a:xfrm>
+          <a:prstGeom prst="rect">
+            <a:avLst/>
+          </a:prstGeom>
+          <a:noFill/>
+        </p:spPr>
+        <p:txBody>
+          <a:bodyPr wrap="square" anchor="ctr" lIns="0" rIns="0" tIns="0" bIns="0"/>
+          <a:lstStyle/>
+          <a:p>
+            <a:pPr algn="l"/>
+            <a:r>
+              <a:rPr sz="1900" b="1" i="0">
+                <a:solidFill>
+                  <a:srgbClr val="03306E"/>
+                </a:solidFill>
+                <a:latin typeface="Calibri"/>
+              </a:rPr>
+              <a:t>Confirmation</a:t>
+            </a:r>
+          </a:p>
+        </p:txBody>
+      </p:sp>
+      <p:sp>
+        <p:nvSpPr>
+          <p:cNvPr id="21" name="TextBox 20"/>
+          <p:cNvSpPr txBox="1"/>
+          <p:nvPr/>
+        </p:nvSpPr>
+        <p:spPr>
+          <a:xfrm>
+            <a:off x="777240" y="4892040"/>
+            <a:ext cx="3058058" cy="1143000"/>
+          </a:xfrm>
+          <a:prstGeom prst="rect">
+            <a:avLst/>
+          </a:prstGeom>
+          <a:noFill/>
+        </p:spPr>
+        <p:txBody>
+          <a:bodyPr wrap="square" anchor="t" lIns="0" rIns="0" tIns="0" bIns="0"/>
+          <a:lstStyle/>
+          <a:p>
+            <a:pPr algn="l"/>
+            <a:r>
+              <a:rPr sz="2000" b="0" i="0">
+                <a:solidFill>
+                  <a:srgbClr val="202122"/>
+                </a:solidFill>
+                <a:latin typeface="Calibri"/>
+              </a:rPr>
+              <a:t>Users know what they did and its effect.</a:t>
+            </a:r>
+          </a:p>
+        </p:txBody>
+      </p:sp>
+      <p:sp>
+        <p:nvSpPr>
+          <p:cNvPr id="22" name="Rounded Rectangle 21"/>
+          <p:cNvSpPr/>
+          <p:nvPr/>
+        </p:nvSpPr>
+        <p:spPr>
+          <a:xfrm>
+            <a:off x="4338218" y="4023360"/>
+            <a:ext cx="3515258" cy="2148840"/>
+          </a:xfrm>
+          <a:prstGeom prst="roundRect">
+            <a:avLst>
+              <a:gd name="adj" fmla="val 6000"/>
+            </a:avLst>
+          </a:prstGeom>
+          <a:solidFill>
+            <a:srgbClr val="EAF3FF"/>
+          </a:solidFill>
+          <a:ln>
+            <a:noFill/>
+          </a:ln>
+          <a:effectLst/>
+        </p:spPr>
+        <p:style>
+          <a:lnRef idx="1">
+            <a:schemeClr val="accent1"/>
+          </a:lnRef>
+          <a:fillRef idx="3">
+            <a:schemeClr val="accent1"/>
+          </a:fillRef>
+          <a:effectRef idx="2">
+            <a:schemeClr val="accent1"/>
+          </a:effectRef>
+          <a:fontRef idx="minor">
+            <a:schemeClr val="lt1"/>
+          </a:fontRef>
+        </p:style>
+        <p:txBody>
+          <a:bodyPr rtlCol="0" anchor="ctr"/>
+          <a:lstStyle/>
+          <a:p/>
+        </p:txBody>
+      </p:sp>
+      <p:sp>
+        <p:nvSpPr>
+          <p:cNvPr id="23" name="Oval 22"/>
+          <p:cNvSpPr/>
+          <p:nvPr/>
+        </p:nvSpPr>
+        <p:spPr>
+          <a:xfrm>
+            <a:off x="4566818" y="4251960"/>
+            <a:ext cx="457200" cy="457200"/>
+          </a:xfrm>
+          <a:prstGeom prst="ellipse">
+            <a:avLst/>
+          </a:prstGeom>
+          <a:solidFill>
+            <a:srgbClr val="33C17A"/>
+          </a:solidFill>
+          <a:ln>
+            <a:noFill/>
+          </a:ln>
+          <a:effectLst/>
+        </p:spPr>
+        <p:style>
+          <a:lnRef idx="1">
+            <a:schemeClr val="accent1"/>
+          </a:lnRef>
+          <a:fillRef idx="3">
+            <a:schemeClr val="accent1"/>
+          </a:fillRef>
+          <a:effectRef idx="2">
+            <a:schemeClr val="accent1"/>
+          </a:effectRef>
+          <a:fontRef idx="minor">
+            <a:schemeClr val="lt1"/>
+          </a:fontRef>
+        </p:style>
+        <p:txBody>
+          <a:bodyPr rtlCol="0" anchor="ctr" lIns="0" rIns="0" tIns="0" bIns="0"/>
+          <a:lstStyle/>
+          <a:p>
+            <a:pPr algn="ctr"/>
+            <a:r>
+              <a:rPr sz="1500" b="1">
+                <a:solidFill>
+                  <a:srgbClr val="202122"/>
+                </a:solidFill>
+                <a:latin typeface="Calibri"/>
+              </a:rPr>
+              <a:t>5</a:t>
+            </a:r>
+          </a:p>
+        </p:txBody>
+      </p:sp>
+      <p:sp>
+        <p:nvSpPr>
+          <p:cNvPr id="24" name="TextBox 23"/>
+          <p:cNvSpPr txBox="1"/>
+          <p:nvPr/>
+        </p:nvSpPr>
+        <p:spPr>
+          <a:xfrm>
+            <a:off x="5161178" y="4224528"/>
+            <a:ext cx="2509418" cy="512064"/>
+          </a:xfrm>
+          <a:prstGeom prst="rect">
+            <a:avLst/>
+          </a:prstGeom>
+          <a:noFill/>
+        </p:spPr>
+        <p:txBody>
+          <a:bodyPr wrap="square" anchor="ctr" lIns="0" rIns="0" tIns="0" bIns="0"/>
+          <a:lstStyle/>
+          <a:p>
+            <a:pPr algn="l"/>
+            <a:r>
+              <a:rPr sz="1900" b="1" i="0">
+                <a:solidFill>
+                  <a:srgbClr val="03306E"/>
+                </a:solidFill>
+                <a:latin typeface="Calibri"/>
+              </a:rPr>
+              <a:t>User control</a:t>
+            </a:r>
+          </a:p>
+        </p:txBody>
+      </p:sp>
+      <p:sp>
+        <p:nvSpPr>
+          <p:cNvPr id="25" name="TextBox 24"/>
+          <p:cNvSpPr txBox="1"/>
+          <p:nvPr/>
+        </p:nvSpPr>
+        <p:spPr>
+          <a:xfrm>
+            <a:off x="4566818" y="4892040"/>
+            <a:ext cx="3058058" cy="1143000"/>
+          </a:xfrm>
+          <a:prstGeom prst="rect">
+            <a:avLst/>
+          </a:prstGeom>
+          <a:noFill/>
+        </p:spPr>
+        <p:txBody>
+          <a:bodyPr wrap="square" anchor="t" lIns="0" rIns="0" tIns="0" bIns="0"/>
+          <a:lstStyle/>
+          <a:p>
+            <a:pPr algn="l"/>
+            <a:r>
+              <a:rPr sz="2000" b="0" i="0">
+                <a:solidFill>
+                  <a:srgbClr val="202122"/>
+                </a:solidFill>
+                <a:latin typeface="Calibri"/>
+              </a:rPr>
+              <a:t>Efficient navigation and easy error correction.</a:t>
+            </a:r>
+          </a:p>
+        </p:txBody>
+      </p:sp>
+      <p:sp>
+        <p:nvSpPr>
+          <p:cNvPr id="26" name="Rounded Rectangle 25"/>
+          <p:cNvSpPr/>
+          <p:nvPr/>
+        </p:nvSpPr>
+        <p:spPr>
+          <a:xfrm>
+            <a:off x="8127796" y="4023360"/>
+            <a:ext cx="3515258" cy="2148840"/>
+          </a:xfrm>
+          <a:prstGeom prst="roundRect">
+            <a:avLst>
+              <a:gd name="adj" fmla="val 6000"/>
+            </a:avLst>
+          </a:prstGeom>
+          <a:solidFill>
+            <a:srgbClr val="EAF3FF"/>
+          </a:solidFill>
+          <a:ln>
+            <a:noFill/>
+          </a:ln>
+          <a:effectLst/>
+        </p:spPr>
+        <p:style>
+          <a:lnRef idx="1">
+            <a:schemeClr val="accent1"/>
+          </a:lnRef>
+          <a:fillRef idx="3">
+            <a:schemeClr val="accent1"/>
+          </a:fillRef>
+          <a:effectRef idx="2">
+            <a:schemeClr val="accent1"/>
+          </a:effectRef>
+          <a:fontRef idx="minor">
+            <a:schemeClr val="lt1"/>
+          </a:fontRef>
+        </p:style>
+        <p:txBody>
+          <a:bodyPr rtlCol="0" anchor="ctr"/>
+          <a:lstStyle/>
+          <a:p/>
+        </p:txBody>
+      </p:sp>
+      <p:sp>
+        <p:nvSpPr>
+          <p:cNvPr id="27" name="Oval 26"/>
+          <p:cNvSpPr/>
+          <p:nvPr/>
+        </p:nvSpPr>
+        <p:spPr>
+          <a:xfrm>
+            <a:off x="8356396" y="4251960"/>
+            <a:ext cx="457200" cy="457200"/>
+          </a:xfrm>
+          <a:prstGeom prst="ellipse">
+            <a:avLst/>
+          </a:prstGeom>
+          <a:solidFill>
+            <a:srgbClr val="33C17A"/>
+          </a:solidFill>
+          <a:ln>
+            <a:noFill/>
+          </a:ln>
+          <a:effectLst/>
+        </p:spPr>
+        <p:style>
+          <a:lnRef idx="1">
+            <a:schemeClr val="accent1"/>
+          </a:lnRef>
+          <a:fillRef idx="3">
+            <a:schemeClr val="accent1"/>
+          </a:fillRef>
+          <a:effectRef idx="2">
+            <a:schemeClr val="accent1"/>
+          </a:effectRef>
+          <a:fontRef idx="minor">
+            <a:schemeClr val="lt1"/>
+          </a:fontRef>
+        </p:style>
+        <p:txBody>
+          <a:bodyPr rtlCol="0" anchor="ctr" lIns="0" rIns="0" tIns="0" bIns="0"/>
+          <a:lstStyle/>
+          <a:p>
+            <a:pPr algn="ctr"/>
+            <a:r>
+              <a:rPr sz="1500" b="1">
+                <a:solidFill>
+                  <a:srgbClr val="202122"/>
+                </a:solidFill>
+                <a:latin typeface="Calibri"/>
+              </a:rPr>
+              <a:t>6</a:t>
+            </a:r>
+          </a:p>
+        </p:txBody>
+      </p:sp>
+      <p:sp>
+        <p:nvSpPr>
+          <p:cNvPr id="28" name="TextBox 27"/>
+          <p:cNvSpPr txBox="1"/>
+          <p:nvPr/>
+        </p:nvSpPr>
+        <p:spPr>
+          <a:xfrm>
+            <a:off x="8950756" y="4224528"/>
+            <a:ext cx="2509418" cy="512064"/>
+          </a:xfrm>
+          <a:prstGeom prst="rect">
+            <a:avLst/>
+          </a:prstGeom>
+          <a:noFill/>
+        </p:spPr>
+        <p:txBody>
+          <a:bodyPr wrap="square" anchor="ctr" lIns="0" rIns="0" tIns="0" bIns="0"/>
+          <a:lstStyle/>
+          <a:p>
+            <a:pPr algn="l"/>
+            <a:r>
+              <a:rPr sz="1900" b="1" i="0">
+                <a:solidFill>
+                  <a:srgbClr val="03306E"/>
+                </a:solidFill>
+                <a:latin typeface="Calibri"/>
+              </a:rPr>
+              <a:t>Accessibility</a:t>
+            </a:r>
+          </a:p>
+        </p:txBody>
+      </p:sp>
+      <p:sp>
+        <p:nvSpPr>
+          <p:cNvPr id="29" name="TextBox 28"/>
+          <p:cNvSpPr txBox="1"/>
+          <p:nvPr/>
+        </p:nvSpPr>
+        <p:spPr>
+          <a:xfrm>
+            <a:off x="8356396" y="4892040"/>
+            <a:ext cx="3058058" cy="1143000"/>
+          </a:xfrm>
+          <a:prstGeom prst="rect">
+            <a:avLst/>
+          </a:prstGeom>
+          <a:noFill/>
+        </p:spPr>
+        <p:txBody>
+          <a:bodyPr wrap="square" anchor="t" lIns="0" rIns="0" tIns="0" bIns="0"/>
+          <a:lstStyle/>
+          <a:p>
+            <a:pPr algn="l"/>
+            <a:r>
+              <a:rPr sz="2000" b="0" i="0">
+                <a:solidFill>
+                  <a:srgbClr val="202122"/>
+                </a:solidFill>
+                <a:latin typeface="Calibri"/>
+              </a:rPr>
+              <a:t>Works for a wide range of users.</a:t>
             </a:r>
           </a:p>
         </p:txBody>
@@ -6528,7 +8829,7 @@
                 </a:solidFill>
                 <a:latin typeface="Cambria"/>
               </a:rPr>
-              <a:t>Design decisions</a:t>
+              <a:t>Quick check: UX design principles</a:t>
             </a:r>
           </a:p>
         </p:txBody>
@@ -6601,58 +8902,14 @@
       </p:sp>
       <p:sp>
         <p:nvSpPr>
-          <p:cNvPr id="6" name="Rounded Rectangle 5"/>
+          <p:cNvPr id="6" name="Oval 5"/>
           <p:cNvSpPr/>
           <p:nvPr/>
         </p:nvSpPr>
         <p:spPr>
           <a:xfrm>
-            <a:off x="548640" y="1600200"/>
-            <a:ext cx="5410047" cy="2148840"/>
-          </a:xfrm>
-          <a:prstGeom prst="roundRect">
-            <a:avLst>
-              <a:gd name="adj" fmla="val 6000"/>
-            </a:avLst>
-          </a:prstGeom>
-          <a:solidFill>
-            <a:srgbClr val="EAF3FF"/>
-          </a:solidFill>
-          <a:ln>
-            <a:noFill/>
-          </a:ln>
-          <a:effectLst/>
-        </p:spPr>
-        <p:style>
-          <a:lnRef idx="1">
-            <a:schemeClr val="accent1"/>
-          </a:lnRef>
-          <a:fillRef idx="3">
-            <a:schemeClr val="accent1"/>
-          </a:fillRef>
-          <a:effectRef idx="2">
-            <a:schemeClr val="accent1"/>
-          </a:effectRef>
-          <a:fontRef idx="minor">
-            <a:schemeClr val="lt1"/>
-          </a:fontRef>
-        </p:style>
-        <p:txBody>
-          <a:bodyPr rtlCol="0" anchor="ctr"/>
-          <a:lstStyle/>
-          <a:p/>
-        </p:txBody>
-      </p:sp>
-      <p:sp>
-        <p:nvSpPr>
-          <p:cNvPr id="7" name="Oval 6"/>
-          <p:cNvSpPr/>
-          <p:nvPr/>
-        </p:nvSpPr>
-        <p:spPr>
-          <a:xfrm>
-            <a:off x="777240" y="1828800"/>
-            <a:ext cx="457200" cy="457200"/>
+            <a:off x="548640" y="1691640"/>
+            <a:ext cx="502920" cy="502920"/>
           </a:xfrm>
           <a:prstGeom prst="ellipse">
             <a:avLst/>
@@ -6685,7 +8942,7 @@
           <a:p>
             <a:pPr algn="ctr"/>
             <a:r>
-              <a:rPr sz="1500" b="1">
+              <a:rPr sz="1600" b="1">
                 <a:solidFill>
                   <a:srgbClr val="202122"/>
                 </a:solidFill>
@@ -6698,14 +8955,14 @@
       </p:sp>
       <p:sp>
         <p:nvSpPr>
-          <p:cNvPr id="8" name="TextBox 7"/>
+          <p:cNvPr id="7" name="TextBox 6"/>
           <p:cNvSpPr txBox="1"/>
           <p:nvPr/>
         </p:nvSpPr>
         <p:spPr>
           <a:xfrm>
-            <a:off x="1371600" y="1801368"/>
-            <a:ext cx="4404207" cy="512064"/>
+            <a:off x="1371600" y="1645920"/>
+            <a:ext cx="10271455" cy="1188720"/>
           </a:xfrm>
           <a:prstGeom prst="rect">
             <a:avLst/>
@@ -6713,109 +8970,32 @@
           <a:noFill/>
         </p:spPr>
         <p:txBody>
-          <a:bodyPr wrap="square" anchor="ctr" lIns="0" rIns="0" tIns="0" bIns="0"/>
+          <a:bodyPr wrap="square" anchor="t" lIns="0" rIns="0" tIns="0" bIns="0"/>
           <a:lstStyle/>
           <a:p>
             <a:pPr algn="l"/>
             <a:r>
-              <a:rPr sz="1900" b="1" i="0">
-                <a:solidFill>
-                  <a:srgbClr val="03306E"/>
-                </a:solidFill>
-                <a:latin typeface="Calibri"/>
-              </a:rPr>
-              <a:t>Platform</a:t>
-            </a:r>
-          </a:p>
-        </p:txBody>
-      </p:sp>
-      <p:sp>
-        <p:nvSpPr>
-          <p:cNvPr id="9" name="TextBox 8"/>
-          <p:cNvSpPr txBox="1"/>
-          <p:nvPr/>
-        </p:nvSpPr>
-        <p:spPr>
-          <a:xfrm>
-            <a:off x="777240" y="2468880"/>
-            <a:ext cx="4952847" cy="1143000"/>
-          </a:xfrm>
-          <a:prstGeom prst="rect">
-            <a:avLst/>
-          </a:prstGeom>
-          <a:noFill/>
-        </p:spPr>
-        <p:txBody>
-          <a:bodyPr wrap="square" anchor="t" lIns="0" rIns="0" tIns="0" bIns="0"/>
-          <a:lstStyle/>
-          <a:p>
-            <a:pPr algn="l"/>
-            <a:r>
-              <a:rPr sz="2000" b="0" i="0">
+              <a:rPr sz="2400" b="0" i="0">
                 <a:solidFill>
                   <a:srgbClr val="202122"/>
                 </a:solidFill>
                 <a:latin typeface="Calibri"/>
               </a:rPr>
-              <a:t>Browser support and target device.</a:t>
-            </a:r>
-          </a:p>
-        </p:txBody>
-      </p:sp>
-      <p:sp>
-        <p:nvSpPr>
-          <p:cNvPr id="10" name="Rounded Rectangle 9"/>
+              <a:t>Which principle means users know what their action did?</a:t>
+            </a:r>
+          </a:p>
+        </p:txBody>
+      </p:sp>
+      <p:sp>
+        <p:nvSpPr>
+          <p:cNvPr id="8" name="Oval 7"/>
           <p:cNvSpPr/>
           <p:nvPr/>
         </p:nvSpPr>
         <p:spPr>
           <a:xfrm>
-            <a:off x="6233007" y="1600200"/>
-            <a:ext cx="5410047" cy="2148840"/>
-          </a:xfrm>
-          <a:prstGeom prst="roundRect">
-            <a:avLst>
-              <a:gd name="adj" fmla="val 6000"/>
-            </a:avLst>
-          </a:prstGeom>
-          <a:solidFill>
-            <a:srgbClr val="EAF3FF"/>
-          </a:solidFill>
-          <a:ln>
-            <a:noFill/>
-          </a:ln>
-          <a:effectLst/>
-        </p:spPr>
-        <p:style>
-          <a:lnRef idx="1">
-            <a:schemeClr val="accent1"/>
-          </a:lnRef>
-          <a:fillRef idx="3">
-            <a:schemeClr val="accent1"/>
-          </a:fillRef>
-          <a:effectRef idx="2">
-            <a:schemeClr val="accent1"/>
-          </a:effectRef>
-          <a:fontRef idx="minor">
-            <a:schemeClr val="lt1"/>
-          </a:fontRef>
-        </p:style>
-        <p:txBody>
-          <a:bodyPr rtlCol="0" anchor="ctr"/>
-          <a:lstStyle/>
-          <a:p/>
-        </p:txBody>
-      </p:sp>
-      <p:sp>
-        <p:nvSpPr>
-          <p:cNvPr id="11" name="Oval 10"/>
-          <p:cNvSpPr/>
-          <p:nvPr/>
-        </p:nvSpPr>
-        <p:spPr>
-          <a:xfrm>
-            <a:off x="6461607" y="1828800"/>
-            <a:ext cx="457200" cy="457200"/>
+            <a:off x="548640" y="3108960"/>
+            <a:ext cx="502920" cy="502920"/>
           </a:xfrm>
           <a:prstGeom prst="ellipse">
             <a:avLst/>
@@ -6848,7 +9028,7 @@
           <a:p>
             <a:pPr algn="ctr"/>
             <a:r>
-              <a:rPr sz="1500" b="1">
+              <a:rPr sz="1600" b="1">
                 <a:solidFill>
                   <a:srgbClr val="202122"/>
                 </a:solidFill>
@@ -6861,14 +9041,14 @@
       </p:sp>
       <p:sp>
         <p:nvSpPr>
-          <p:cNvPr id="12" name="TextBox 11"/>
+          <p:cNvPr id="9" name="TextBox 8"/>
           <p:cNvSpPr txBox="1"/>
           <p:nvPr/>
         </p:nvSpPr>
         <p:spPr>
           <a:xfrm>
-            <a:off x="7055967" y="1801368"/>
-            <a:ext cx="4404207" cy="512064"/>
+            <a:off x="1371600" y="3063240"/>
+            <a:ext cx="10271455" cy="1188720"/>
           </a:xfrm>
           <a:prstGeom prst="rect">
             <a:avLst/>
@@ -6876,109 +9056,32 @@
           <a:noFill/>
         </p:spPr>
         <p:txBody>
-          <a:bodyPr wrap="square" anchor="ctr" lIns="0" rIns="0" tIns="0" bIns="0"/>
+          <a:bodyPr wrap="square" anchor="t" lIns="0" rIns="0" tIns="0" bIns="0"/>
           <a:lstStyle/>
           <a:p>
             <a:pPr algn="l"/>
             <a:r>
-              <a:rPr sz="1900" b="1" i="0">
-                <a:solidFill>
-                  <a:srgbClr val="03306E"/>
-                </a:solidFill>
-                <a:latin typeface="Calibri"/>
-              </a:rPr>
-              <a:t>Users</a:t>
-            </a:r>
-          </a:p>
-        </p:txBody>
-      </p:sp>
-      <p:sp>
-        <p:nvSpPr>
-          <p:cNvPr id="13" name="TextBox 12"/>
-          <p:cNvSpPr txBox="1"/>
-          <p:nvPr/>
-        </p:nvSpPr>
-        <p:spPr>
-          <a:xfrm>
-            <a:off x="6461607" y="2468880"/>
-            <a:ext cx="4952847" cy="1143000"/>
-          </a:xfrm>
-          <a:prstGeom prst="rect">
-            <a:avLst/>
-          </a:prstGeom>
-          <a:noFill/>
-        </p:spPr>
-        <p:txBody>
-          <a:bodyPr wrap="square" anchor="t" lIns="0" rIns="0" tIns="0" bIns="0"/>
-          <a:lstStyle/>
-          <a:p>
-            <a:pPr algn="l"/>
-            <a:r>
-              <a:rPr sz="2000" b="0" i="0">
+              <a:rPr sz="2400" b="0" i="0">
                 <a:solidFill>
                   <a:srgbClr val="202122"/>
                 </a:solidFill>
                 <a:latin typeface="Calibri"/>
               </a:rPr>
-              <a:t>Characteristics, accessibility and input method: voice, text, touch, mouse.</a:t>
-            </a:r>
-          </a:p>
-        </p:txBody>
-      </p:sp>
-      <p:sp>
-        <p:nvSpPr>
-          <p:cNvPr id="14" name="Rounded Rectangle 13"/>
+              <a:t>What is a wireframe?</a:t>
+            </a:r>
+          </a:p>
+        </p:txBody>
+      </p:sp>
+      <p:sp>
+        <p:nvSpPr>
+          <p:cNvPr id="10" name="Oval 9"/>
           <p:cNvSpPr/>
           <p:nvPr/>
         </p:nvSpPr>
         <p:spPr>
           <a:xfrm>
-            <a:off x="548640" y="4023360"/>
-            <a:ext cx="5410047" cy="2148840"/>
-          </a:xfrm>
-          <a:prstGeom prst="roundRect">
-            <a:avLst>
-              <a:gd name="adj" fmla="val 6000"/>
-            </a:avLst>
-          </a:prstGeom>
-          <a:solidFill>
-            <a:srgbClr val="EAF3FF"/>
-          </a:solidFill>
-          <a:ln>
-            <a:noFill/>
-          </a:ln>
-          <a:effectLst/>
-        </p:spPr>
-        <p:style>
-          <a:lnRef idx="1">
-            <a:schemeClr val="accent1"/>
-          </a:lnRef>
-          <a:fillRef idx="3">
-            <a:schemeClr val="accent1"/>
-          </a:fillRef>
-          <a:effectRef idx="2">
-            <a:schemeClr val="accent1"/>
-          </a:effectRef>
-          <a:fontRef idx="minor">
-            <a:schemeClr val="lt1"/>
-          </a:fontRef>
-        </p:style>
-        <p:txBody>
-          <a:bodyPr rtlCol="0" anchor="ctr"/>
-          <a:lstStyle/>
-          <a:p/>
-        </p:txBody>
-      </p:sp>
-      <p:sp>
-        <p:nvSpPr>
-          <p:cNvPr id="15" name="Oval 14"/>
-          <p:cNvSpPr/>
-          <p:nvPr/>
-        </p:nvSpPr>
-        <p:spPr>
-          <a:xfrm>
-            <a:off x="777240" y="4251960"/>
-            <a:ext cx="457200" cy="457200"/>
+            <a:off x="548640" y="4526280"/>
+            <a:ext cx="502920" cy="502920"/>
           </a:xfrm>
           <a:prstGeom prst="ellipse">
             <a:avLst/>
@@ -7011,7 +9114,7 @@
           <a:p>
             <a:pPr algn="ctr"/>
             <a:r>
-              <a:rPr sz="1500" b="1">
+              <a:rPr sz="1600" b="1">
                 <a:solidFill>
                   <a:srgbClr val="202122"/>
                 </a:solidFill>
@@ -7024,14 +9127,14 @@
       </p:sp>
       <p:sp>
         <p:nvSpPr>
-          <p:cNvPr id="16" name="TextBox 15"/>
+          <p:cNvPr id="11" name="TextBox 10"/>
           <p:cNvSpPr txBox="1"/>
           <p:nvPr/>
         </p:nvSpPr>
         <p:spPr>
           <a:xfrm>
-            <a:off x="1371600" y="4224528"/>
-            <a:ext cx="4404207" cy="512064"/>
+            <a:off x="1371600" y="4480560"/>
+            <a:ext cx="10271455" cy="1188720"/>
           </a:xfrm>
           <a:prstGeom prst="rect">
             <a:avLst/>
@@ -7039,32 +9142,32 @@
           <a:noFill/>
         </p:spPr>
         <p:txBody>
-          <a:bodyPr wrap="square" anchor="ctr" lIns="0" rIns="0" tIns="0" bIns="0"/>
+          <a:bodyPr wrap="square" anchor="t" lIns="0" rIns="0" tIns="0" bIns="0"/>
           <a:lstStyle/>
           <a:p>
             <a:pPr algn="l"/>
             <a:r>
-              <a:rPr sz="1900" b="1" i="0">
-                <a:solidFill>
-                  <a:srgbClr val="03306E"/>
-                </a:solidFill>
-                <a:latin typeface="Calibri"/>
-              </a:rPr>
-              <a:t>Bandwidth</a:t>
-            </a:r>
-          </a:p>
-        </p:txBody>
-      </p:sp>
-      <p:sp>
-        <p:nvSpPr>
-          <p:cNvPr id="17" name="TextBox 16"/>
+              <a:rPr sz="2400" b="0" i="0">
+                <a:solidFill>
+                  <a:srgbClr val="202122"/>
+                </a:solidFill>
+                <a:latin typeface="Calibri"/>
+              </a:rPr>
+              <a:t>Give an example of user control.</a:t>
+            </a:r>
+          </a:p>
+        </p:txBody>
+      </p:sp>
+      <p:sp>
+        <p:nvSpPr>
+          <p:cNvPr id="12" name="TextBox 11"/>
           <p:cNvSpPr txBox="1"/>
           <p:nvPr/>
         </p:nvSpPr>
         <p:spPr>
           <a:xfrm>
-            <a:off x="777240" y="4892040"/>
-            <a:ext cx="4952847" cy="1143000"/>
+            <a:off x="548640" y="5852160"/>
+            <a:ext cx="11094415" cy="365760"/>
           </a:xfrm>
           <a:prstGeom prst="rect">
             <a:avLst/>
@@ -7077,176 +9180,13 @@
           <a:p>
             <a:pPr algn="l"/>
             <a:r>
-              <a:rPr sz="2000" b="0" i="0">
-                <a:solidFill>
-                  <a:srgbClr val="202122"/>
-                </a:solidFill>
-                <a:latin typeface="Calibri"/>
-              </a:rPr>
-              <a:t>What users can download.</a:t>
-            </a:r>
-          </a:p>
-        </p:txBody>
-      </p:sp>
-      <p:sp>
-        <p:nvSpPr>
-          <p:cNvPr id="18" name="Rounded Rectangle 17"/>
-          <p:cNvSpPr/>
-          <p:nvPr/>
-        </p:nvSpPr>
-        <p:spPr>
-          <a:xfrm>
-            <a:off x="6233007" y="4023360"/>
-            <a:ext cx="5410047" cy="2148840"/>
-          </a:xfrm>
-          <a:prstGeom prst="roundRect">
-            <a:avLst>
-              <a:gd name="adj" fmla="val 6000"/>
-            </a:avLst>
-          </a:prstGeom>
-          <a:solidFill>
-            <a:srgbClr val="EAF3FF"/>
-          </a:solidFill>
-          <a:ln>
-            <a:noFill/>
-          </a:ln>
-          <a:effectLst/>
-        </p:spPr>
-        <p:style>
-          <a:lnRef idx="1">
-            <a:schemeClr val="accent1"/>
-          </a:lnRef>
-          <a:fillRef idx="3">
-            <a:schemeClr val="accent1"/>
-          </a:fillRef>
-          <a:effectRef idx="2">
-            <a:schemeClr val="accent1"/>
-          </a:effectRef>
-          <a:fontRef idx="minor">
-            <a:schemeClr val="lt1"/>
-          </a:fontRef>
-        </p:style>
-        <p:txBody>
-          <a:bodyPr rtlCol="0" anchor="ctr"/>
-          <a:lstStyle/>
-          <a:p/>
-        </p:txBody>
-      </p:sp>
-      <p:sp>
-        <p:nvSpPr>
-          <p:cNvPr id="19" name="Oval 18"/>
-          <p:cNvSpPr/>
-          <p:nvPr/>
-        </p:nvSpPr>
-        <p:spPr>
-          <a:xfrm>
-            <a:off x="6461607" y="4251960"/>
-            <a:ext cx="457200" cy="457200"/>
-          </a:xfrm>
-          <a:prstGeom prst="ellipse">
-            <a:avLst/>
-          </a:prstGeom>
-          <a:solidFill>
-            <a:srgbClr val="33C17A"/>
-          </a:solidFill>
-          <a:ln>
-            <a:noFill/>
-          </a:ln>
-          <a:effectLst/>
-        </p:spPr>
-        <p:style>
-          <a:lnRef idx="1">
-            <a:schemeClr val="accent1"/>
-          </a:lnRef>
-          <a:fillRef idx="3">
-            <a:schemeClr val="accent1"/>
-          </a:fillRef>
-          <a:effectRef idx="2">
-            <a:schemeClr val="accent1"/>
-          </a:effectRef>
-          <a:fontRef idx="minor">
-            <a:schemeClr val="lt1"/>
-          </a:fontRef>
-        </p:style>
-        <p:txBody>
-          <a:bodyPr rtlCol="0" anchor="ctr" lIns="0" rIns="0" tIns="0" bIns="0"/>
-          <a:lstStyle/>
-          <a:p>
-            <a:pPr algn="ctr"/>
-            <a:r>
-              <a:rPr sz="1500" b="1">
-                <a:solidFill>
-                  <a:srgbClr val="202122"/>
-                </a:solidFill>
-                <a:latin typeface="Calibri"/>
-              </a:rPr>
-              <a:t>4</a:t>
-            </a:r>
-          </a:p>
-        </p:txBody>
-      </p:sp>
-      <p:sp>
-        <p:nvSpPr>
-          <p:cNvPr id="20" name="TextBox 19"/>
-          <p:cNvSpPr txBox="1"/>
-          <p:nvPr/>
-        </p:nvSpPr>
-        <p:spPr>
-          <a:xfrm>
-            <a:off x="7055967" y="4224528"/>
-            <a:ext cx="4404207" cy="512064"/>
-          </a:xfrm>
-          <a:prstGeom prst="rect">
-            <a:avLst/>
-          </a:prstGeom>
-          <a:noFill/>
-        </p:spPr>
-        <p:txBody>
-          <a:bodyPr wrap="square" anchor="ctr" lIns="0" rIns="0" tIns="0" bIns="0"/>
-          <a:lstStyle/>
-          <a:p>
-            <a:pPr algn="l"/>
-            <a:r>
-              <a:rPr sz="1900" b="1" i="0">
-                <a:solidFill>
-                  <a:srgbClr val="03306E"/>
-                </a:solidFill>
-                <a:latin typeface="Calibri"/>
-              </a:rPr>
-              <a:t>Brand</a:t>
-            </a:r>
-          </a:p>
-        </p:txBody>
-      </p:sp>
-      <p:sp>
-        <p:nvSpPr>
-          <p:cNvPr id="21" name="TextBox 20"/>
-          <p:cNvSpPr txBox="1"/>
-          <p:nvPr/>
-        </p:nvSpPr>
-        <p:spPr>
-          <a:xfrm>
-            <a:off x="6461607" y="4892040"/>
-            <a:ext cx="4952847" cy="1143000"/>
-          </a:xfrm>
-          <a:prstGeom prst="rect">
-            <a:avLst/>
-          </a:prstGeom>
-          <a:noFill/>
-        </p:spPr>
-        <p:txBody>
-          <a:bodyPr wrap="square" anchor="t" lIns="0" rIns="0" tIns="0" bIns="0"/>
-          <a:lstStyle/>
-          <a:p>
-            <a:pPr algn="l"/>
-            <a:r>
-              <a:rPr sz="2000" b="0" i="0">
-                <a:solidFill>
-                  <a:srgbClr val="202122"/>
-                </a:solidFill>
-                <a:latin typeface="Calibri"/>
-              </a:rPr>
-              <a:t>Style and branding.</a:t>
+              <a:rPr sz="1300" b="0" i="1">
+                <a:solidFill>
+                  <a:srgbClr val="54595D"/>
+                </a:solidFill>
+                <a:latin typeface="Calibri"/>
+              </a:rPr>
+              <a:t>Answer on mini whiteboards or in your book. Answers are in the speaker notes.</a:t>
             </a:r>
           </a:p>
         </p:txBody>
@@ -7338,7 +9278,7 @@
                 </a:solidFill>
                 <a:latin typeface="Cambria"/>
               </a:rPr>
-              <a:t>Check your understanding</a:t>
+              <a:t>UI features and techniques</a:t>
             </a:r>
           </a:p>
         </p:txBody>
@@ -7411,14 +9351,129 @@
       </p:sp>
       <p:sp>
         <p:nvSpPr>
-          <p:cNvPr id="6" name="Oval 5"/>
+          <p:cNvPr id="6" name="TextBox 5"/>
+          <p:cNvSpPr txBox="1"/>
+          <p:nvPr/>
+        </p:nvSpPr>
+        <p:spPr>
+          <a:xfrm>
+            <a:off x="548640" y="1554480"/>
+            <a:ext cx="6720840" cy="4617720"/>
+          </a:xfrm>
+          <a:prstGeom prst="rect">
+            <a:avLst/>
+          </a:prstGeom>
+          <a:noFill/>
+        </p:spPr>
+        <p:txBody>
+          <a:bodyPr wrap="square" lIns="0" rIns="0" tIns="0" bIns="0">
+            <a:spAutoFit/>
+          </a:bodyPr>
+          <a:lstStyle/>
+          <a:p>
+            <a:pPr>
+              <a:spcAft>
+                <a:spcPts val="1260"/>
+              </a:spcAft>
+            </a:pPr>
+            <a:r>
+              <a:rPr sz="2100" b="0">
+                <a:solidFill>
+                  <a:srgbClr val="202122"/>
+                </a:solidFill>
+                <a:latin typeface="Calibri"/>
+              </a:rPr>
+              <a:t>User interface features include images and animation, audio, visual effects, and interactions: user input and feedback that can be text, graphics, sound or haptic (vibration). Data can be shown with dashboards and graphs.</a:t>
+            </a:r>
+          </a:p>
+          <a:p>
+            <a:pPr>
+              <a:spcAft>
+                <a:spcPts val="1260"/>
+              </a:spcAft>
+            </a:pPr>
+            <a:r>
+              <a:rPr sz="2100" b="0">
+                <a:solidFill>
+                  <a:srgbClr val="202122"/>
+                </a:solidFill>
+                <a:latin typeface="Calibri"/>
+              </a:rPr>
+              <a:t>Techniques include layout grids, use of space, font choice, letter and line spacing, justification, colour and contrast, input focus (showing which field is active) and hover controls.</a:t>
+            </a:r>
+          </a:p>
+          <a:p>
+            <a:pPr>
+              <a:spcAft>
+                <a:spcPts val="1260"/>
+              </a:spcAft>
+            </a:pPr>
+            <a:r>
+              <a:rPr sz="2100" b="0">
+                <a:solidFill>
+                  <a:srgbClr val="202122"/>
+                </a:solidFill>
+                <a:latin typeface="Calibri"/>
+              </a:rPr>
+              <a:t>Design decisions depend on browser support, target devices, users' characteristics, bandwidth, branding, accessibility and how users give input: voice, text, touch or mouse.</a:t>
+            </a:r>
+          </a:p>
+        </p:txBody>
+      </p:sp>
+      <p:sp>
+        <p:nvSpPr>
+          <p:cNvPr id="7" name="Rounded Rectangle 6"/>
           <p:cNvSpPr/>
           <p:nvPr/>
         </p:nvSpPr>
         <p:spPr>
           <a:xfrm>
-            <a:off x="548640" y="1618488"/>
-            <a:ext cx="411480" cy="411480"/>
+            <a:off x="7772400" y="1554480"/>
+            <a:ext cx="3867912" cy="4526280"/>
+          </a:xfrm>
+          <a:prstGeom prst="roundRect">
+            <a:avLst>
+              <a:gd name="adj" fmla="val 8000"/>
+            </a:avLst>
+          </a:prstGeom>
+          <a:solidFill>
+            <a:srgbClr val="03306E"/>
+          </a:solidFill>
+          <a:ln>
+            <a:noFill/>
+          </a:ln>
+          <a:effectLst/>
+        </p:spPr>
+        <p:style>
+          <a:lnRef idx="1">
+            <a:schemeClr val="accent1"/>
+          </a:lnRef>
+          <a:fillRef idx="3">
+            <a:schemeClr val="accent1"/>
+          </a:fillRef>
+          <a:effectRef idx="2">
+            <a:schemeClr val="accent1"/>
+          </a:effectRef>
+          <a:fontRef idx="minor">
+            <a:schemeClr val="lt1"/>
+          </a:fontRef>
+        </p:style>
+        <p:txBody>
+          <a:bodyPr rtlCol="0" anchor="ctr"/>
+          <a:lstStyle/>
+          <a:p/>
+        </p:txBody>
+      </p:sp>
+      <p:sp>
+        <p:nvSpPr>
+          <p:cNvPr id="8" name="Oval 7"/>
+          <p:cNvSpPr/>
+          <p:nvPr/>
+        </p:nvSpPr>
+        <p:spPr>
+          <a:xfrm>
+            <a:off x="8046720" y="1828800"/>
+            <a:ext cx="548640" cy="548640"/>
           </a:xfrm>
           <a:prstGeom prst="ellipse">
             <a:avLst/>
@@ -7451,99 +9506,13 @@
           <a:p>
             <a:pPr algn="ctr"/>
             <a:r>
-              <a:rPr sz="1400" b="1">
+              <a:rPr sz="1300" b="1">
                 <a:solidFill>
                   <a:srgbClr val="202122"/>
                 </a:solidFill>
                 <a:latin typeface="Calibri"/>
               </a:rPr>
-              <a:t>1</a:t>
-            </a:r>
-          </a:p>
-        </p:txBody>
-      </p:sp>
-      <p:sp>
-        <p:nvSpPr>
-          <p:cNvPr id="7" name="TextBox 6"/>
-          <p:cNvSpPr txBox="1"/>
-          <p:nvPr/>
-        </p:nvSpPr>
-        <p:spPr>
-          <a:xfrm>
-            <a:off x="1234440" y="1600200"/>
-            <a:ext cx="10408615" cy="1030986"/>
-          </a:xfrm>
-          <a:prstGeom prst="rect">
-            <a:avLst/>
-          </a:prstGeom>
-          <a:noFill/>
-        </p:spPr>
-        <p:txBody>
-          <a:bodyPr wrap="square" anchor="t" lIns="0" rIns="0" tIns="0" bIns="0"/>
-          <a:lstStyle/>
-          <a:p>
-            <a:pPr algn="l"/>
-            <a:r>
-              <a:rPr sz="2200" b="0" i="0">
-                <a:solidFill>
-                  <a:srgbClr val="202122"/>
-                </a:solidFill>
-                <a:latin typeface="Calibri"/>
-              </a:rPr>
-              <a:t>What is a wireframe?</a:t>
-            </a:r>
-          </a:p>
-        </p:txBody>
-      </p:sp>
-      <p:sp>
-        <p:nvSpPr>
-          <p:cNvPr id="8" name="Oval 7"/>
-          <p:cNvSpPr/>
-          <p:nvPr/>
-        </p:nvSpPr>
-        <p:spPr>
-          <a:xfrm>
-            <a:off x="548640" y="2814066"/>
-            <a:ext cx="411480" cy="411480"/>
-          </a:xfrm>
-          <a:prstGeom prst="ellipse">
-            <a:avLst/>
-          </a:prstGeom>
-          <a:solidFill>
-            <a:srgbClr val="33C17A"/>
-          </a:solidFill>
-          <a:ln>
-            <a:noFill/>
-          </a:ln>
-          <a:effectLst/>
-        </p:spPr>
-        <p:style>
-          <a:lnRef idx="1">
-            <a:schemeClr val="accent1"/>
-          </a:lnRef>
-          <a:fillRef idx="3">
-            <a:schemeClr val="accent1"/>
-          </a:fillRef>
-          <a:effectRef idx="2">
-            <a:schemeClr val="accent1"/>
-          </a:effectRef>
-          <a:fontRef idx="minor">
-            <a:schemeClr val="lt1"/>
-          </a:fontRef>
-        </p:style>
-        <p:txBody>
-          <a:bodyPr rtlCol="0" anchor="ctr" lIns="0" rIns="0" tIns="0" bIns="0"/>
-          <a:lstStyle/>
-          <a:p>
-            <a:pPr algn="ctr"/>
-            <a:r>
-              <a:rPr sz="1400" b="1">
-                <a:solidFill>
-                  <a:srgbClr val="202122"/>
-                </a:solidFill>
-                <a:latin typeface="Calibri"/>
-              </a:rPr>
-              <a:t>2</a:t>
+              <a:t>e.g.</a:t>
             </a:r>
           </a:p>
         </p:txBody>
@@ -7556,8 +9525,8 @@
         </p:nvSpPr>
         <p:spPr>
           <a:xfrm>
-            <a:off x="1234440" y="2795778"/>
-            <a:ext cx="10408615" cy="1030986"/>
+            <a:off x="8046720" y="2560320"/>
+            <a:ext cx="3291840" cy="365760"/>
           </a:xfrm>
           <a:prstGeom prst="rect">
             <a:avLst/>
@@ -7570,80 +9539,27 @@
           <a:p>
             <a:pPr algn="l"/>
             <a:r>
-              <a:rPr sz="2200" b="0" i="0">
-                <a:solidFill>
-                  <a:srgbClr val="202122"/>
-                </a:solidFill>
-                <a:latin typeface="Calibri"/>
-              </a:rPr>
-              <a:t>Which UX principle means users know what their action did?</a:t>
-            </a:r>
-          </a:p>
-        </p:txBody>
-      </p:sp>
-      <p:sp>
-        <p:nvSpPr>
-          <p:cNvPr id="10" name="Oval 9"/>
-          <p:cNvSpPr/>
-          <p:nvPr/>
-        </p:nvSpPr>
-        <p:spPr>
-          <a:xfrm>
-            <a:off x="548640" y="4009644"/>
-            <a:ext cx="411480" cy="411480"/>
-          </a:xfrm>
-          <a:prstGeom prst="ellipse">
-            <a:avLst/>
-          </a:prstGeom>
-          <a:solidFill>
-            <a:srgbClr val="33C17A"/>
-          </a:solidFill>
-          <a:ln>
-            <a:noFill/>
-          </a:ln>
-          <a:effectLst/>
-        </p:spPr>
-        <p:style>
-          <a:lnRef idx="1">
-            <a:schemeClr val="accent1"/>
-          </a:lnRef>
-          <a:fillRef idx="3">
-            <a:schemeClr val="accent1"/>
-          </a:fillRef>
-          <a:effectRef idx="2">
-            <a:schemeClr val="accent1"/>
-          </a:effectRef>
-          <a:fontRef idx="minor">
-            <a:schemeClr val="lt1"/>
-          </a:fontRef>
-        </p:style>
-        <p:txBody>
-          <a:bodyPr rtlCol="0" anchor="ctr" lIns="0" rIns="0" tIns="0" bIns="0"/>
-          <a:lstStyle/>
-          <a:p>
-            <a:pPr algn="ctr"/>
-            <a:r>
-              <a:rPr sz="1400" b="1">
-                <a:solidFill>
-                  <a:srgbClr val="202122"/>
-                </a:solidFill>
-                <a:latin typeface="Calibri"/>
-              </a:rPr>
-              <a:t>3</a:t>
-            </a:r>
-          </a:p>
-        </p:txBody>
-      </p:sp>
-      <p:sp>
-        <p:nvSpPr>
-          <p:cNvPr id="11" name="TextBox 10"/>
+              <a:rPr sz="1300" b="1" i="0">
+                <a:solidFill>
+                  <a:srgbClr val="A9C8F0"/>
+                </a:solidFill>
+                <a:latin typeface="Calibri"/>
+              </a:rPr>
+              <a:t>EXAMPLE</a:t>
+            </a:r>
+          </a:p>
+        </p:txBody>
+      </p:sp>
+      <p:sp>
+        <p:nvSpPr>
+          <p:cNvPr id="10" name="TextBox 9"/>
           <p:cNvSpPr txBox="1"/>
           <p:nvPr/>
         </p:nvSpPr>
         <p:spPr>
           <a:xfrm>
-            <a:off x="1234440" y="3991356"/>
-            <a:ext cx="10408615" cy="1030986"/>
+            <a:off x="8046720" y="2971800"/>
+            <a:ext cx="3291840" cy="2971800"/>
           </a:xfrm>
           <a:prstGeom prst="rect">
             <a:avLst/>
@@ -7656,99 +9572,13 @@
           <a:p>
             <a:pPr algn="l"/>
             <a:r>
-              <a:rPr sz="2200" b="0" i="0">
-                <a:solidFill>
-                  <a:srgbClr val="202122"/>
-                </a:solidFill>
-                <a:latin typeface="Calibri"/>
-              </a:rPr>
-              <a:t>Why does contrast matter?</a:t>
-            </a:r>
-          </a:p>
-        </p:txBody>
-      </p:sp>
-      <p:sp>
-        <p:nvSpPr>
-          <p:cNvPr id="12" name="Oval 11"/>
-          <p:cNvSpPr/>
-          <p:nvPr/>
-        </p:nvSpPr>
-        <p:spPr>
-          <a:xfrm>
-            <a:off x="548640" y="5205221"/>
-            <a:ext cx="411480" cy="411480"/>
-          </a:xfrm>
-          <a:prstGeom prst="ellipse">
-            <a:avLst/>
-          </a:prstGeom>
-          <a:solidFill>
-            <a:srgbClr val="33C17A"/>
-          </a:solidFill>
-          <a:ln>
-            <a:noFill/>
-          </a:ln>
-          <a:effectLst/>
-        </p:spPr>
-        <p:style>
-          <a:lnRef idx="1">
-            <a:schemeClr val="accent1"/>
-          </a:lnRef>
-          <a:fillRef idx="3">
-            <a:schemeClr val="accent1"/>
-          </a:fillRef>
-          <a:effectRef idx="2">
-            <a:schemeClr val="accent1"/>
-          </a:effectRef>
-          <a:fontRef idx="minor">
-            <a:schemeClr val="lt1"/>
-          </a:fontRef>
-        </p:style>
-        <p:txBody>
-          <a:bodyPr rtlCol="0" anchor="ctr" lIns="0" rIns="0" tIns="0" bIns="0"/>
-          <a:lstStyle/>
-          <a:p>
-            <a:pPr algn="ctr"/>
-            <a:r>
-              <a:rPr sz="1400" b="1">
-                <a:solidFill>
-                  <a:srgbClr val="202122"/>
-                </a:solidFill>
-                <a:latin typeface="Calibri"/>
-              </a:rPr>
-              <a:t>4</a:t>
-            </a:r>
-          </a:p>
-        </p:txBody>
-      </p:sp>
-      <p:sp>
-        <p:nvSpPr>
-          <p:cNvPr id="13" name="TextBox 12"/>
-          <p:cNvSpPr txBox="1"/>
-          <p:nvPr/>
-        </p:nvSpPr>
-        <p:spPr>
-          <a:xfrm>
-            <a:off x="1234440" y="5186933"/>
-            <a:ext cx="10408615" cy="1030986"/>
-          </a:xfrm>
-          <a:prstGeom prst="rect">
-            <a:avLst/>
-          </a:prstGeom>
-          <a:noFill/>
-        </p:spPr>
-        <p:txBody>
-          <a:bodyPr wrap="square" anchor="t" lIns="0" rIns="0" tIns="0" bIns="0"/>
-          <a:lstStyle/>
-          <a:p>
-            <a:pPr algn="l"/>
-            <a:r>
-              <a:rPr sz="2200" b="0" i="0">
-                <a:solidFill>
-                  <a:srgbClr val="202122"/>
-                </a:solidFill>
-                <a:latin typeface="Calibri"/>
-              </a:rPr>
-              <a:t>Give one example of haptic feedback.</a:t>
+              <a:rPr sz="1900" b="0" i="0">
+                <a:solidFill>
+                  <a:srgbClr val="FFFFFF"/>
+                </a:solidFill>
+                <a:latin typeface="Cambria"/>
+              </a:rPr>
+              <a:t>Buttons for a touch screen need to be large enough for a finger. Hover effects don't work on touch devices, so they can't be the only clue.</a:t>
             </a:r>
           </a:p>
         </p:txBody>
@@ -7840,7 +9670,7 @@
                 </a:solidFill>
                 <a:latin typeface="Cambria"/>
               </a:rPr>
-              <a:t>Answers</a:t>
+              <a:t>UI features and techniques</a:t>
             </a:r>
           </a:p>
         </p:txBody>
@@ -7913,20 +9743,22 @@
       </p:sp>
       <p:sp>
         <p:nvSpPr>
-          <p:cNvPr id="6" name="Oval 5"/>
+          <p:cNvPr id="6" name="Rounded Rectangle 5"/>
           <p:cNvSpPr/>
           <p:nvPr/>
         </p:nvSpPr>
         <p:spPr>
           <a:xfrm>
-            <a:off x="548640" y="1618488"/>
-            <a:ext cx="411480" cy="411480"/>
-          </a:xfrm>
-          <a:prstGeom prst="ellipse">
-            <a:avLst/>
+            <a:off x="548640" y="1600200"/>
+            <a:ext cx="5364327" cy="640080"/>
+          </a:xfrm>
+          <a:prstGeom prst="roundRect">
+            <a:avLst>
+              <a:gd name="adj" fmla="val 15000"/>
+            </a:avLst>
           </a:prstGeom>
           <a:solidFill>
-            <a:srgbClr val="33C17A"/>
+            <a:srgbClr val="03306E"/>
           </a:solidFill>
           <a:ln>
             <a:noFill/>
@@ -7948,20 +9780,9 @@
           </a:fontRef>
         </p:style>
         <p:txBody>
-          <a:bodyPr rtlCol="0" anchor="ctr" lIns="0" rIns="0" tIns="0" bIns="0"/>
-          <a:lstStyle/>
-          <a:p>
-            <a:pPr algn="ctr"/>
-            <a:r>
-              <a:rPr sz="1400" b="1">
-                <a:solidFill>
-                  <a:srgbClr val="202122"/>
-                </a:solidFill>
-                <a:latin typeface="Calibri"/>
-              </a:rPr>
-              <a:t>1</a:t>
-            </a:r>
-          </a:p>
+          <a:bodyPr rtlCol="0" anchor="ctr"/>
+          <a:lstStyle/>
+          <a:p/>
         </p:txBody>
       </p:sp>
       <p:sp>
@@ -7972,8 +9793,8 @@
         </p:nvSpPr>
         <p:spPr>
           <a:xfrm>
-            <a:off x="1234440" y="1600200"/>
-            <a:ext cx="10408615" cy="1030986"/>
+            <a:off x="777240" y="1600200"/>
+            <a:ext cx="4907127" cy="640080"/>
           </a:xfrm>
           <a:prstGeom prst="rect">
             <a:avLst/>
@@ -7981,49 +9802,40 @@
           <a:noFill/>
         </p:spPr>
         <p:txBody>
-          <a:bodyPr wrap="square" anchor="t" lIns="0" rIns="0" tIns="0" bIns="0"/>
+          <a:bodyPr wrap="square" anchor="ctr" lIns="0" rIns="0" tIns="0" bIns="0"/>
           <a:lstStyle/>
           <a:p>
             <a:pPr algn="l"/>
             <a:r>
-              <a:rPr sz="1800" b="0" i="0">
-                <a:solidFill>
-                  <a:srgbClr val="54595D"/>
-                </a:solidFill>
-                <a:latin typeface="Calibri"/>
-              </a:rPr>
-              <a:t>What is a wireframe?</a:t>
-            </a:r>
-          </a:p>
-          <a:p>
-            <a:r>
-              <a:rPr sz="1800" b="1">
-                <a:solidFill>
-                  <a:srgbClr val="03306E"/>
-                </a:solidFill>
-                <a:latin typeface="Calibri"/>
-              </a:rPr>
-              <a:t>A simple layout sketch of a screen without final styling.</a:t>
-            </a:r>
-          </a:p>
-        </p:txBody>
-      </p:sp>
-      <p:sp>
-        <p:nvSpPr>
-          <p:cNvPr id="8" name="Oval 7"/>
+              <a:rPr sz="2000" b="1" i="0">
+                <a:solidFill>
+                  <a:srgbClr val="FFFFFF"/>
+                </a:solidFill>
+                <a:latin typeface="Calibri"/>
+              </a:rPr>
+              <a:t>Features</a:t>
+            </a:r>
+          </a:p>
+        </p:txBody>
+      </p:sp>
+      <p:sp>
+        <p:nvSpPr>
+          <p:cNvPr id="8" name="Rounded Rectangle 7"/>
           <p:cNvSpPr/>
           <p:nvPr/>
         </p:nvSpPr>
         <p:spPr>
           <a:xfrm>
-            <a:off x="548640" y="2814066"/>
-            <a:ext cx="411480" cy="411480"/>
-          </a:xfrm>
-          <a:prstGeom prst="ellipse">
-            <a:avLst/>
+            <a:off x="548640" y="2377440"/>
+            <a:ext cx="5364327" cy="3794760"/>
+          </a:xfrm>
+          <a:prstGeom prst="roundRect">
+            <a:avLst>
+              <a:gd name="adj" fmla="val 4000"/>
+            </a:avLst>
           </a:prstGeom>
           <a:solidFill>
-            <a:srgbClr val="33C17A"/>
+            <a:srgbClr val="EAF3FF"/>
           </a:solidFill>
           <a:ln>
             <a:noFill/>
@@ -8045,20 +9857,9 @@
           </a:fontRef>
         </p:style>
         <p:txBody>
-          <a:bodyPr rtlCol="0" anchor="ctr" lIns="0" rIns="0" tIns="0" bIns="0"/>
-          <a:lstStyle/>
-          <a:p>
-            <a:pPr algn="ctr"/>
-            <a:r>
-              <a:rPr sz="1400" b="1">
-                <a:solidFill>
-                  <a:srgbClr val="202122"/>
-                </a:solidFill>
-                <a:latin typeface="Calibri"/>
-              </a:rPr>
-              <a:t>2</a:t>
-            </a:r>
-          </a:p>
+          <a:bodyPr rtlCol="0" anchor="ctr"/>
+          <a:lstStyle/>
+          <a:p/>
         </p:txBody>
       </p:sp>
       <p:sp>
@@ -8069,8 +9870,8 @@
         </p:nvSpPr>
         <p:spPr>
           <a:xfrm>
-            <a:off x="1234440" y="2795778"/>
-            <a:ext cx="10408615" cy="1030986"/>
+            <a:off x="822959" y="2606040"/>
+            <a:ext cx="4815687" cy="3337560"/>
           </a:xfrm>
           <a:prstGeom prst="rect">
             <a:avLst/>
@@ -8078,49 +9879,123 @@
           <a:noFill/>
         </p:spPr>
         <p:txBody>
-          <a:bodyPr wrap="square" anchor="t" lIns="0" rIns="0" tIns="0" bIns="0"/>
-          <a:lstStyle/>
-          <a:p>
-            <a:pPr algn="l"/>
-            <a:r>
-              <a:rPr sz="1800" b="0" i="0">
-                <a:solidFill>
-                  <a:srgbClr val="54595D"/>
-                </a:solidFill>
-                <a:latin typeface="Calibri"/>
-              </a:rPr>
-              <a:t>Which UX principle means users know what their action did?</a:t>
-            </a:r>
-          </a:p>
-          <a:p>
-            <a:r>
-              <a:rPr sz="1800" b="1">
-                <a:solidFill>
-                  <a:srgbClr val="03306E"/>
-                </a:solidFill>
-                <a:latin typeface="Calibri"/>
-              </a:rPr>
-              <a:t>Confirmation.</a:t>
-            </a:r>
-          </a:p>
-        </p:txBody>
-      </p:sp>
-      <p:sp>
-        <p:nvSpPr>
-          <p:cNvPr id="10" name="Oval 9"/>
+          <a:bodyPr wrap="square" lIns="0" rIns="0" tIns="0" bIns="0">
+            <a:spAutoFit/>
+          </a:bodyPr>
+          <a:lstStyle/>
+          <a:p>
+            <a:pPr marL="274320" indent="-274320">
+              <a:spcAft>
+                <a:spcPts val="990"/>
+              </a:spcAft>
+              <a:buClr>
+                <a:srgbClr val="0645AD"/>
+              </a:buClr>
+              <a:buFont typeface="Arial"/>
+              <a:buChar char="•"/>
+            </a:pPr>
+            <a:r>
+              <a:rPr sz="2200" b="0">
+                <a:solidFill>
+                  <a:srgbClr val="202122"/>
+                </a:solidFill>
+                <a:latin typeface="Calibri"/>
+              </a:rPr>
+              <a:t>Images and animation</a:t>
+            </a:r>
+          </a:p>
+          <a:p>
+            <a:pPr marL="274320" indent="-274320">
+              <a:spcAft>
+                <a:spcPts val="990"/>
+              </a:spcAft>
+              <a:buClr>
+                <a:srgbClr val="0645AD"/>
+              </a:buClr>
+              <a:buFont typeface="Arial"/>
+              <a:buChar char="•"/>
+            </a:pPr>
+            <a:r>
+              <a:rPr sz="2200" b="0">
+                <a:solidFill>
+                  <a:srgbClr val="202122"/>
+                </a:solidFill>
+                <a:latin typeface="Calibri"/>
+              </a:rPr>
+              <a:t>Audio and visual effects</a:t>
+            </a:r>
+          </a:p>
+          <a:p>
+            <a:pPr marL="274320" indent="-274320">
+              <a:spcAft>
+                <a:spcPts val="990"/>
+              </a:spcAft>
+              <a:buClr>
+                <a:srgbClr val="0645AD"/>
+              </a:buClr>
+              <a:buFont typeface="Arial"/>
+              <a:buChar char="•"/>
+            </a:pPr>
+            <a:r>
+              <a:rPr sz="2200" b="1">
+                <a:solidFill>
+                  <a:srgbClr val="202122"/>
+                </a:solidFill>
+                <a:latin typeface="Calibri"/>
+              </a:rPr>
+              <a:t>Input and feedback:</a:t>
+            </a:r>
+            <a:r>
+              <a:rPr sz="2200" b="0">
+                <a:solidFill>
+                  <a:srgbClr val="202122"/>
+                </a:solidFill>
+                <a:latin typeface="Calibri"/>
+              </a:rPr>
+              <a:t> text, graphics, audio, haptic</a:t>
+            </a:r>
+          </a:p>
+          <a:p>
+            <a:pPr marL="274320" indent="-274320">
+              <a:spcAft>
+                <a:spcPts val="990"/>
+              </a:spcAft>
+              <a:buClr>
+                <a:srgbClr val="0645AD"/>
+              </a:buClr>
+              <a:buFont typeface="Arial"/>
+              <a:buChar char="•"/>
+            </a:pPr>
+            <a:r>
+              <a:rPr sz="2200" b="0">
+                <a:solidFill>
+                  <a:srgbClr val="202122"/>
+                </a:solidFill>
+                <a:latin typeface="Calibri"/>
+              </a:rPr>
+              <a:t>Dashboards, graphs, data presentation</a:t>
+            </a:r>
+          </a:p>
+        </p:txBody>
+      </p:sp>
+      <p:sp>
+        <p:nvSpPr>
+          <p:cNvPr id="10" name="Rounded Rectangle 9"/>
           <p:cNvSpPr/>
           <p:nvPr/>
         </p:nvSpPr>
         <p:spPr>
           <a:xfrm>
-            <a:off x="548640" y="4009644"/>
-            <a:ext cx="411480" cy="411480"/>
-          </a:xfrm>
-          <a:prstGeom prst="ellipse">
-            <a:avLst/>
+            <a:off x="6278727" y="1600200"/>
+            <a:ext cx="5364327" cy="640080"/>
+          </a:xfrm>
+          <a:prstGeom prst="roundRect">
+            <a:avLst>
+              <a:gd name="adj" fmla="val 15000"/>
+            </a:avLst>
           </a:prstGeom>
           <a:solidFill>
-            <a:srgbClr val="33C17A"/>
+            <a:srgbClr val="0645AD"/>
           </a:solidFill>
           <a:ln>
             <a:noFill/>
@@ -8142,20 +10017,9 @@
           </a:fontRef>
         </p:style>
         <p:txBody>
-          <a:bodyPr rtlCol="0" anchor="ctr" lIns="0" rIns="0" tIns="0" bIns="0"/>
-          <a:lstStyle/>
-          <a:p>
-            <a:pPr algn="ctr"/>
-            <a:r>
-              <a:rPr sz="1400" b="1">
-                <a:solidFill>
-                  <a:srgbClr val="202122"/>
-                </a:solidFill>
-                <a:latin typeface="Calibri"/>
-              </a:rPr>
-              <a:t>3</a:t>
-            </a:r>
-          </a:p>
+          <a:bodyPr rtlCol="0" anchor="ctr"/>
+          <a:lstStyle/>
+          <a:p/>
         </p:txBody>
       </p:sp>
       <p:sp>
@@ -8166,8 +10030,8 @@
         </p:nvSpPr>
         <p:spPr>
           <a:xfrm>
-            <a:off x="1234440" y="3991356"/>
-            <a:ext cx="10408615" cy="1030986"/>
+            <a:off x="6507327" y="1600200"/>
+            <a:ext cx="4907127" cy="640080"/>
           </a:xfrm>
           <a:prstGeom prst="rect">
             <a:avLst/>
@@ -8175,49 +10039,40 @@
           <a:noFill/>
         </p:spPr>
         <p:txBody>
-          <a:bodyPr wrap="square" anchor="t" lIns="0" rIns="0" tIns="0" bIns="0"/>
+          <a:bodyPr wrap="square" anchor="ctr" lIns="0" rIns="0" tIns="0" bIns="0"/>
           <a:lstStyle/>
           <a:p>
             <a:pPr algn="l"/>
             <a:r>
-              <a:rPr sz="1800" b="0" i="0">
-                <a:solidFill>
-                  <a:srgbClr val="54595D"/>
-                </a:solidFill>
-                <a:latin typeface="Calibri"/>
-              </a:rPr>
-              <a:t>Why does contrast matter?</a:t>
-            </a:r>
-          </a:p>
-          <a:p>
-            <a:r>
-              <a:rPr sz="1800" b="1">
-                <a:solidFill>
-                  <a:srgbClr val="03306E"/>
-                </a:solidFill>
-                <a:latin typeface="Calibri"/>
-              </a:rPr>
-              <a:t>Low contrast makes text hard to read, especially for visually impaired users.</a:t>
-            </a:r>
-          </a:p>
-        </p:txBody>
-      </p:sp>
-      <p:sp>
-        <p:nvSpPr>
-          <p:cNvPr id="12" name="Oval 11"/>
+              <a:rPr sz="2000" b="1" i="0">
+                <a:solidFill>
+                  <a:srgbClr val="FFFFFF"/>
+                </a:solidFill>
+                <a:latin typeface="Calibri"/>
+              </a:rPr>
+              <a:t>Techniques</a:t>
+            </a:r>
+          </a:p>
+        </p:txBody>
+      </p:sp>
+      <p:sp>
+        <p:nvSpPr>
+          <p:cNvPr id="12" name="Rounded Rectangle 11"/>
           <p:cNvSpPr/>
           <p:nvPr/>
         </p:nvSpPr>
         <p:spPr>
           <a:xfrm>
-            <a:off x="548640" y="5205221"/>
-            <a:ext cx="411480" cy="411480"/>
-          </a:xfrm>
-          <a:prstGeom prst="ellipse">
-            <a:avLst/>
+            <a:off x="6278727" y="2377440"/>
+            <a:ext cx="5364327" cy="3794760"/>
+          </a:xfrm>
+          <a:prstGeom prst="roundRect">
+            <a:avLst>
+              <a:gd name="adj" fmla="val 4000"/>
+            </a:avLst>
           </a:prstGeom>
           <a:solidFill>
-            <a:srgbClr val="33C17A"/>
+            <a:srgbClr val="EAF3FF"/>
           </a:solidFill>
           <a:ln>
             <a:noFill/>
@@ -8239,20 +10094,9 @@
           </a:fontRef>
         </p:style>
         <p:txBody>
-          <a:bodyPr rtlCol="0" anchor="ctr" lIns="0" rIns="0" tIns="0" bIns="0"/>
-          <a:lstStyle/>
-          <a:p>
-            <a:pPr algn="ctr"/>
-            <a:r>
-              <a:rPr sz="1400" b="1">
-                <a:solidFill>
-                  <a:srgbClr val="202122"/>
-                </a:solidFill>
-                <a:latin typeface="Calibri"/>
-              </a:rPr>
-              <a:t>4</a:t>
-            </a:r>
-          </a:p>
+          <a:bodyPr rtlCol="0" anchor="ctr"/>
+          <a:lstStyle/>
+          <a:p/>
         </p:txBody>
       </p:sp>
       <p:sp>
@@ -8263,8 +10107,8 @@
         </p:nvSpPr>
         <p:spPr>
           <a:xfrm>
-            <a:off x="1234440" y="5186933"/>
-            <a:ext cx="10408615" cy="1030986"/>
+            <a:off x="6553047" y="2606040"/>
+            <a:ext cx="4815687" cy="3337560"/>
           </a:xfrm>
           <a:prstGeom prst="rect">
             <a:avLst/>
@@ -8272,29 +10116,92 @@
           <a:noFill/>
         </p:spPr>
         <p:txBody>
-          <a:bodyPr wrap="square" anchor="t" lIns="0" rIns="0" tIns="0" bIns="0"/>
-          <a:lstStyle/>
-          <a:p>
-            <a:pPr algn="l"/>
-            <a:r>
-              <a:rPr sz="1800" b="0" i="0">
-                <a:solidFill>
-                  <a:srgbClr val="54595D"/>
-                </a:solidFill>
-                <a:latin typeface="Calibri"/>
-              </a:rPr>
-              <a:t>Give one example of haptic feedback.</a:t>
-            </a:r>
-          </a:p>
-          <a:p>
-            <a:r>
-              <a:rPr sz="1800" b="1">
-                <a:solidFill>
-                  <a:srgbClr val="03306E"/>
-                </a:solidFill>
-                <a:latin typeface="Calibri"/>
-              </a:rPr>
-              <a:t>A phone vibrating when you press a button.</a:t>
+          <a:bodyPr wrap="square" lIns="0" rIns="0" tIns="0" bIns="0">
+            <a:spAutoFit/>
+          </a:bodyPr>
+          <a:lstStyle/>
+          <a:p>
+            <a:pPr marL="274320" indent="-274320">
+              <a:spcAft>
+                <a:spcPts val="990"/>
+              </a:spcAft>
+              <a:buClr>
+                <a:srgbClr val="0645AD"/>
+              </a:buClr>
+              <a:buFont typeface="Arial"/>
+              <a:buChar char="•"/>
+            </a:pPr>
+            <a:r>
+              <a:rPr sz="2200" b="0">
+                <a:solidFill>
+                  <a:srgbClr val="202122"/>
+                </a:solidFill>
+                <a:latin typeface="Calibri"/>
+              </a:rPr>
+              <a:t>Layout grids and use of space</a:t>
+            </a:r>
+          </a:p>
+          <a:p>
+            <a:pPr marL="274320" indent="-274320">
+              <a:spcAft>
+                <a:spcPts val="990"/>
+              </a:spcAft>
+              <a:buClr>
+                <a:srgbClr val="0645AD"/>
+              </a:buClr>
+              <a:buFont typeface="Arial"/>
+              <a:buChar char="•"/>
+            </a:pPr>
+            <a:r>
+              <a:rPr sz="2200" b="0">
+                <a:solidFill>
+                  <a:srgbClr val="202122"/>
+                </a:solidFill>
+                <a:latin typeface="Calibri"/>
+              </a:rPr>
+              <a:t>Fonts, letter and line spacing, justification</a:t>
+            </a:r>
+          </a:p>
+          <a:p>
+            <a:pPr marL="274320" indent="-274320">
+              <a:spcAft>
+                <a:spcPts val="990"/>
+              </a:spcAft>
+              <a:buClr>
+                <a:srgbClr val="0645AD"/>
+              </a:buClr>
+              <a:buFont typeface="Arial"/>
+              <a:buChar char="•"/>
+            </a:pPr>
+            <a:r>
+              <a:rPr sz="2200" b="0">
+                <a:solidFill>
+                  <a:srgbClr val="202122"/>
+                </a:solidFill>
+                <a:latin typeface="Calibri"/>
+              </a:rPr>
+              <a:t>Colour and contrast</a:t>
+            </a:r>
+          </a:p>
+          <a:p>
+            <a:pPr marL="274320" indent="-274320">
+              <a:spcAft>
+                <a:spcPts val="990"/>
+              </a:spcAft>
+              <a:buClr>
+                <a:srgbClr val="0645AD"/>
+              </a:buClr>
+              <a:buFont typeface="Arial"/>
+              <a:buChar char="•"/>
+            </a:pPr>
+            <a:r>
+              <a:rPr sz="2200" b="0">
+                <a:solidFill>
+                  <a:srgbClr val="202122"/>
+                </a:solidFill>
+                <a:latin typeface="Calibri"/>
+              </a:rPr>
+              <a:t>Input focus and hover controls</a:t>
             </a:r>
           </a:p>
         </p:txBody>
@@ -8386,7 +10293,7 @@
                 </a:solidFill>
                 <a:latin typeface="Cambria"/>
               </a:rPr>
-              <a:t>Activity: Wireframe and critique</a:t>
+              <a:t>Quick check: UI features and techniques</a:t>
             </a:r>
           </a:p>
         </p:txBody>
@@ -8459,19 +10366,17 @@
       </p:sp>
       <p:sp>
         <p:nvSpPr>
-          <p:cNvPr id="6" name="Rounded Rectangle 5"/>
+          <p:cNvPr id="6" name="Oval 5"/>
           <p:cNvSpPr/>
           <p:nvPr/>
         </p:nvSpPr>
         <p:spPr>
           <a:xfrm>
-            <a:off x="548640" y="1508760"/>
-            <a:ext cx="2011680" cy="457200"/>
-          </a:xfrm>
-          <a:prstGeom prst="roundRect">
-            <a:avLst>
-              <a:gd name="adj" fmla="val 50000"/>
-            </a:avLst>
+            <a:off x="548640" y="1691640"/>
+            <a:ext cx="502920" cy="502920"/>
+          </a:xfrm>
+          <a:prstGeom prst="ellipse">
+            <a:avLst/>
           </a:prstGeom>
           <a:solidFill>
             <a:srgbClr val="33C17A"/>
@@ -8496,9 +10401,20 @@
           </a:fontRef>
         </p:style>
         <p:txBody>
-          <a:bodyPr rtlCol="0" anchor="ctr"/>
-          <a:lstStyle/>
-          <a:p/>
+          <a:bodyPr rtlCol="0" anchor="ctr" lIns="0" rIns="0" tIns="0" bIns="0"/>
+          <a:lstStyle/>
+          <a:p>
+            <a:pPr algn="ctr"/>
+            <a:r>
+              <a:rPr sz="1600" b="1">
+                <a:solidFill>
+                  <a:srgbClr val="202122"/>
+                </a:solidFill>
+                <a:latin typeface="Calibri"/>
+              </a:rPr>
+              <a:t>1</a:t>
+            </a:r>
+          </a:p>
         </p:txBody>
       </p:sp>
       <p:sp>
@@ -8509,8 +10425,8 @@
         </p:nvSpPr>
         <p:spPr>
           <a:xfrm>
-            <a:off x="548640" y="1508760"/>
-            <a:ext cx="2011680" cy="457200"/>
+            <a:off x="1371600" y="1645920"/>
+            <a:ext cx="10271455" cy="1188720"/>
           </a:xfrm>
           <a:prstGeom prst="rect">
             <a:avLst/>
@@ -8518,71 +10434,38 @@
           <a:noFill/>
         </p:spPr>
         <p:txBody>
-          <a:bodyPr wrap="square" anchor="ctr" lIns="0" rIns="0" tIns="0" bIns="0"/>
-          <a:lstStyle/>
-          <a:p>
-            <a:pPr algn="ctr"/>
-            <a:r>
-              <a:rPr sz="1400" b="1" i="0">
+          <a:bodyPr wrap="square" anchor="t" lIns="0" rIns="0" tIns="0" bIns="0"/>
+          <a:lstStyle/>
+          <a:p>
+            <a:pPr algn="l"/>
+            <a:r>
+              <a:rPr sz="2400" b="0" i="0">
                 <a:solidFill>
                   <a:srgbClr val="202122"/>
                 </a:solidFill>
                 <a:latin typeface="Calibri"/>
               </a:rPr>
-              <a:t>30 minutes</a:t>
-            </a:r>
-          </a:p>
-        </p:txBody>
-      </p:sp>
-      <p:sp>
-        <p:nvSpPr>
-          <p:cNvPr id="8" name="TextBox 7"/>
-          <p:cNvSpPr txBox="1"/>
-          <p:nvPr/>
-        </p:nvSpPr>
-        <p:spPr>
-          <a:xfrm>
-            <a:off x="2743200" y="1508760"/>
-            <a:ext cx="4754880" cy="457200"/>
-          </a:xfrm>
-          <a:prstGeom prst="rect">
-            <a:avLst/>
-          </a:prstGeom>
-          <a:noFill/>
-        </p:spPr>
-        <p:txBody>
-          <a:bodyPr wrap="square" anchor="ctr" lIns="0" rIns="0" tIns="0" bIns="0"/>
-          <a:lstStyle/>
-          <a:p>
-            <a:pPr algn="l"/>
-            <a:r>
-              <a:rPr sz="1400" b="0" i="1">
-                <a:solidFill>
-                  <a:srgbClr val="54595D"/>
-                </a:solidFill>
-                <a:latin typeface="Calibri"/>
-              </a:rPr>
-              <a:t>Pairs</a:t>
-            </a:r>
-          </a:p>
-        </p:txBody>
-      </p:sp>
-      <p:sp>
-        <p:nvSpPr>
-          <p:cNvPr id="9" name="Oval 8"/>
+              <a:t>What is haptic feedback?</a:t>
+            </a:r>
+          </a:p>
+        </p:txBody>
+      </p:sp>
+      <p:sp>
+        <p:nvSpPr>
+          <p:cNvPr id="8" name="Oval 7"/>
           <p:cNvSpPr/>
           <p:nvPr/>
         </p:nvSpPr>
         <p:spPr>
           <a:xfrm>
-            <a:off x="548640" y="2482596"/>
-            <a:ext cx="384048" cy="384048"/>
+            <a:off x="548640" y="3108960"/>
+            <a:ext cx="502920" cy="502920"/>
           </a:xfrm>
           <a:prstGeom prst="ellipse">
             <a:avLst/>
           </a:prstGeom>
           <a:solidFill>
-            <a:srgbClr val="0645AD"/>
+            <a:srgbClr val="33C17A"/>
           </a:solidFill>
           <a:ln>
             <a:noFill/>
@@ -8609,27 +10492,27 @@
           <a:p>
             <a:pPr algn="ctr"/>
             <a:r>
-              <a:rPr sz="1300" b="1">
-                <a:solidFill>
-                  <a:srgbClr val="FFFFFF"/>
-                </a:solidFill>
-                <a:latin typeface="Calibri"/>
-              </a:rPr>
-              <a:t>1</a:t>
-            </a:r>
-          </a:p>
-        </p:txBody>
-      </p:sp>
-      <p:sp>
-        <p:nvSpPr>
-          <p:cNvPr id="10" name="TextBox 9"/>
+              <a:rPr sz="1600" b="1">
+                <a:solidFill>
+                  <a:srgbClr val="202122"/>
+                </a:solidFill>
+                <a:latin typeface="Calibri"/>
+              </a:rPr>
+              <a:t>2</a:t>
+            </a:r>
+          </a:p>
+        </p:txBody>
+      </p:sp>
+      <p:sp>
+        <p:nvSpPr>
+          <p:cNvPr id="9" name="TextBox 8"/>
           <p:cNvSpPr txBox="1"/>
           <p:nvPr/>
         </p:nvSpPr>
         <p:spPr>
           <a:xfrm>
-            <a:off x="1143000" y="2240280"/>
-            <a:ext cx="5943600" cy="868680"/>
+            <a:off x="1371600" y="3063240"/>
+            <a:ext cx="10271455" cy="1188720"/>
           </a:xfrm>
           <a:prstGeom prst="rect">
             <a:avLst/>
@@ -8637,38 +10520,38 @@
           <a:noFill/>
         </p:spPr>
         <p:txBody>
-          <a:bodyPr wrap="square" anchor="ctr" lIns="0" rIns="0" tIns="0" bIns="0"/>
+          <a:bodyPr wrap="square" anchor="t" lIns="0" rIns="0" tIns="0" bIns="0"/>
           <a:lstStyle/>
           <a:p>
             <a:pPr algn="l"/>
             <a:r>
-              <a:rPr sz="1700" b="0" i="0">
+              <a:rPr sz="2400" b="0" i="0">
                 <a:solidFill>
                   <a:srgbClr val="202122"/>
                 </a:solidFill>
                 <a:latin typeface="Calibri"/>
               </a:rPr>
-              <a:t>Wireframe three screens for a revision quiz app.</a:t>
-            </a:r>
-          </a:p>
-        </p:txBody>
-      </p:sp>
-      <p:sp>
-        <p:nvSpPr>
-          <p:cNvPr id="11" name="Oval 10"/>
+              <a:t>Why does colour contrast matter?</a:t>
+            </a:r>
+          </a:p>
+        </p:txBody>
+      </p:sp>
+      <p:sp>
+        <p:nvSpPr>
+          <p:cNvPr id="10" name="Oval 9"/>
           <p:cNvSpPr/>
           <p:nvPr/>
         </p:nvSpPr>
         <p:spPr>
           <a:xfrm>
-            <a:off x="548640" y="3461004"/>
-            <a:ext cx="384048" cy="384048"/>
+            <a:off x="548640" y="4526280"/>
+            <a:ext cx="502920" cy="502920"/>
           </a:xfrm>
           <a:prstGeom prst="ellipse">
             <a:avLst/>
           </a:prstGeom>
           <a:solidFill>
-            <a:srgbClr val="0645AD"/>
+            <a:srgbClr val="33C17A"/>
           </a:solidFill>
           <a:ln>
             <a:noFill/>
@@ -8695,13 +10578,46 @@
           <a:p>
             <a:pPr algn="ctr"/>
             <a:r>
-              <a:rPr sz="1300" b="1">
-                <a:solidFill>
-                  <a:srgbClr val="FFFFFF"/>
-                </a:solidFill>
-                <a:latin typeface="Calibri"/>
-              </a:rPr>
-              <a:t>2</a:t>
+              <a:rPr sz="1600" b="1">
+                <a:solidFill>
+                  <a:srgbClr val="202122"/>
+                </a:solidFill>
+                <a:latin typeface="Calibri"/>
+              </a:rPr>
+              <a:t>3</a:t>
+            </a:r>
+          </a:p>
+        </p:txBody>
+      </p:sp>
+      <p:sp>
+        <p:nvSpPr>
+          <p:cNvPr id="11" name="TextBox 10"/>
+          <p:cNvSpPr txBox="1"/>
+          <p:nvPr/>
+        </p:nvSpPr>
+        <p:spPr>
+          <a:xfrm>
+            <a:off x="1371600" y="4480560"/>
+            <a:ext cx="10271455" cy="1188720"/>
+          </a:xfrm>
+          <a:prstGeom prst="rect">
+            <a:avLst/>
+          </a:prstGeom>
+          <a:noFill/>
+        </p:spPr>
+        <p:txBody>
+          <a:bodyPr wrap="square" anchor="t" lIns="0" rIns="0" tIns="0" bIns="0"/>
+          <a:lstStyle/>
+          <a:p>
+            <a:pPr algn="l"/>
+            <a:r>
+              <a:rPr sz="2400" b="0" i="0">
+                <a:solidFill>
+                  <a:srgbClr val="202122"/>
+                </a:solidFill>
+                <a:latin typeface="Calibri"/>
+              </a:rPr>
+              <a:t>Why design touch targets larger?</a:t>
             </a:r>
           </a:p>
         </p:txBody>
@@ -8714,8 +10630,8 @@
         </p:nvSpPr>
         <p:spPr>
           <a:xfrm>
-            <a:off x="1143000" y="3218688"/>
-            <a:ext cx="5943600" cy="868680"/>
+            <a:off x="548640" y="5852160"/>
+            <a:ext cx="11094415" cy="365760"/>
           </a:xfrm>
           <a:prstGeom prst="rect">
             <a:avLst/>
@@ -8723,353 +10639,18 @@
           <a:noFill/>
         </p:spPr>
         <p:txBody>
-          <a:bodyPr wrap="square" anchor="ctr" lIns="0" rIns="0" tIns="0" bIns="0"/>
+          <a:bodyPr wrap="square" anchor="t" lIns="0" rIns="0" tIns="0" bIns="0"/>
           <a:lstStyle/>
           <a:p>
             <a:pPr algn="l"/>
             <a:r>
-              <a:rPr sz="1700" b="0" i="0">
-                <a:solidFill>
-                  <a:srgbClr val="202122"/>
-                </a:solidFill>
-                <a:latin typeface="Calibri"/>
-              </a:rPr>
-              <a:t>Annotate which UX principle each design choice supports.</a:t>
-            </a:r>
-          </a:p>
-        </p:txBody>
-      </p:sp>
-      <p:sp>
-        <p:nvSpPr>
-          <p:cNvPr id="13" name="Oval 12"/>
-          <p:cNvSpPr/>
-          <p:nvPr/>
-        </p:nvSpPr>
-        <p:spPr>
-          <a:xfrm>
-            <a:off x="548640" y="4439412"/>
-            <a:ext cx="384048" cy="384048"/>
-          </a:xfrm>
-          <a:prstGeom prst="ellipse">
-            <a:avLst/>
-          </a:prstGeom>
-          <a:solidFill>
-            <a:srgbClr val="0645AD"/>
-          </a:solidFill>
-          <a:ln>
-            <a:noFill/>
-          </a:ln>
-          <a:effectLst/>
-        </p:spPr>
-        <p:style>
-          <a:lnRef idx="1">
-            <a:schemeClr val="accent1"/>
-          </a:lnRef>
-          <a:fillRef idx="3">
-            <a:schemeClr val="accent1"/>
-          </a:fillRef>
-          <a:effectRef idx="2">
-            <a:schemeClr val="accent1"/>
-          </a:effectRef>
-          <a:fontRef idx="minor">
-            <a:schemeClr val="lt1"/>
-          </a:fontRef>
-        </p:style>
-        <p:txBody>
-          <a:bodyPr rtlCol="0" anchor="ctr" lIns="0" rIns="0" tIns="0" bIns="0"/>
-          <a:lstStyle/>
-          <a:p>
-            <a:pPr algn="ctr"/>
-            <a:r>
-              <a:rPr sz="1300" b="1">
-                <a:solidFill>
-                  <a:srgbClr val="FFFFFF"/>
-                </a:solidFill>
-                <a:latin typeface="Calibri"/>
-              </a:rPr>
-              <a:t>3</a:t>
-            </a:r>
-          </a:p>
-        </p:txBody>
-      </p:sp>
-      <p:sp>
-        <p:nvSpPr>
-          <p:cNvPr id="14" name="TextBox 13"/>
-          <p:cNvSpPr txBox="1"/>
-          <p:nvPr/>
-        </p:nvSpPr>
-        <p:spPr>
-          <a:xfrm>
-            <a:off x="1143000" y="4197096"/>
-            <a:ext cx="5943600" cy="868680"/>
-          </a:xfrm>
-          <a:prstGeom prst="rect">
-            <a:avLst/>
-          </a:prstGeom>
-          <a:noFill/>
-        </p:spPr>
-        <p:txBody>
-          <a:bodyPr wrap="square" anchor="ctr" lIns="0" rIns="0" tIns="0" bIns="0"/>
-          <a:lstStyle/>
-          <a:p>
-            <a:pPr algn="l"/>
-            <a:r>
-              <a:rPr sz="1700" b="0" i="0">
-                <a:solidFill>
-                  <a:srgbClr val="202122"/>
-                </a:solidFill>
-                <a:latin typeface="Calibri"/>
-              </a:rPr>
-              <a:t>Swap and critique another pair's wireframes for accessibility.</a:t>
-            </a:r>
-          </a:p>
-        </p:txBody>
-      </p:sp>
-      <p:sp>
-        <p:nvSpPr>
-          <p:cNvPr id="15" name="Oval 14"/>
-          <p:cNvSpPr/>
-          <p:nvPr/>
-        </p:nvSpPr>
-        <p:spPr>
-          <a:xfrm>
-            <a:off x="548640" y="5417820"/>
-            <a:ext cx="384048" cy="384048"/>
-          </a:xfrm>
-          <a:prstGeom prst="ellipse">
-            <a:avLst/>
-          </a:prstGeom>
-          <a:solidFill>
-            <a:srgbClr val="0645AD"/>
-          </a:solidFill>
-          <a:ln>
-            <a:noFill/>
-          </a:ln>
-          <a:effectLst/>
-        </p:spPr>
-        <p:style>
-          <a:lnRef idx="1">
-            <a:schemeClr val="accent1"/>
-          </a:lnRef>
-          <a:fillRef idx="3">
-            <a:schemeClr val="accent1"/>
-          </a:fillRef>
-          <a:effectRef idx="2">
-            <a:schemeClr val="accent1"/>
-          </a:effectRef>
-          <a:fontRef idx="minor">
-            <a:schemeClr val="lt1"/>
-          </a:fontRef>
-        </p:style>
-        <p:txBody>
-          <a:bodyPr rtlCol="0" anchor="ctr" lIns="0" rIns="0" tIns="0" bIns="0"/>
-          <a:lstStyle/>
-          <a:p>
-            <a:pPr algn="ctr"/>
-            <a:r>
-              <a:rPr sz="1300" b="1">
-                <a:solidFill>
-                  <a:srgbClr val="FFFFFF"/>
-                </a:solidFill>
-                <a:latin typeface="Calibri"/>
-              </a:rPr>
-              <a:t>4</a:t>
-            </a:r>
-          </a:p>
-        </p:txBody>
-      </p:sp>
-      <p:sp>
-        <p:nvSpPr>
-          <p:cNvPr id="16" name="TextBox 15"/>
-          <p:cNvSpPr txBox="1"/>
-          <p:nvPr/>
-        </p:nvSpPr>
-        <p:spPr>
-          <a:xfrm>
-            <a:off x="1143000" y="5175504"/>
-            <a:ext cx="5943600" cy="868680"/>
-          </a:xfrm>
-          <a:prstGeom prst="rect">
-            <a:avLst/>
-          </a:prstGeom>
-          <a:noFill/>
-        </p:spPr>
-        <p:txBody>
-          <a:bodyPr wrap="square" anchor="ctr" lIns="0" rIns="0" tIns="0" bIns="0"/>
-          <a:lstStyle/>
-          <a:p>
-            <a:pPr algn="l"/>
-            <a:r>
-              <a:rPr sz="1700" b="0" i="0">
-                <a:solidFill>
-                  <a:srgbClr val="202122"/>
-                </a:solidFill>
-                <a:latin typeface="Calibri"/>
-              </a:rPr>
-              <a:t>Improve one screen based on the feedback.</a:t>
-            </a:r>
-          </a:p>
-        </p:txBody>
-      </p:sp>
-      <p:sp>
-        <p:nvSpPr>
-          <p:cNvPr id="17" name="Rounded Rectangle 16"/>
-          <p:cNvSpPr/>
-          <p:nvPr/>
-        </p:nvSpPr>
-        <p:spPr>
-          <a:xfrm>
-            <a:off x="7772400" y="1508760"/>
-            <a:ext cx="3867912" cy="4572000"/>
-          </a:xfrm>
-          <a:prstGeom prst="roundRect">
-            <a:avLst>
-              <a:gd name="adj" fmla="val 8000"/>
-            </a:avLst>
-          </a:prstGeom>
-          <a:solidFill>
-            <a:srgbClr val="EAF3FF"/>
-          </a:solidFill>
-          <a:ln>
-            <a:noFill/>
-          </a:ln>
-          <a:effectLst/>
-        </p:spPr>
-        <p:style>
-          <a:lnRef idx="1">
-            <a:schemeClr val="accent1"/>
-          </a:lnRef>
-          <a:fillRef idx="3">
-            <a:schemeClr val="accent1"/>
-          </a:fillRef>
-          <a:effectRef idx="2">
-            <a:schemeClr val="accent1"/>
-          </a:effectRef>
-          <a:fontRef idx="minor">
-            <a:schemeClr val="lt1"/>
-          </a:fontRef>
-        </p:style>
-        <p:txBody>
-          <a:bodyPr rtlCol="0" anchor="ctr"/>
-          <a:lstStyle/>
-          <a:p/>
-        </p:txBody>
-      </p:sp>
-      <p:sp>
-        <p:nvSpPr>
-          <p:cNvPr id="18" name="TextBox 17"/>
-          <p:cNvSpPr txBox="1"/>
-          <p:nvPr/>
-        </p:nvSpPr>
-        <p:spPr>
-          <a:xfrm>
-            <a:off x="8046720" y="1737360"/>
-            <a:ext cx="3291840" cy="365760"/>
-          </a:xfrm>
-          <a:prstGeom prst="rect">
-            <a:avLst/>
-          </a:prstGeom>
-          <a:noFill/>
-        </p:spPr>
-        <p:txBody>
-          <a:bodyPr wrap="square" anchor="t" lIns="0" rIns="0" tIns="0" bIns="0"/>
-          <a:lstStyle/>
-          <a:p>
-            <a:pPr algn="l"/>
-            <a:r>
-              <a:rPr sz="1300" b="1" i="0">
-                <a:solidFill>
-                  <a:srgbClr val="0645AD"/>
-                </a:solidFill>
-                <a:latin typeface="Calibri"/>
-              </a:rPr>
-              <a:t>SUCCESS CRITERIA</a:t>
-            </a:r>
-          </a:p>
-        </p:txBody>
-      </p:sp>
-      <p:sp>
-        <p:nvSpPr>
-          <p:cNvPr id="19" name="TextBox 18"/>
-          <p:cNvSpPr txBox="1"/>
-          <p:nvPr/>
-        </p:nvSpPr>
-        <p:spPr>
-          <a:xfrm>
-            <a:off x="8046720" y="2240280"/>
-            <a:ext cx="3337560" cy="3657600"/>
-          </a:xfrm>
-          <a:prstGeom prst="rect">
-            <a:avLst/>
-          </a:prstGeom>
-          <a:noFill/>
-        </p:spPr>
-        <p:txBody>
-          <a:bodyPr wrap="square" lIns="0" rIns="0" tIns="0" bIns="0">
-            <a:spAutoFit/>
-          </a:bodyPr>
-          <a:lstStyle/>
-          <a:p>
-            <a:pPr marL="274320" indent="-274320">
-              <a:spcAft>
-                <a:spcPts val="810"/>
-              </a:spcAft>
-              <a:buClr>
-                <a:srgbClr val="0645AD"/>
-              </a:buClr>
-              <a:buFont typeface="Arial"/>
-              <a:buChar char="•"/>
-            </a:pPr>
-            <a:r>
-              <a:rPr sz="1800" b="0">
-                <a:solidFill>
-                  <a:srgbClr val="202122"/>
-                </a:solidFill>
-                <a:latin typeface="Calibri"/>
-              </a:rPr>
-              <a:t>Clear visual hierarchy</a:t>
-            </a:r>
-          </a:p>
-          <a:p>
-            <a:pPr marL="274320" indent="-274320">
-              <a:spcAft>
-                <a:spcPts val="810"/>
-              </a:spcAft>
-              <a:buClr>
-                <a:srgbClr val="0645AD"/>
-              </a:buClr>
-              <a:buFont typeface="Arial"/>
-              <a:buChar char="•"/>
-            </a:pPr>
-            <a:r>
-              <a:rPr sz="1800" b="0">
-                <a:solidFill>
-                  <a:srgbClr val="202122"/>
-                </a:solidFill>
-                <a:latin typeface="Calibri"/>
-              </a:rPr>
-              <a:t>Accessibility considered</a:t>
-            </a:r>
-          </a:p>
-          <a:p>
-            <a:pPr marL="274320" indent="-274320">
-              <a:spcAft>
-                <a:spcPts val="810"/>
-              </a:spcAft>
-              <a:buClr>
-                <a:srgbClr val="0645AD"/>
-              </a:buClr>
-              <a:buFont typeface="Arial"/>
-              <a:buChar char="•"/>
-            </a:pPr>
-            <a:r>
-              <a:rPr sz="1800" b="0">
-                <a:solidFill>
-                  <a:srgbClr val="202122"/>
-                </a:solidFill>
-                <a:latin typeface="Calibri"/>
-              </a:rPr>
-              <a:t>Feedback acted on</a:t>
+              <a:rPr sz="1300" b="0" i="1">
+                <a:solidFill>
+                  <a:srgbClr val="54595D"/>
+                </a:solidFill>
+                <a:latin typeface="Calibri"/>
+              </a:rPr>
+              <a:t>Answer on mini whiteboards or in your book. Answers are in the speaker notes.</a:t>
             </a:r>
           </a:p>
         </p:txBody>
@@ -9088,7 +10669,7 @@
     <p:bg>
       <p:bgPr>
         <a:solidFill>
-          <a:srgbClr val="03306E"/>
+          <a:srgbClr val="FFFFFF"/>
         </a:solidFill>
         <a:effectLst/>
       </p:bgPr>
@@ -9124,7 +10705,7 @@
             <a:r>
               <a:rPr sz="1100" b="1" i="0">
                 <a:solidFill>
-                  <a:srgbClr val="A9C8F0"/>
+                  <a:srgbClr val="54595D"/>
                 </a:solidFill>
                 <a:latin typeface="Calibri"/>
               </a:rPr>
@@ -9157,25 +10738,135 @@
             <a:r>
               <a:rPr sz="3200" b="1" i="0">
                 <a:solidFill>
-                  <a:srgbClr val="FFFFFF"/>
+                  <a:srgbClr val="03306E"/>
                 </a:solidFill>
                 <a:latin typeface="Cambria"/>
               </a:rPr>
-              <a:t>Exit ticket</a:t>
-            </a:r>
-          </a:p>
-        </p:txBody>
-      </p:sp>
-      <p:sp>
-        <p:nvSpPr>
-          <p:cNvPr id="4" name="Oval 3"/>
+              <a:t>Design decisions</a:t>
+            </a:r>
+          </a:p>
+        </p:txBody>
+      </p:sp>
+      <p:sp>
+        <p:nvSpPr>
+          <p:cNvPr id="4" name="TextBox 3"/>
+          <p:cNvSpPr txBox="1"/>
+          <p:nvPr/>
+        </p:nvSpPr>
+        <p:spPr>
+          <a:xfrm>
+            <a:off x="548640" y="6446520"/>
+            <a:ext cx="8229600" cy="274320"/>
+          </a:xfrm>
+          <a:prstGeom prst="rect">
+            <a:avLst/>
+          </a:prstGeom>
+          <a:noFill/>
+        </p:spPr>
+        <p:txBody>
+          <a:bodyPr wrap="square" anchor="t" lIns="0" rIns="0" tIns="0" bIns="0"/>
+          <a:lstStyle/>
+          <a:p>
+            <a:pPr algn="l"/>
+            <a:r>
+              <a:rPr sz="1000" b="0" i="0">
+                <a:solidFill>
+                  <a:srgbClr val="54595D"/>
+                </a:solidFill>
+                <a:latin typeface="Calibri"/>
+              </a:rPr>
+              <a:t>Digital Software Development T Level  ·  UX and UI Design</a:t>
+            </a:r>
+          </a:p>
+        </p:txBody>
+      </p:sp>
+      <p:sp>
+        <p:nvSpPr>
+          <p:cNvPr id="5" name="TextBox 4"/>
+          <p:cNvSpPr txBox="1"/>
+          <p:nvPr/>
+        </p:nvSpPr>
+        <p:spPr>
+          <a:xfrm>
+            <a:off x="10728655" y="6446520"/>
+            <a:ext cx="914400" cy="274320"/>
+          </a:xfrm>
+          <a:prstGeom prst="rect">
+            <a:avLst/>
+          </a:prstGeom>
+          <a:noFill/>
+        </p:spPr>
+        <p:txBody>
+          <a:bodyPr wrap="square" anchor="t" lIns="0" rIns="0" tIns="0" bIns="0"/>
+          <a:lstStyle/>
+          <a:p>
+            <a:pPr algn="r"/>
+            <a:r>
+              <a:rPr sz="1000" b="0" i="0">
+                <a:solidFill>
+                  <a:srgbClr val="54595D"/>
+                </a:solidFill>
+                <a:latin typeface="Calibri"/>
+              </a:rPr>
+              <a:t>9</a:t>
+            </a:r>
+          </a:p>
+        </p:txBody>
+      </p:sp>
+      <p:sp>
+        <p:nvSpPr>
+          <p:cNvPr id="6" name="Rounded Rectangle 5"/>
           <p:cNvSpPr/>
           <p:nvPr/>
         </p:nvSpPr>
         <p:spPr>
           <a:xfrm>
-            <a:off x="548640" y="1737360"/>
-            <a:ext cx="502920" cy="502920"/>
+            <a:off x="548640" y="1600200"/>
+            <a:ext cx="5410047" cy="2148840"/>
+          </a:xfrm>
+          <a:prstGeom prst="roundRect">
+            <a:avLst>
+              <a:gd name="adj" fmla="val 6000"/>
+            </a:avLst>
+          </a:prstGeom>
+          <a:solidFill>
+            <a:srgbClr val="EAF3FF"/>
+          </a:solidFill>
+          <a:ln>
+            <a:noFill/>
+          </a:ln>
+          <a:effectLst/>
+        </p:spPr>
+        <p:style>
+          <a:lnRef idx="1">
+            <a:schemeClr val="accent1"/>
+          </a:lnRef>
+          <a:fillRef idx="3">
+            <a:schemeClr val="accent1"/>
+          </a:fillRef>
+          <a:effectRef idx="2">
+            <a:schemeClr val="accent1"/>
+          </a:effectRef>
+          <a:fontRef idx="minor">
+            <a:schemeClr val="lt1"/>
+          </a:fontRef>
+        </p:style>
+        <p:txBody>
+          <a:bodyPr rtlCol="0" anchor="ctr"/>
+          <a:lstStyle/>
+          <a:p/>
+        </p:txBody>
+      </p:sp>
+      <p:sp>
+        <p:nvSpPr>
+          <p:cNvPr id="7" name="Oval 6"/>
+          <p:cNvSpPr/>
+          <p:nvPr/>
+        </p:nvSpPr>
+        <p:spPr>
+          <a:xfrm>
+            <a:off x="777240" y="1828800"/>
+            <a:ext cx="457200" cy="457200"/>
           </a:xfrm>
           <a:prstGeom prst="ellipse">
             <a:avLst/>
@@ -9208,7 +10899,7 @@
           <a:p>
             <a:pPr algn="ctr"/>
             <a:r>
-              <a:rPr sz="1700" b="1">
+              <a:rPr sz="1500" b="1">
                 <a:solidFill>
                   <a:srgbClr val="202122"/>
                 </a:solidFill>
@@ -9221,14 +10912,14 @@
       </p:sp>
       <p:sp>
         <p:nvSpPr>
-          <p:cNvPr id="5" name="TextBox 4"/>
+          <p:cNvPr id="8" name="TextBox 7"/>
           <p:cNvSpPr txBox="1"/>
           <p:nvPr/>
         </p:nvSpPr>
         <p:spPr>
           <a:xfrm>
-            <a:off x="1325880" y="1645920"/>
-            <a:ext cx="6583680" cy="822960"/>
+            <a:off x="1371600" y="1801368"/>
+            <a:ext cx="4404207" cy="512064"/>
           </a:xfrm>
           <a:prstGeom prst="rect">
             <a:avLst/>
@@ -9241,27 +10932,104 @@
           <a:p>
             <a:pPr algn="l"/>
             <a:r>
+              <a:rPr sz="1900" b="1" i="0">
+                <a:solidFill>
+                  <a:srgbClr val="03306E"/>
+                </a:solidFill>
+                <a:latin typeface="Calibri"/>
+              </a:rPr>
+              <a:t>Platform</a:t>
+            </a:r>
+          </a:p>
+        </p:txBody>
+      </p:sp>
+      <p:sp>
+        <p:nvSpPr>
+          <p:cNvPr id="9" name="TextBox 8"/>
+          <p:cNvSpPr txBox="1"/>
+          <p:nvPr/>
+        </p:nvSpPr>
+        <p:spPr>
+          <a:xfrm>
+            <a:off x="777240" y="2468880"/>
+            <a:ext cx="4952847" cy="1143000"/>
+          </a:xfrm>
+          <a:prstGeom prst="rect">
+            <a:avLst/>
+          </a:prstGeom>
+          <a:noFill/>
+        </p:spPr>
+        <p:txBody>
+          <a:bodyPr wrap="square" anchor="t" lIns="0" rIns="0" tIns="0" bIns="0"/>
+          <a:lstStyle/>
+          <a:p>
+            <a:pPr algn="l"/>
+            <a:r>
               <a:rPr sz="2000" b="0" i="0">
                 <a:solidFill>
-                  <a:srgbClr val="FFFFFF"/>
-                </a:solidFill>
-                <a:latin typeface="Calibri"/>
-              </a:rPr>
-              <a:t>Name one UX principle your favourite app uses well.</a:t>
-            </a:r>
-          </a:p>
-        </p:txBody>
-      </p:sp>
-      <p:sp>
-        <p:nvSpPr>
-          <p:cNvPr id="6" name="Oval 5"/>
+                  <a:srgbClr val="202122"/>
+                </a:solidFill>
+                <a:latin typeface="Calibri"/>
+              </a:rPr>
+              <a:t>Browser support and target device.</a:t>
+            </a:r>
+          </a:p>
+        </p:txBody>
+      </p:sp>
+      <p:sp>
+        <p:nvSpPr>
+          <p:cNvPr id="10" name="Rounded Rectangle 9"/>
           <p:cNvSpPr/>
           <p:nvPr/>
         </p:nvSpPr>
         <p:spPr>
           <a:xfrm>
-            <a:off x="548640" y="2697480"/>
-            <a:ext cx="502920" cy="502920"/>
+            <a:off x="6233007" y="1600200"/>
+            <a:ext cx="5410047" cy="2148840"/>
+          </a:xfrm>
+          <a:prstGeom prst="roundRect">
+            <a:avLst>
+              <a:gd name="adj" fmla="val 6000"/>
+            </a:avLst>
+          </a:prstGeom>
+          <a:solidFill>
+            <a:srgbClr val="EAF3FF"/>
+          </a:solidFill>
+          <a:ln>
+            <a:noFill/>
+          </a:ln>
+          <a:effectLst/>
+        </p:spPr>
+        <p:style>
+          <a:lnRef idx="1">
+            <a:schemeClr val="accent1"/>
+          </a:lnRef>
+          <a:fillRef idx="3">
+            <a:schemeClr val="accent1"/>
+          </a:fillRef>
+          <a:effectRef idx="2">
+            <a:schemeClr val="accent1"/>
+          </a:effectRef>
+          <a:fontRef idx="minor">
+            <a:schemeClr val="lt1"/>
+          </a:fontRef>
+        </p:style>
+        <p:txBody>
+          <a:bodyPr rtlCol="0" anchor="ctr"/>
+          <a:lstStyle/>
+          <a:p/>
+        </p:txBody>
+      </p:sp>
+      <p:sp>
+        <p:nvSpPr>
+          <p:cNvPr id="11" name="Oval 10"/>
+          <p:cNvSpPr/>
+          <p:nvPr/>
+        </p:nvSpPr>
+        <p:spPr>
+          <a:xfrm>
+            <a:off x="6461607" y="1828800"/>
+            <a:ext cx="457200" cy="457200"/>
           </a:xfrm>
           <a:prstGeom prst="ellipse">
             <a:avLst/>
@@ -9294,7 +11062,7 @@
           <a:p>
             <a:pPr algn="ctr"/>
             <a:r>
-              <a:rPr sz="1700" b="1">
+              <a:rPr sz="1500" b="1">
                 <a:solidFill>
                   <a:srgbClr val="202122"/>
                 </a:solidFill>
@@ -9307,14 +11075,14 @@
       </p:sp>
       <p:sp>
         <p:nvSpPr>
-          <p:cNvPr id="7" name="TextBox 6"/>
+          <p:cNvPr id="12" name="TextBox 11"/>
           <p:cNvSpPr txBox="1"/>
           <p:nvPr/>
         </p:nvSpPr>
         <p:spPr>
           <a:xfrm>
-            <a:off x="1325880" y="2606040"/>
-            <a:ext cx="6583680" cy="822960"/>
+            <a:off x="7055967" y="1801368"/>
+            <a:ext cx="4404207" cy="512064"/>
           </a:xfrm>
           <a:prstGeom prst="rect">
             <a:avLst/>
@@ -9327,27 +11095,104 @@
           <a:p>
             <a:pPr algn="l"/>
             <a:r>
+              <a:rPr sz="1900" b="1" i="0">
+                <a:solidFill>
+                  <a:srgbClr val="03306E"/>
+                </a:solidFill>
+                <a:latin typeface="Calibri"/>
+              </a:rPr>
+              <a:t>Users</a:t>
+            </a:r>
+          </a:p>
+        </p:txBody>
+      </p:sp>
+      <p:sp>
+        <p:nvSpPr>
+          <p:cNvPr id="13" name="TextBox 12"/>
+          <p:cNvSpPr txBox="1"/>
+          <p:nvPr/>
+        </p:nvSpPr>
+        <p:spPr>
+          <a:xfrm>
+            <a:off x="6461607" y="2468880"/>
+            <a:ext cx="4952847" cy="1143000"/>
+          </a:xfrm>
+          <a:prstGeom prst="rect">
+            <a:avLst/>
+          </a:prstGeom>
+          <a:noFill/>
+        </p:spPr>
+        <p:txBody>
+          <a:bodyPr wrap="square" anchor="t" lIns="0" rIns="0" tIns="0" bIns="0"/>
+          <a:lstStyle/>
+          <a:p>
+            <a:pPr algn="l"/>
+            <a:r>
               <a:rPr sz="2000" b="0" i="0">
                 <a:solidFill>
-                  <a:srgbClr val="FFFFFF"/>
-                </a:solidFill>
-                <a:latin typeface="Calibri"/>
-              </a:rPr>
-              <a:t>Why design for touch and mouse differently?</a:t>
-            </a:r>
-          </a:p>
-        </p:txBody>
-      </p:sp>
-      <p:sp>
-        <p:nvSpPr>
-          <p:cNvPr id="8" name="Oval 7"/>
+                  <a:srgbClr val="202122"/>
+                </a:solidFill>
+                <a:latin typeface="Calibri"/>
+              </a:rPr>
+              <a:t>Characteristics, accessibility and input method: voice, text, touch, mouse.</a:t>
+            </a:r>
+          </a:p>
+        </p:txBody>
+      </p:sp>
+      <p:sp>
+        <p:nvSpPr>
+          <p:cNvPr id="14" name="Rounded Rectangle 13"/>
           <p:cNvSpPr/>
           <p:nvPr/>
         </p:nvSpPr>
         <p:spPr>
           <a:xfrm>
-            <a:off x="548640" y="3657600"/>
-            <a:ext cx="502920" cy="502920"/>
+            <a:off x="548640" y="4023360"/>
+            <a:ext cx="5410047" cy="2148840"/>
+          </a:xfrm>
+          <a:prstGeom prst="roundRect">
+            <a:avLst>
+              <a:gd name="adj" fmla="val 6000"/>
+            </a:avLst>
+          </a:prstGeom>
+          <a:solidFill>
+            <a:srgbClr val="EAF3FF"/>
+          </a:solidFill>
+          <a:ln>
+            <a:noFill/>
+          </a:ln>
+          <a:effectLst/>
+        </p:spPr>
+        <p:style>
+          <a:lnRef idx="1">
+            <a:schemeClr val="accent1"/>
+          </a:lnRef>
+          <a:fillRef idx="3">
+            <a:schemeClr val="accent1"/>
+          </a:fillRef>
+          <a:effectRef idx="2">
+            <a:schemeClr val="accent1"/>
+          </a:effectRef>
+          <a:fontRef idx="minor">
+            <a:schemeClr val="lt1"/>
+          </a:fontRef>
+        </p:style>
+        <p:txBody>
+          <a:bodyPr rtlCol="0" anchor="ctr"/>
+          <a:lstStyle/>
+          <a:p/>
+        </p:txBody>
+      </p:sp>
+      <p:sp>
+        <p:nvSpPr>
+          <p:cNvPr id="15" name="Oval 14"/>
+          <p:cNvSpPr/>
+          <p:nvPr/>
+        </p:nvSpPr>
+        <p:spPr>
+          <a:xfrm>
+            <a:off x="777240" y="4251960"/>
+            <a:ext cx="457200" cy="457200"/>
           </a:xfrm>
           <a:prstGeom prst="ellipse">
             <a:avLst/>
@@ -9380,7 +11225,7 @@
           <a:p>
             <a:pPr algn="ctr"/>
             <a:r>
-              <a:rPr sz="1700" b="1">
+              <a:rPr sz="1500" b="1">
                 <a:solidFill>
                   <a:srgbClr val="202122"/>
                 </a:solidFill>
@@ -9393,14 +11238,14 @@
       </p:sp>
       <p:sp>
         <p:nvSpPr>
-          <p:cNvPr id="9" name="TextBox 8"/>
+          <p:cNvPr id="16" name="TextBox 15"/>
           <p:cNvSpPr txBox="1"/>
           <p:nvPr/>
         </p:nvSpPr>
         <p:spPr>
           <a:xfrm>
-            <a:off x="1325880" y="3566160"/>
-            <a:ext cx="6583680" cy="822960"/>
+            <a:off x="1371600" y="4224528"/>
+            <a:ext cx="4404207" cy="512064"/>
           </a:xfrm>
           <a:prstGeom prst="rect">
             <a:avLst/>
@@ -9413,35 +11258,68 @@
           <a:p>
             <a:pPr algn="l"/>
             <a:r>
+              <a:rPr sz="1900" b="1" i="0">
+                <a:solidFill>
+                  <a:srgbClr val="03306E"/>
+                </a:solidFill>
+                <a:latin typeface="Calibri"/>
+              </a:rPr>
+              <a:t>Bandwidth</a:t>
+            </a:r>
+          </a:p>
+        </p:txBody>
+      </p:sp>
+      <p:sp>
+        <p:nvSpPr>
+          <p:cNvPr id="17" name="TextBox 16"/>
+          <p:cNvSpPr txBox="1"/>
+          <p:nvPr/>
+        </p:nvSpPr>
+        <p:spPr>
+          <a:xfrm>
+            <a:off x="777240" y="4892040"/>
+            <a:ext cx="4952847" cy="1143000"/>
+          </a:xfrm>
+          <a:prstGeom prst="rect">
+            <a:avLst/>
+          </a:prstGeom>
+          <a:noFill/>
+        </p:spPr>
+        <p:txBody>
+          <a:bodyPr wrap="square" anchor="t" lIns="0" rIns="0" tIns="0" bIns="0"/>
+          <a:lstStyle/>
+          <a:p>
+            <a:pPr algn="l"/>
+            <a:r>
               <a:rPr sz="2000" b="0" i="0">
                 <a:solidFill>
-                  <a:srgbClr val="FFFFFF"/>
-                </a:solidFill>
-                <a:latin typeface="Calibri"/>
-              </a:rPr>
-              <a:t>What is a style guide for?</a:t>
-            </a:r>
-          </a:p>
-        </p:txBody>
-      </p:sp>
-      <p:sp>
-        <p:nvSpPr>
-          <p:cNvPr id="10" name="Rounded Rectangle 9"/>
+                  <a:srgbClr val="202122"/>
+                </a:solidFill>
+                <a:latin typeface="Calibri"/>
+              </a:rPr>
+              <a:t>What users can download.</a:t>
+            </a:r>
+          </a:p>
+        </p:txBody>
+      </p:sp>
+      <p:sp>
+        <p:nvSpPr>
+          <p:cNvPr id="18" name="Rounded Rectangle 17"/>
           <p:cNvSpPr/>
           <p:nvPr/>
         </p:nvSpPr>
         <p:spPr>
           <a:xfrm>
-            <a:off x="8229600" y="1645920"/>
-            <a:ext cx="3410712" cy="2926080"/>
+            <a:off x="6233007" y="4023360"/>
+            <a:ext cx="5410047" cy="2148840"/>
           </a:xfrm>
           <a:prstGeom prst="roundRect">
             <a:avLst>
-              <a:gd name="adj" fmla="val 8000"/>
+              <a:gd name="adj" fmla="val 6000"/>
             </a:avLst>
           </a:prstGeom>
           <a:solidFill>
-            <a:srgbClr val="0645AD"/>
+            <a:srgbClr val="EAF3FF"/>
           </a:solidFill>
           <a:ln>
             <a:noFill/>
@@ -9470,14 +11348,67 @@
       </p:sp>
       <p:sp>
         <p:nvSpPr>
-          <p:cNvPr id="11" name="TextBox 10"/>
+          <p:cNvPr id="19" name="Oval 18"/>
+          <p:cNvSpPr/>
+          <p:nvPr/>
+        </p:nvSpPr>
+        <p:spPr>
+          <a:xfrm>
+            <a:off x="6461607" y="4251960"/>
+            <a:ext cx="457200" cy="457200"/>
+          </a:xfrm>
+          <a:prstGeom prst="ellipse">
+            <a:avLst/>
+          </a:prstGeom>
+          <a:solidFill>
+            <a:srgbClr val="33C17A"/>
+          </a:solidFill>
+          <a:ln>
+            <a:noFill/>
+          </a:ln>
+          <a:effectLst/>
+        </p:spPr>
+        <p:style>
+          <a:lnRef idx="1">
+            <a:schemeClr val="accent1"/>
+          </a:lnRef>
+          <a:fillRef idx="3">
+            <a:schemeClr val="accent1"/>
+          </a:fillRef>
+          <a:effectRef idx="2">
+            <a:schemeClr val="accent1"/>
+          </a:effectRef>
+          <a:fontRef idx="minor">
+            <a:schemeClr val="lt1"/>
+          </a:fontRef>
+        </p:style>
+        <p:txBody>
+          <a:bodyPr rtlCol="0" anchor="ctr" lIns="0" rIns="0" tIns="0" bIns="0"/>
+          <a:lstStyle/>
+          <a:p>
+            <a:pPr algn="ctr"/>
+            <a:r>
+              <a:rPr sz="1500" b="1">
+                <a:solidFill>
+                  <a:srgbClr val="202122"/>
+                </a:solidFill>
+                <a:latin typeface="Calibri"/>
+              </a:rPr>
+              <a:t>4</a:t>
+            </a:r>
+          </a:p>
+        </p:txBody>
+      </p:sp>
+      <p:sp>
+        <p:nvSpPr>
+          <p:cNvPr id="20" name="TextBox 19"/>
           <p:cNvSpPr txBox="1"/>
           <p:nvPr/>
         </p:nvSpPr>
         <p:spPr>
           <a:xfrm>
-            <a:off x="8503920" y="1874519"/>
-            <a:ext cx="2926080" cy="365760"/>
+            <a:off x="7055967" y="4224528"/>
+            <a:ext cx="4404207" cy="512064"/>
           </a:xfrm>
           <a:prstGeom prst="rect">
             <a:avLst/>
@@ -9485,117 +11416,51 @@
           <a:noFill/>
         </p:spPr>
         <p:txBody>
+          <a:bodyPr wrap="square" anchor="ctr" lIns="0" rIns="0" tIns="0" bIns="0"/>
+          <a:lstStyle/>
+          <a:p>
+            <a:pPr algn="l"/>
+            <a:r>
+              <a:rPr sz="1900" b="1" i="0">
+                <a:solidFill>
+                  <a:srgbClr val="03306E"/>
+                </a:solidFill>
+                <a:latin typeface="Calibri"/>
+              </a:rPr>
+              <a:t>Brand</a:t>
+            </a:r>
+          </a:p>
+        </p:txBody>
+      </p:sp>
+      <p:sp>
+        <p:nvSpPr>
+          <p:cNvPr id="21" name="TextBox 20"/>
+          <p:cNvSpPr txBox="1"/>
+          <p:nvPr/>
+        </p:nvSpPr>
+        <p:spPr>
+          <a:xfrm>
+            <a:off x="6461607" y="4892040"/>
+            <a:ext cx="4952847" cy="1143000"/>
+          </a:xfrm>
+          <a:prstGeom prst="rect">
+            <a:avLst/>
+          </a:prstGeom>
+          <a:noFill/>
+        </p:spPr>
+        <p:txBody>
           <a:bodyPr wrap="square" anchor="t" lIns="0" rIns="0" tIns="0" bIns="0"/>
           <a:lstStyle/>
           <a:p>
             <a:pPr algn="l"/>
             <a:r>
-              <a:rPr sz="1300" b="1" i="0">
-                <a:solidFill>
-                  <a:srgbClr val="A9C8F0"/>
-                </a:solidFill>
-                <a:latin typeface="Calibri"/>
-              </a:rPr>
-              <a:t>REVISE THIS TOPIC</a:t>
-            </a:r>
-          </a:p>
-        </p:txBody>
-      </p:sp>
-      <p:sp>
-        <p:nvSpPr>
-          <p:cNvPr id="12" name="TextBox 11"/>
-          <p:cNvSpPr txBox="1"/>
-          <p:nvPr/>
-        </p:nvSpPr>
-        <p:spPr>
-          <a:xfrm>
-            <a:off x="8503920" y="2286000"/>
-            <a:ext cx="2926080" cy="548640"/>
-          </a:xfrm>
-          <a:prstGeom prst="rect">
-            <a:avLst/>
-          </a:prstGeom>
-          <a:noFill/>
-        </p:spPr>
-        <p:txBody>
-          <a:bodyPr wrap="square" anchor="t" lIns="0" rIns="0" tIns="0" bIns="0"/>
-          <a:lstStyle/>
-          <a:p>
-            <a:pPr algn="l"/>
-            <a:r>
-              <a:rPr sz="1400" b="0" i="0">
-                <a:solidFill>
-                  <a:srgbClr val="FFFFFF"/>
-                </a:solidFill>
-                <a:latin typeface="Calibri"/>
-              </a:rPr>
-              <a:t>Revision notes for this lesson are on the study wiki:</a:t>
-            </a:r>
-          </a:p>
-        </p:txBody>
-      </p:sp>
-      <p:sp>
-        <p:nvSpPr>
-          <p:cNvPr id="13" name="TextBox 12"/>
-          <p:cNvSpPr txBox="1"/>
-          <p:nvPr/>
-        </p:nvSpPr>
-        <p:spPr>
-          <a:xfrm>
-            <a:off x="8503920" y="2926080"/>
-            <a:ext cx="2926080" cy="1463040"/>
-          </a:xfrm>
-          <a:prstGeom prst="rect">
-            <a:avLst/>
-          </a:prstGeom>
-          <a:noFill/>
-        </p:spPr>
-        <p:txBody>
-          <a:bodyPr wrap="square" anchor="t" lIns="0" rIns="0" tIns="0" bIns="0"/>
-          <a:lstStyle/>
-          <a:p>
-            <a:pPr algn="l"/>
-            <a:r>
-              <a:rPr sz="2000" b="1" i="0">
-                <a:solidFill>
-                  <a:srgbClr val="FFFFFF"/>
-                </a:solidFill>
-                <a:latin typeface="Cambria"/>
-              </a:rPr>
-              <a:t>Design</a:t>
-            </a:r>
-          </a:p>
-        </p:txBody>
-      </p:sp>
-      <p:sp>
-        <p:nvSpPr>
-          <p:cNvPr id="14" name="TextBox 13"/>
-          <p:cNvSpPr txBox="1"/>
-          <p:nvPr/>
-        </p:nvSpPr>
-        <p:spPr>
-          <a:xfrm>
-            <a:off x="548640" y="5669280"/>
-            <a:ext cx="11094415" cy="548640"/>
-          </a:xfrm>
-          <a:prstGeom prst="rect">
-            <a:avLst/>
-          </a:prstGeom>
-          <a:noFill/>
-        </p:spPr>
-        <p:txBody>
-          <a:bodyPr wrap="square" anchor="t" lIns="0" rIns="0" tIns="0" bIns="0"/>
-          <a:lstStyle/>
-          <a:p>
-            <a:pPr algn="l"/>
-            <a:r>
-              <a:rPr sz="1200" b="0" i="0">
-                <a:solidFill>
-                  <a:srgbClr val="A9C8F0"/>
-                </a:solidFill>
-                <a:latin typeface="Calibri"/>
-              </a:rPr>
-              <a:t>https://lana6478.github.io/T-level-Digital-Software-Development/#/02-occupational-specialism/04-design.md</a:t>
+              <a:rPr sz="2000" b="0" i="0">
+                <a:solidFill>
+                  <a:srgbClr val="202122"/>
+                </a:solidFill>
+                <a:latin typeface="Calibri"/>
+              </a:rPr>
+              <a:t>Style and branding.</a:t>
             </a:r>
           </a:p>
         </p:txBody>
